--- a/docs/presentaciones/Propuesta-cliente-cartel.pptx
+++ b/docs/presentaciones/Propuesta-cliente-cartel.pptx
@@ -5,7 +5,7 @@
     <p:sldMasterId id="2147483648" r:id="rId1"/>
   </p:sldMasterIdLst>
   <p:notesMasterIdLst>
-    <p:notesMasterId r:id="rId14"/>
+    <p:notesMasterId r:id="rId15"/>
   </p:notesMasterIdLst>
   <p:sldIdLst>
     <p:sldId id="256" r:id="rId2"/>
@@ -20,6 +20,7 @@
     <p:sldId id="265" r:id="rId11"/>
     <p:sldId id="266" r:id="rId12"/>
     <p:sldId id="267" r:id="rId13"/>
+    <p:sldId id="268" r:id="rId14"/>
   </p:sldIdLst>
   <p:sldSz cx="12192000" cy="6858000"/>
   <p:notesSz cx="6858000" cy="12192000"/>
@@ -148,7 +149,7 @@
     </p:spTree>
     <p:extLst>
       <p:ext uri="{BB962C8B-B14F-4D97-AF65-F5344CB8AC3E}">
-        <p14:creationId xmlns:p14="http://schemas.microsoft.com/office/powerpoint/2010/main" val="3082409170"/>
+        <p14:creationId xmlns:p14="http://schemas.microsoft.com/office/powerpoint/2010/main" val="353711764"/>
       </p:ext>
     </p:extLst>
   </p:cSld>
@@ -547,10 +548,7 @@
           <a:bodyPr/>
           <a:lstStyle/>
           <a:p>
-            <a:r>
-              <a:rPr lang="en-US" dirty="0"/>
-              <a:t>Cierre: pedir la confirmación en la reunión y dejar agendados los tres encuentros de la semana 1.</a:t>
-            </a:r>
+            <a:endParaRPr lang="en-US" dirty="0"/>
           </a:p>
         </p:txBody>
       </p:sp>
@@ -572,6 +570,93 @@
             <a:fld id="{F7021451-1387-4CA6-816F-3879F97B5CBC}" type="slidenum">
               <a:rPr lang="en-US"/>
               <a:t>12</a:t>
+            </a:fld>
+            <a:endParaRPr lang="en-US"/>
+          </a:p>
+        </p:txBody>
+      </p:sp>
+    </p:spTree>
+    <p:extLst>
+      <p:ext uri="{BB962C8B-B14F-4D97-AF65-F5344CB8AC3E}">
+        <p14:creationId xmlns:p14="http://schemas.microsoft.com/office/powerpoint/2010/main" val="1024086991"/>
+      </p:ext>
+    </p:extLst>
+  </p:cSld>
+  <p:clrMapOvr>
+    <a:masterClrMapping/>
+  </p:clrMapOvr>
+</p:notes>
+</file>
+
+<file path=ppt/notesSlides/notesSlide13.xml><?xml version="1.0" encoding="utf-8"?>
+<p:notes xmlns:a="http://schemas.openxmlformats.org/drawingml/2006/main" xmlns:r="http://schemas.openxmlformats.org/officeDocument/2006/relationships" xmlns:p="http://schemas.openxmlformats.org/presentationml/2006/main">
+  <p:cSld>
+    <p:spTree>
+      <p:nvGrpSpPr>
+        <p:cNvPr id="1" name=""/>
+        <p:cNvGrpSpPr/>
+        <p:nvPr/>
+      </p:nvGrpSpPr>
+      <p:grpSpPr>
+        <a:xfrm>
+          <a:off x="0" y="0"/>
+          <a:ext cx="0" cy="0"/>
+          <a:chOff x="0" y="0"/>
+          <a:chExt cx="0" cy="0"/>
+        </a:xfrm>
+      </p:grpSpPr>
+      <p:sp>
+        <p:nvSpPr>
+          <p:cNvPr id="2" name="Slide Image Placeholder 1"/>
+          <p:cNvSpPr>
+            <a:spLocks noGrp="1" noRot="1" noChangeAspect="1"/>
+          </p:cNvSpPr>
+          <p:nvPr>
+            <p:ph type="sldImg"/>
+          </p:nvPr>
+        </p:nvSpPr>
+        <p:spPr/>
+      </p:sp>
+      <p:sp>
+        <p:nvSpPr>
+          <p:cNvPr id="3" name="Notes Placeholder 2"/>
+          <p:cNvSpPr>
+            <a:spLocks noGrp="1"/>
+          </p:cNvSpPr>
+          <p:nvPr>
+            <p:ph type="body" idx="1"/>
+          </p:nvPr>
+        </p:nvSpPr>
+        <p:spPr/>
+        <p:txBody>
+          <a:bodyPr/>
+          <a:lstStyle/>
+          <a:p>
+            <a:r>
+              <a:rPr lang="en-US" dirty="0"/>
+              <a:t>Cierre: pedir la confirmación en la reunión y dejar agendados los tres encuentros de la semana 1.</a:t>
+            </a:r>
+          </a:p>
+        </p:txBody>
+      </p:sp>
+      <p:sp>
+        <p:nvSpPr>
+          <p:cNvPr id="4" name="Slide Number Placeholder 3"/>
+          <p:cNvSpPr>
+            <a:spLocks noGrp="1"/>
+          </p:cNvSpPr>
+          <p:nvPr>
+            <p:ph type="sldNum" sz="quarter" idx="10"/>
+          </p:nvPr>
+        </p:nvSpPr>
+        <p:spPr/>
+        <p:txBody>
+          <a:bodyPr/>
+          <a:lstStyle/>
+          <a:p>
+            <a:fld id="{F7021451-1387-4CA6-816F-3879F97B5CBC}" type="slidenum">
+              <a:rPr lang="en-US"/>
+              <a:t>13</a:t>
             </a:fld>
             <a:endParaRPr lang="en-US"/>
           </a:p>
@@ -721,7 +806,10 @@
           <a:bodyPr/>
           <a:lstStyle/>
           <a:p>
-            <a:endParaRPr lang="en-US" dirty="0"/>
+            <a:r>
+              <a:rPr lang="en-US" dirty="0"/>
+              <a:t>Es la diapositiva clave: acá se entiende de dónde sale el ahorro. Aclarar que es un ejemplo y que el aprovechamiento real se mide en la semana 4 con trabajos propios. Si preguntan por letras corpóreas, engancha con la diapositiva de la semana 4.</a:t>
+            </a:r>
           </a:p>
         </p:txBody>
       </p:sp>
@@ -1926,7 +2014,14 @@
               </a:rPr>
               <a:t>Megacarteles</a:t>
             </a:r>
-            <a:endParaRPr lang="en-US" sz="1500" dirty="0"/>
+            <a:endParaRPr lang="en-US" sz="1500" dirty="0">
+              <a:solidFill>
+                <a:srgbClr val="FFFFFF"/>
+              </a:solidFill>
+              <a:latin typeface="Calibri" pitchFamily="34" charset="0"/>
+              <a:ea typeface="Calibri" pitchFamily="34" charset="-122"/>
+              <a:cs typeface="Calibri" pitchFamily="34" charset="-120"/>
+            </a:endParaRPr>
           </a:p>
         </p:txBody>
       </p:sp>
@@ -1996,8 +2091,11 @@
             <a:r>
               <a:rPr lang="en-US" sz="1500" dirty="0">
                 <a:solidFill>
-                  <a:schemeClr val="bg1"/>
+                  <a:srgbClr val="FFFFFF"/>
                 </a:solidFill>
+                <a:latin typeface="Calibri" pitchFamily="34" charset="0"/>
+                <a:ea typeface="Calibri" pitchFamily="34" charset="-122"/>
+                <a:cs typeface="Calibri" pitchFamily="34" charset="-120"/>
               </a:rPr>
               <a:t>Vale y Enzo</a:t>
             </a:r>
@@ -2076,7 +2174,7 @@
                 <a:ea typeface="Calibri" pitchFamily="34" charset="-122"/>
                 <a:cs typeface="Calibri" pitchFamily="34" charset="-120"/>
               </a:rPr>
-              <a:t>1 de septiembre de 2026</a:t>
+              <a:t>31 de agosto de 2026</a:t>
             </a:r>
             <a:endParaRPr lang="en-US" sz="1500" dirty="0"/>
           </a:p>
@@ -2597,6 +2695,2298 @@
                 <a:ea typeface="Cambria" pitchFamily="34" charset="-122"/>
                 <a:cs typeface="Cambria" pitchFamily="34" charset="-120"/>
               </a:rPr>
+              <a:t>Qué no incluye esta primera etapa</a:t>
+            </a:r>
+            <a:endParaRPr lang="en-US" sz="3200" dirty="0"/>
+          </a:p>
+        </p:txBody>
+      </p:sp>
+      <p:sp>
+        <p:nvSpPr>
+          <p:cNvPr id="3" name="Text 1"/>
+          <p:cNvSpPr txBox="1"/>
+          <p:nvPr/>
+        </p:nvSpPr>
+        <p:spPr>
+          <a:xfrm>
+            <a:off x="685800" y="1097280"/>
+            <a:ext cx="10820095" cy="347472"/>
+          </a:xfrm>
+          <a:prstGeom prst="rect">
+            <a:avLst/>
+          </a:prstGeom>
+          <a:noFill/>
+          <a:ln/>
+        </p:spPr>
+        <p:txBody>
+          <a:bodyPr wrap="square" lIns="0" tIns="0" rIns="0" bIns="0" rtlCol="0" anchor="ctr"/>
+          <a:lstStyle/>
+          <a:p>
+            <a:pPr marL="0" indent="0" algn="l">
+              <a:buNone/>
+            </a:pPr>
+            <a:r>
+              <a:rPr lang="en-US" sz="1400" dirty="0">
+                <a:solidFill>
+                  <a:srgbClr val="6B7A8C"/>
+                </a:solidFill>
+                <a:latin typeface="Calibri" pitchFamily="34" charset="0"/>
+                <a:ea typeface="Calibri" pitchFamily="34" charset="-122"/>
+                <a:cs typeface="Calibri" pitchFamily="34" charset="-120"/>
+              </a:rPr>
+              <a:t>Lo dejamos claro desde ahora para que no aparezca como sorpresa más adelante.</a:t>
+            </a:r>
+            <a:endParaRPr lang="en-US" sz="1400" dirty="0"/>
+          </a:p>
+        </p:txBody>
+      </p:sp>
+      <p:sp>
+        <p:nvSpPr>
+          <p:cNvPr id="4" name="Shape 2"/>
+          <p:cNvSpPr/>
+          <p:nvPr/>
+        </p:nvSpPr>
+        <p:spPr>
+          <a:xfrm>
+            <a:off x="685800" y="1783080"/>
+            <a:ext cx="5248656" cy="658368"/>
+          </a:xfrm>
+          <a:prstGeom prst="roundRect">
+            <a:avLst>
+              <a:gd name="adj" fmla="val 11111"/>
+            </a:avLst>
+          </a:prstGeom>
+          <a:solidFill>
+            <a:srgbClr val="FFFFFF"/>
+          </a:solidFill>
+          <a:ln w="12700">
+            <a:solidFill>
+              <a:srgbClr val="DCE3EA"/>
+            </a:solidFill>
+            <a:prstDash val="solid"/>
+          </a:ln>
+        </p:spPr>
+      </p:sp>
+      <p:sp>
+        <p:nvSpPr>
+          <p:cNvPr id="5" name="Shape 3"/>
+          <p:cNvSpPr/>
+          <p:nvPr/>
+        </p:nvSpPr>
+        <p:spPr>
+          <a:xfrm>
+            <a:off x="941832" y="1975104"/>
+            <a:ext cx="274320" cy="274320"/>
+          </a:xfrm>
+          <a:prstGeom prst="ellipse">
+            <a:avLst/>
+          </a:prstGeom>
+          <a:solidFill>
+            <a:srgbClr val="E3E9EE"/>
+          </a:solidFill>
+          <a:ln w="12700">
+            <a:solidFill>
+              <a:srgbClr val="333333"/>
+            </a:solidFill>
+            <a:prstDash val="solid"/>
+          </a:ln>
+        </p:spPr>
+      </p:sp>
+      <p:sp>
+        <p:nvSpPr>
+          <p:cNvPr id="6" name="Text 4"/>
+          <p:cNvSpPr txBox="1"/>
+          <p:nvPr/>
+        </p:nvSpPr>
+        <p:spPr>
+          <a:xfrm>
+            <a:off x="941832" y="1975104"/>
+            <a:ext cx="274320" cy="274320"/>
+          </a:xfrm>
+          <a:prstGeom prst="rect">
+            <a:avLst/>
+          </a:prstGeom>
+          <a:noFill/>
+          <a:ln/>
+        </p:spPr>
+        <p:txBody>
+          <a:bodyPr wrap="square" lIns="0" tIns="0" rIns="0" bIns="0" rtlCol="0" anchor="ctr"/>
+          <a:lstStyle/>
+          <a:p>
+            <a:pPr marL="0" indent="0" algn="ctr">
+              <a:buNone/>
+            </a:pPr>
+            <a:r>
+              <a:rPr lang="en-US" sz="1100" b="1" dirty="0">
+                <a:solidFill>
+                  <a:srgbClr val="7A8896"/>
+                </a:solidFill>
+                <a:latin typeface="Calibri" pitchFamily="34" charset="0"/>
+                <a:ea typeface="Calibri" pitchFamily="34" charset="-122"/>
+                <a:cs typeface="Calibri" pitchFamily="34" charset="-120"/>
+              </a:rPr>
+              <a:t>✕</a:t>
+            </a:r>
+            <a:endParaRPr lang="en-US" sz="1100" dirty="0"/>
+          </a:p>
+        </p:txBody>
+      </p:sp>
+      <p:sp>
+        <p:nvSpPr>
+          <p:cNvPr id="7" name="Text 5"/>
+          <p:cNvSpPr txBox="1"/>
+          <p:nvPr/>
+        </p:nvSpPr>
+        <p:spPr>
+          <a:xfrm>
+            <a:off x="1344168" y="1783080"/>
+            <a:ext cx="4334256" cy="658368"/>
+          </a:xfrm>
+          <a:prstGeom prst="rect">
+            <a:avLst/>
+          </a:prstGeom>
+          <a:noFill/>
+          <a:ln/>
+        </p:spPr>
+        <p:txBody>
+          <a:bodyPr wrap="square" lIns="0" tIns="0" rIns="0" bIns="0" rtlCol="0" anchor="ctr"/>
+          <a:lstStyle/>
+          <a:p>
+            <a:pPr marL="0" indent="0">
+              <a:buNone/>
+            </a:pPr>
+            <a:r>
+              <a:rPr lang="en-US" sz="1300" dirty="0">
+                <a:solidFill>
+                  <a:srgbClr val="1B2430"/>
+                </a:solidFill>
+                <a:latin typeface="Calibri" pitchFamily="34" charset="0"/>
+                <a:ea typeface="Calibri" pitchFamily="34" charset="-122"/>
+                <a:cs typeface="Calibri" pitchFamily="34" charset="-120"/>
+              </a:rPr>
+              <a:t>Facturación y cobranzas — esto es un cotizador, no un sistema contable</a:t>
+            </a:r>
+            <a:endParaRPr lang="en-US" sz="1300" dirty="0"/>
+          </a:p>
+        </p:txBody>
+      </p:sp>
+      <p:sp>
+        <p:nvSpPr>
+          <p:cNvPr id="8" name="Shape 6"/>
+          <p:cNvSpPr/>
+          <p:nvPr/>
+        </p:nvSpPr>
+        <p:spPr>
+          <a:xfrm>
+            <a:off x="6254496" y="1783080"/>
+            <a:ext cx="5248656" cy="658368"/>
+          </a:xfrm>
+          <a:prstGeom prst="roundRect">
+            <a:avLst>
+              <a:gd name="adj" fmla="val 11111"/>
+            </a:avLst>
+          </a:prstGeom>
+          <a:solidFill>
+            <a:srgbClr val="FFFFFF"/>
+          </a:solidFill>
+          <a:ln w="12700">
+            <a:solidFill>
+              <a:srgbClr val="DCE3EA"/>
+            </a:solidFill>
+            <a:prstDash val="solid"/>
+          </a:ln>
+        </p:spPr>
+      </p:sp>
+      <p:sp>
+        <p:nvSpPr>
+          <p:cNvPr id="9" name="Shape 7"/>
+          <p:cNvSpPr/>
+          <p:nvPr/>
+        </p:nvSpPr>
+        <p:spPr>
+          <a:xfrm>
+            <a:off x="6510528" y="1975104"/>
+            <a:ext cx="274320" cy="274320"/>
+          </a:xfrm>
+          <a:prstGeom prst="ellipse">
+            <a:avLst/>
+          </a:prstGeom>
+          <a:solidFill>
+            <a:srgbClr val="E3E9EE"/>
+          </a:solidFill>
+          <a:ln w="12700">
+            <a:solidFill>
+              <a:srgbClr val="333333"/>
+            </a:solidFill>
+            <a:prstDash val="solid"/>
+          </a:ln>
+        </p:spPr>
+      </p:sp>
+      <p:sp>
+        <p:nvSpPr>
+          <p:cNvPr id="10" name="Text 8"/>
+          <p:cNvSpPr txBox="1"/>
+          <p:nvPr/>
+        </p:nvSpPr>
+        <p:spPr>
+          <a:xfrm>
+            <a:off x="6510528" y="1975104"/>
+            <a:ext cx="274320" cy="274320"/>
+          </a:xfrm>
+          <a:prstGeom prst="rect">
+            <a:avLst/>
+          </a:prstGeom>
+          <a:noFill/>
+          <a:ln/>
+        </p:spPr>
+        <p:txBody>
+          <a:bodyPr wrap="square" lIns="0" tIns="0" rIns="0" bIns="0" rtlCol="0" anchor="ctr"/>
+          <a:lstStyle/>
+          <a:p>
+            <a:pPr marL="0" indent="0" algn="ctr">
+              <a:buNone/>
+            </a:pPr>
+            <a:r>
+              <a:rPr lang="en-US" sz="1100" b="1" dirty="0">
+                <a:solidFill>
+                  <a:srgbClr val="7A8896"/>
+                </a:solidFill>
+                <a:latin typeface="Calibri" pitchFamily="34" charset="0"/>
+                <a:ea typeface="Calibri" pitchFamily="34" charset="-122"/>
+                <a:cs typeface="Calibri" pitchFamily="34" charset="-120"/>
+              </a:rPr>
+              <a:t>✕</a:t>
+            </a:r>
+            <a:endParaRPr lang="en-US" sz="1100" dirty="0"/>
+          </a:p>
+        </p:txBody>
+      </p:sp>
+      <p:sp>
+        <p:nvSpPr>
+          <p:cNvPr id="11" name="Text 9"/>
+          <p:cNvSpPr txBox="1"/>
+          <p:nvPr/>
+        </p:nvSpPr>
+        <p:spPr>
+          <a:xfrm>
+            <a:off x="6912864" y="1783080"/>
+            <a:ext cx="4334256" cy="658368"/>
+          </a:xfrm>
+          <a:prstGeom prst="rect">
+            <a:avLst/>
+          </a:prstGeom>
+          <a:noFill/>
+          <a:ln/>
+        </p:spPr>
+        <p:txBody>
+          <a:bodyPr wrap="square" lIns="0" tIns="0" rIns="0" bIns="0" rtlCol="0" anchor="ctr"/>
+          <a:lstStyle/>
+          <a:p>
+            <a:pPr marL="0" indent="0">
+              <a:buNone/>
+            </a:pPr>
+            <a:r>
+              <a:rPr lang="en-US" sz="1300" dirty="0">
+                <a:solidFill>
+                  <a:srgbClr val="1B2430"/>
+                </a:solidFill>
+                <a:latin typeface="Calibri" pitchFamily="34" charset="0"/>
+                <a:ea typeface="Calibri" pitchFamily="34" charset="-122"/>
+                <a:cs typeface="Calibri" pitchFamily="34" charset="-120"/>
+              </a:rPr>
+              <a:t>Control de stock real de material</a:t>
+            </a:r>
+            <a:endParaRPr lang="en-US" sz="1300" dirty="0"/>
+          </a:p>
+        </p:txBody>
+      </p:sp>
+      <p:sp>
+        <p:nvSpPr>
+          <p:cNvPr id="12" name="Shape 10"/>
+          <p:cNvSpPr/>
+          <p:nvPr/>
+        </p:nvSpPr>
+        <p:spPr>
+          <a:xfrm>
+            <a:off x="685800" y="2569464"/>
+            <a:ext cx="5248656" cy="658368"/>
+          </a:xfrm>
+          <a:prstGeom prst="roundRect">
+            <a:avLst>
+              <a:gd name="adj" fmla="val 11111"/>
+            </a:avLst>
+          </a:prstGeom>
+          <a:solidFill>
+            <a:srgbClr val="FFFFFF"/>
+          </a:solidFill>
+          <a:ln w="12700">
+            <a:solidFill>
+              <a:srgbClr val="DCE3EA"/>
+            </a:solidFill>
+            <a:prstDash val="solid"/>
+          </a:ln>
+        </p:spPr>
+      </p:sp>
+      <p:sp>
+        <p:nvSpPr>
+          <p:cNvPr id="13" name="Shape 11"/>
+          <p:cNvSpPr/>
+          <p:nvPr/>
+        </p:nvSpPr>
+        <p:spPr>
+          <a:xfrm>
+            <a:off x="941832" y="2761488"/>
+            <a:ext cx="274320" cy="274320"/>
+          </a:xfrm>
+          <a:prstGeom prst="ellipse">
+            <a:avLst/>
+          </a:prstGeom>
+          <a:solidFill>
+            <a:srgbClr val="E3E9EE"/>
+          </a:solidFill>
+          <a:ln w="12700">
+            <a:solidFill>
+              <a:srgbClr val="333333"/>
+            </a:solidFill>
+            <a:prstDash val="solid"/>
+          </a:ln>
+        </p:spPr>
+      </p:sp>
+      <p:sp>
+        <p:nvSpPr>
+          <p:cNvPr id="14" name="Text 12"/>
+          <p:cNvSpPr txBox="1"/>
+          <p:nvPr/>
+        </p:nvSpPr>
+        <p:spPr>
+          <a:xfrm>
+            <a:off x="941832" y="2761488"/>
+            <a:ext cx="274320" cy="274320"/>
+          </a:xfrm>
+          <a:prstGeom prst="rect">
+            <a:avLst/>
+          </a:prstGeom>
+          <a:noFill/>
+          <a:ln/>
+        </p:spPr>
+        <p:txBody>
+          <a:bodyPr wrap="square" lIns="0" tIns="0" rIns="0" bIns="0" rtlCol="0" anchor="ctr"/>
+          <a:lstStyle/>
+          <a:p>
+            <a:pPr marL="0" indent="0" algn="ctr">
+              <a:buNone/>
+            </a:pPr>
+            <a:r>
+              <a:rPr lang="en-US" sz="1100" b="1" dirty="0">
+                <a:solidFill>
+                  <a:srgbClr val="7A8896"/>
+                </a:solidFill>
+                <a:latin typeface="Calibri" pitchFamily="34" charset="0"/>
+                <a:ea typeface="Calibri" pitchFamily="34" charset="-122"/>
+                <a:cs typeface="Calibri" pitchFamily="34" charset="-120"/>
+              </a:rPr>
+              <a:t>✕</a:t>
+            </a:r>
+            <a:endParaRPr lang="en-US" sz="1100" dirty="0"/>
+          </a:p>
+        </p:txBody>
+      </p:sp>
+      <p:sp>
+        <p:nvSpPr>
+          <p:cNvPr id="15" name="Text 13"/>
+          <p:cNvSpPr txBox="1"/>
+          <p:nvPr/>
+        </p:nvSpPr>
+        <p:spPr>
+          <a:xfrm>
+            <a:off x="1344168" y="2569464"/>
+            <a:ext cx="4334256" cy="658368"/>
+          </a:xfrm>
+          <a:prstGeom prst="rect">
+            <a:avLst/>
+          </a:prstGeom>
+          <a:noFill/>
+          <a:ln/>
+        </p:spPr>
+        <p:txBody>
+          <a:bodyPr wrap="square" lIns="0" tIns="0" rIns="0" bIns="0" rtlCol="0" anchor="ctr"/>
+          <a:lstStyle/>
+          <a:p>
+            <a:pPr marL="0" indent="0">
+              <a:buNone/>
+            </a:pPr>
+            <a:r>
+              <a:rPr lang="en-US" sz="1300" dirty="0">
+                <a:solidFill>
+                  <a:srgbClr val="1B2430"/>
+                </a:solidFill>
+                <a:latin typeface="Calibri" pitchFamily="34" charset="0"/>
+                <a:ea typeface="Calibri" pitchFamily="34" charset="-122"/>
+                <a:cs typeface="Calibri" pitchFamily="34" charset="-120"/>
+              </a:rPr>
+              <a:t>Seguimiento de las órdenes dentro del taller</a:t>
+            </a:r>
+            <a:endParaRPr lang="en-US" sz="1300" dirty="0"/>
+          </a:p>
+        </p:txBody>
+      </p:sp>
+      <p:sp>
+        <p:nvSpPr>
+          <p:cNvPr id="16" name="Shape 14"/>
+          <p:cNvSpPr/>
+          <p:nvPr/>
+        </p:nvSpPr>
+        <p:spPr>
+          <a:xfrm>
+            <a:off x="6254496" y="2569464"/>
+            <a:ext cx="5248656" cy="658368"/>
+          </a:xfrm>
+          <a:prstGeom prst="roundRect">
+            <a:avLst>
+              <a:gd name="adj" fmla="val 11111"/>
+            </a:avLst>
+          </a:prstGeom>
+          <a:solidFill>
+            <a:srgbClr val="FFFFFF"/>
+          </a:solidFill>
+          <a:ln w="12700">
+            <a:solidFill>
+              <a:srgbClr val="DCE3EA"/>
+            </a:solidFill>
+            <a:prstDash val="solid"/>
+          </a:ln>
+        </p:spPr>
+      </p:sp>
+      <p:sp>
+        <p:nvSpPr>
+          <p:cNvPr id="17" name="Shape 15"/>
+          <p:cNvSpPr/>
+          <p:nvPr/>
+        </p:nvSpPr>
+        <p:spPr>
+          <a:xfrm>
+            <a:off x="6510528" y="2761488"/>
+            <a:ext cx="274320" cy="274320"/>
+          </a:xfrm>
+          <a:prstGeom prst="ellipse">
+            <a:avLst/>
+          </a:prstGeom>
+          <a:solidFill>
+            <a:srgbClr val="E3E9EE"/>
+          </a:solidFill>
+          <a:ln w="12700">
+            <a:solidFill>
+              <a:srgbClr val="333333"/>
+            </a:solidFill>
+            <a:prstDash val="solid"/>
+          </a:ln>
+        </p:spPr>
+      </p:sp>
+      <p:sp>
+        <p:nvSpPr>
+          <p:cNvPr id="18" name="Text 16"/>
+          <p:cNvSpPr txBox="1"/>
+          <p:nvPr/>
+        </p:nvSpPr>
+        <p:spPr>
+          <a:xfrm>
+            <a:off x="6510528" y="2761488"/>
+            <a:ext cx="274320" cy="274320"/>
+          </a:xfrm>
+          <a:prstGeom prst="rect">
+            <a:avLst/>
+          </a:prstGeom>
+          <a:noFill/>
+          <a:ln/>
+        </p:spPr>
+        <p:txBody>
+          <a:bodyPr wrap="square" lIns="0" tIns="0" rIns="0" bIns="0" rtlCol="0" anchor="ctr"/>
+          <a:lstStyle/>
+          <a:p>
+            <a:pPr marL="0" indent="0" algn="ctr">
+              <a:buNone/>
+            </a:pPr>
+            <a:r>
+              <a:rPr lang="en-US" sz="1100" b="1" dirty="0">
+                <a:solidFill>
+                  <a:srgbClr val="7A8896"/>
+                </a:solidFill>
+                <a:latin typeface="Calibri" pitchFamily="34" charset="0"/>
+                <a:ea typeface="Calibri" pitchFamily="34" charset="-122"/>
+                <a:cs typeface="Calibri" pitchFamily="34" charset="-120"/>
+              </a:rPr>
+              <a:t>✕</a:t>
+            </a:r>
+            <a:endParaRPr lang="en-US" sz="1100" dirty="0"/>
+          </a:p>
+        </p:txBody>
+      </p:sp>
+      <p:sp>
+        <p:nvSpPr>
+          <p:cNvPr id="19" name="Text 17"/>
+          <p:cNvSpPr txBox="1"/>
+          <p:nvPr/>
+        </p:nvSpPr>
+        <p:spPr>
+          <a:xfrm>
+            <a:off x="6912864" y="2569464"/>
+            <a:ext cx="4334256" cy="658368"/>
+          </a:xfrm>
+          <a:prstGeom prst="rect">
+            <a:avLst/>
+          </a:prstGeom>
+          <a:noFill/>
+          <a:ln/>
+        </p:spPr>
+        <p:txBody>
+          <a:bodyPr wrap="square" lIns="0" tIns="0" rIns="0" bIns="0" rtlCol="0" anchor="ctr"/>
+          <a:lstStyle/>
+          <a:p>
+            <a:pPr marL="0" indent="0">
+              <a:buNone/>
+            </a:pPr>
+            <a:r>
+              <a:rPr lang="en-US" sz="1300" dirty="0">
+                <a:solidFill>
+                  <a:srgbClr val="1B2430"/>
+                </a:solidFill>
+                <a:latin typeface="Calibri" pitchFamily="34" charset="0"/>
+                <a:ea typeface="Calibri" pitchFamily="34" charset="-122"/>
+                <a:cs typeface="Calibri" pitchFamily="34" charset="-120"/>
+              </a:rPr>
+              <a:t>Generación de archivos para la máquina de corte — el sistema da el plano de corte</a:t>
+            </a:r>
+            <a:endParaRPr lang="en-US" sz="1300" dirty="0"/>
+          </a:p>
+        </p:txBody>
+      </p:sp>
+      <p:sp>
+        <p:nvSpPr>
+          <p:cNvPr id="20" name="Shape 18"/>
+          <p:cNvSpPr/>
+          <p:nvPr/>
+        </p:nvSpPr>
+        <p:spPr>
+          <a:xfrm>
+            <a:off x="685800" y="3355848"/>
+            <a:ext cx="5248656" cy="658368"/>
+          </a:xfrm>
+          <a:prstGeom prst="roundRect">
+            <a:avLst>
+              <a:gd name="adj" fmla="val 11111"/>
+            </a:avLst>
+          </a:prstGeom>
+          <a:solidFill>
+            <a:srgbClr val="FFFFFF"/>
+          </a:solidFill>
+          <a:ln w="12700">
+            <a:solidFill>
+              <a:srgbClr val="DCE3EA"/>
+            </a:solidFill>
+            <a:prstDash val="solid"/>
+          </a:ln>
+        </p:spPr>
+      </p:sp>
+      <p:sp>
+        <p:nvSpPr>
+          <p:cNvPr id="21" name="Shape 19"/>
+          <p:cNvSpPr/>
+          <p:nvPr/>
+        </p:nvSpPr>
+        <p:spPr>
+          <a:xfrm>
+            <a:off x="941832" y="3547872"/>
+            <a:ext cx="274320" cy="274320"/>
+          </a:xfrm>
+          <a:prstGeom prst="ellipse">
+            <a:avLst/>
+          </a:prstGeom>
+          <a:solidFill>
+            <a:srgbClr val="E3E9EE"/>
+          </a:solidFill>
+          <a:ln w="12700">
+            <a:solidFill>
+              <a:srgbClr val="333333"/>
+            </a:solidFill>
+            <a:prstDash val="solid"/>
+          </a:ln>
+        </p:spPr>
+      </p:sp>
+      <p:sp>
+        <p:nvSpPr>
+          <p:cNvPr id="22" name="Text 20"/>
+          <p:cNvSpPr txBox="1"/>
+          <p:nvPr/>
+        </p:nvSpPr>
+        <p:spPr>
+          <a:xfrm>
+            <a:off x="941832" y="3547872"/>
+            <a:ext cx="274320" cy="274320"/>
+          </a:xfrm>
+          <a:prstGeom prst="rect">
+            <a:avLst/>
+          </a:prstGeom>
+          <a:noFill/>
+          <a:ln/>
+        </p:spPr>
+        <p:txBody>
+          <a:bodyPr wrap="square" lIns="0" tIns="0" rIns="0" bIns="0" rtlCol="0" anchor="ctr"/>
+          <a:lstStyle/>
+          <a:p>
+            <a:pPr marL="0" indent="0" algn="ctr">
+              <a:buNone/>
+            </a:pPr>
+            <a:r>
+              <a:rPr lang="en-US" sz="1100" b="1" dirty="0">
+                <a:solidFill>
+                  <a:srgbClr val="7A8896"/>
+                </a:solidFill>
+                <a:latin typeface="Calibri" pitchFamily="34" charset="0"/>
+                <a:ea typeface="Calibri" pitchFamily="34" charset="-122"/>
+                <a:cs typeface="Calibri" pitchFamily="34" charset="-120"/>
+              </a:rPr>
+              <a:t>✕</a:t>
+            </a:r>
+            <a:endParaRPr lang="en-US" sz="1100" dirty="0"/>
+          </a:p>
+        </p:txBody>
+      </p:sp>
+      <p:sp>
+        <p:nvSpPr>
+          <p:cNvPr id="23" name="Text 21"/>
+          <p:cNvSpPr txBox="1"/>
+          <p:nvPr/>
+        </p:nvSpPr>
+        <p:spPr>
+          <a:xfrm>
+            <a:off x="1344168" y="3355848"/>
+            <a:ext cx="4334256" cy="658368"/>
+          </a:xfrm>
+          <a:prstGeom prst="rect">
+            <a:avLst/>
+          </a:prstGeom>
+          <a:noFill/>
+          <a:ln/>
+        </p:spPr>
+        <p:txBody>
+          <a:bodyPr wrap="square" lIns="0" tIns="0" rIns="0" bIns="0" rtlCol="0" anchor="ctr"/>
+          <a:lstStyle/>
+          <a:p>
+            <a:pPr marL="0" indent="0">
+              <a:buNone/>
+            </a:pPr>
+            <a:r>
+              <a:rPr lang="en-US" sz="1300" dirty="0">
+                <a:solidFill>
+                  <a:srgbClr val="1B2430"/>
+                </a:solidFill>
+                <a:latin typeface="Calibri" pitchFamily="34" charset="0"/>
+                <a:ea typeface="Calibri" pitchFamily="34" charset="-122"/>
+                <a:cs typeface="Calibri" pitchFamily="34" charset="-120"/>
+              </a:rPr>
+              <a:t>App para instalar en el celular — la aprobación va por navegador</a:t>
+            </a:r>
+            <a:endParaRPr lang="en-US" sz="1300" dirty="0"/>
+          </a:p>
+        </p:txBody>
+      </p:sp>
+      <p:sp>
+        <p:nvSpPr>
+          <p:cNvPr id="24" name="Shape 22"/>
+          <p:cNvSpPr/>
+          <p:nvPr/>
+        </p:nvSpPr>
+        <p:spPr>
+          <a:xfrm>
+            <a:off x="6254496" y="3355848"/>
+            <a:ext cx="5248656" cy="658368"/>
+          </a:xfrm>
+          <a:prstGeom prst="roundRect">
+            <a:avLst>
+              <a:gd name="adj" fmla="val 11111"/>
+            </a:avLst>
+          </a:prstGeom>
+          <a:solidFill>
+            <a:srgbClr val="FFFFFF"/>
+          </a:solidFill>
+          <a:ln w="12700">
+            <a:solidFill>
+              <a:srgbClr val="DCE3EA"/>
+            </a:solidFill>
+            <a:prstDash val="solid"/>
+          </a:ln>
+        </p:spPr>
+      </p:sp>
+      <p:sp>
+        <p:nvSpPr>
+          <p:cNvPr id="25" name="Shape 23"/>
+          <p:cNvSpPr/>
+          <p:nvPr/>
+        </p:nvSpPr>
+        <p:spPr>
+          <a:xfrm>
+            <a:off x="6510528" y="3547872"/>
+            <a:ext cx="274320" cy="274320"/>
+          </a:xfrm>
+          <a:prstGeom prst="ellipse">
+            <a:avLst/>
+          </a:prstGeom>
+          <a:solidFill>
+            <a:srgbClr val="E3E9EE"/>
+          </a:solidFill>
+          <a:ln w="12700">
+            <a:solidFill>
+              <a:srgbClr val="333333"/>
+            </a:solidFill>
+            <a:prstDash val="solid"/>
+          </a:ln>
+        </p:spPr>
+      </p:sp>
+      <p:sp>
+        <p:nvSpPr>
+          <p:cNvPr id="26" name="Text 24"/>
+          <p:cNvSpPr txBox="1"/>
+          <p:nvPr/>
+        </p:nvSpPr>
+        <p:spPr>
+          <a:xfrm>
+            <a:off x="6510528" y="3547872"/>
+            <a:ext cx="274320" cy="274320"/>
+          </a:xfrm>
+          <a:prstGeom prst="rect">
+            <a:avLst/>
+          </a:prstGeom>
+          <a:noFill/>
+          <a:ln/>
+        </p:spPr>
+        <p:txBody>
+          <a:bodyPr wrap="square" lIns="0" tIns="0" rIns="0" bIns="0" rtlCol="0" anchor="ctr"/>
+          <a:lstStyle/>
+          <a:p>
+            <a:pPr marL="0" indent="0" algn="ctr">
+              <a:buNone/>
+            </a:pPr>
+            <a:r>
+              <a:rPr lang="en-US" sz="1100" b="1" dirty="0">
+                <a:solidFill>
+                  <a:srgbClr val="7A8896"/>
+                </a:solidFill>
+                <a:latin typeface="Calibri" pitchFamily="34" charset="0"/>
+                <a:ea typeface="Calibri" pitchFamily="34" charset="-122"/>
+                <a:cs typeface="Calibri" pitchFamily="34" charset="-120"/>
+              </a:rPr>
+              <a:t>✕</a:t>
+            </a:r>
+            <a:endParaRPr lang="en-US" sz="1100" dirty="0"/>
+          </a:p>
+        </p:txBody>
+      </p:sp>
+      <p:sp>
+        <p:nvSpPr>
+          <p:cNvPr id="27" name="Text 25"/>
+          <p:cNvSpPr txBox="1"/>
+          <p:nvPr/>
+        </p:nvSpPr>
+        <p:spPr>
+          <a:xfrm>
+            <a:off x="6912864" y="3355848"/>
+            <a:ext cx="4334256" cy="658368"/>
+          </a:xfrm>
+          <a:prstGeom prst="rect">
+            <a:avLst/>
+          </a:prstGeom>
+          <a:noFill/>
+          <a:ln/>
+        </p:spPr>
+        <p:txBody>
+          <a:bodyPr wrap="square" lIns="0" tIns="0" rIns="0" bIns="0" rtlCol="0" anchor="ctr"/>
+          <a:lstStyle/>
+          <a:p>
+            <a:pPr marL="0" indent="0">
+              <a:buNone/>
+            </a:pPr>
+            <a:r>
+              <a:rPr lang="en-US" sz="1300" dirty="0">
+                <a:solidFill>
+                  <a:srgbClr val="1B2430"/>
+                </a:solidFill>
+                <a:latin typeface="Calibri" pitchFamily="34" charset="0"/>
+                <a:ea typeface="Calibri" pitchFamily="34" charset="-122"/>
+                <a:cs typeface="Calibri" pitchFamily="34" charset="-120"/>
+              </a:rPr>
+              <a:t>Más de una sucursal o empresa</a:t>
+            </a:r>
+            <a:endParaRPr lang="en-US" sz="1300" dirty="0"/>
+          </a:p>
+        </p:txBody>
+      </p:sp>
+      <p:sp>
+        <p:nvSpPr>
+          <p:cNvPr id="28" name="Shape 26"/>
+          <p:cNvSpPr/>
+          <p:nvPr/>
+        </p:nvSpPr>
+        <p:spPr>
+          <a:xfrm>
+            <a:off x="685800" y="4142232"/>
+            <a:ext cx="5248656" cy="658368"/>
+          </a:xfrm>
+          <a:prstGeom prst="roundRect">
+            <a:avLst>
+              <a:gd name="adj" fmla="val 11111"/>
+            </a:avLst>
+          </a:prstGeom>
+          <a:solidFill>
+            <a:srgbClr val="FFFFFF"/>
+          </a:solidFill>
+          <a:ln w="12700">
+            <a:solidFill>
+              <a:srgbClr val="DCE3EA"/>
+            </a:solidFill>
+            <a:prstDash val="solid"/>
+          </a:ln>
+        </p:spPr>
+      </p:sp>
+      <p:sp>
+        <p:nvSpPr>
+          <p:cNvPr id="29" name="Shape 27"/>
+          <p:cNvSpPr/>
+          <p:nvPr/>
+        </p:nvSpPr>
+        <p:spPr>
+          <a:xfrm>
+            <a:off x="941832" y="4334256"/>
+            <a:ext cx="274320" cy="274320"/>
+          </a:xfrm>
+          <a:prstGeom prst="ellipse">
+            <a:avLst/>
+          </a:prstGeom>
+          <a:solidFill>
+            <a:srgbClr val="E3E9EE"/>
+          </a:solidFill>
+          <a:ln w="12700">
+            <a:solidFill>
+              <a:srgbClr val="333333"/>
+            </a:solidFill>
+            <a:prstDash val="solid"/>
+          </a:ln>
+        </p:spPr>
+      </p:sp>
+      <p:sp>
+        <p:nvSpPr>
+          <p:cNvPr id="30" name="Text 28"/>
+          <p:cNvSpPr txBox="1"/>
+          <p:nvPr/>
+        </p:nvSpPr>
+        <p:spPr>
+          <a:xfrm>
+            <a:off x="941832" y="4334256"/>
+            <a:ext cx="274320" cy="274320"/>
+          </a:xfrm>
+          <a:prstGeom prst="rect">
+            <a:avLst/>
+          </a:prstGeom>
+          <a:noFill/>
+          <a:ln/>
+        </p:spPr>
+        <p:txBody>
+          <a:bodyPr wrap="square" lIns="0" tIns="0" rIns="0" bIns="0" rtlCol="0" anchor="ctr"/>
+          <a:lstStyle/>
+          <a:p>
+            <a:pPr marL="0" indent="0" algn="ctr">
+              <a:buNone/>
+            </a:pPr>
+            <a:r>
+              <a:rPr lang="en-US" sz="1100" b="1" dirty="0">
+                <a:solidFill>
+                  <a:srgbClr val="7A8896"/>
+                </a:solidFill>
+                <a:latin typeface="Calibri" pitchFamily="34" charset="0"/>
+                <a:ea typeface="Calibri" pitchFamily="34" charset="-122"/>
+                <a:cs typeface="Calibri" pitchFamily="34" charset="-120"/>
+              </a:rPr>
+              <a:t>✕</a:t>
+            </a:r>
+            <a:endParaRPr lang="en-US" sz="1100" dirty="0"/>
+          </a:p>
+        </p:txBody>
+      </p:sp>
+      <p:sp>
+        <p:nvSpPr>
+          <p:cNvPr id="31" name="Text 29"/>
+          <p:cNvSpPr txBox="1"/>
+          <p:nvPr/>
+        </p:nvSpPr>
+        <p:spPr>
+          <a:xfrm>
+            <a:off x="1344168" y="4142232"/>
+            <a:ext cx="4334256" cy="658368"/>
+          </a:xfrm>
+          <a:prstGeom prst="rect">
+            <a:avLst/>
+          </a:prstGeom>
+          <a:noFill/>
+          <a:ln/>
+        </p:spPr>
+        <p:txBody>
+          <a:bodyPr wrap="square" lIns="0" tIns="0" rIns="0" bIns="0" rtlCol="0" anchor="ctr"/>
+          <a:lstStyle/>
+          <a:p>
+            <a:pPr marL="0" indent="0">
+              <a:buNone/>
+            </a:pPr>
+            <a:r>
+              <a:rPr lang="en-US" sz="1300" dirty="0">
+                <a:solidFill>
+                  <a:srgbClr val="1B2430"/>
+                </a:solidFill>
+                <a:latin typeface="Calibri" pitchFamily="34" charset="0"/>
+                <a:ea typeface="Calibri" pitchFamily="34" charset="-122"/>
+                <a:cs typeface="Calibri" pitchFamily="34" charset="-120"/>
+              </a:rPr>
+              <a:t>Carga del historial de presupuestos viejos — el sistema arranca vacío</a:t>
+            </a:r>
+            <a:endParaRPr lang="en-US" sz="1300" dirty="0"/>
+          </a:p>
+        </p:txBody>
+      </p:sp>
+      <p:sp>
+        <p:nvSpPr>
+          <p:cNvPr id="32" name="Shape 30"/>
+          <p:cNvSpPr/>
+          <p:nvPr/>
+        </p:nvSpPr>
+        <p:spPr>
+          <a:xfrm>
+            <a:off x="685800" y="5257800"/>
+            <a:ext cx="10820095" cy="777240"/>
+          </a:xfrm>
+          <a:prstGeom prst="roundRect">
+            <a:avLst>
+              <a:gd name="adj" fmla="val 9412"/>
+            </a:avLst>
+          </a:prstGeom>
+          <a:solidFill>
+            <a:srgbClr val="1F2C3A"/>
+          </a:solidFill>
+          <a:ln w="12700">
+            <a:solidFill>
+              <a:srgbClr val="1F2C3A"/>
+            </a:solidFill>
+            <a:prstDash val="solid"/>
+          </a:ln>
+        </p:spPr>
+      </p:sp>
+      <p:sp>
+        <p:nvSpPr>
+          <p:cNvPr id="33" name="Text 31"/>
+          <p:cNvSpPr txBox="1"/>
+          <p:nvPr/>
+        </p:nvSpPr>
+        <p:spPr>
+          <a:xfrm>
+            <a:off x="1097280" y="5257800"/>
+            <a:ext cx="9997135" cy="777240"/>
+          </a:xfrm>
+          <a:prstGeom prst="rect">
+            <a:avLst/>
+          </a:prstGeom>
+          <a:noFill/>
+          <a:ln/>
+        </p:spPr>
+        <p:txBody>
+          <a:bodyPr wrap="square" lIns="0" tIns="0" rIns="0" bIns="0" rtlCol="0" anchor="ctr"/>
+          <a:lstStyle/>
+          <a:p>
+            <a:pPr marL="0" indent="0">
+              <a:buNone/>
+            </a:pPr>
+            <a:r>
+              <a:rPr lang="en-US" sz="1450" b="1" dirty="0">
+                <a:solidFill>
+                  <a:srgbClr val="FFFFFF"/>
+                </a:solidFill>
+                <a:latin typeface="Calibri" pitchFamily="34" charset="0"/>
+                <a:ea typeface="Calibri" pitchFamily="34" charset="-122"/>
+                <a:cs typeface="Calibri" pitchFamily="34" charset="-120"/>
+              </a:rPr>
+              <a:t>Nada de esto está descartado para más adelante — solo no es parte de estos dos meses.</a:t>
+            </a:r>
+            <a:endParaRPr lang="en-US" sz="1450" dirty="0"/>
+          </a:p>
+        </p:txBody>
+      </p:sp>
+    </p:spTree>
+  </p:cSld>
+  <p:clrMapOvr>
+    <a:masterClrMapping/>
+  </p:clrMapOvr>
+  <p:transition spd="med">
+    <p:fade/>
+  </p:transition>
+  <p:timing>
+    <p:tnLst>
+      <p:par>
+        <p:cTn id="1" dur="indefinite" restart="never" nodeType="tmRoot">
+          <p:childTnLst>
+            <p:seq concurrent="1" nextAc="seek">
+              <p:cTn id="2" dur="indefinite" nodeType="mainSeq">
+                <p:childTnLst>
+                  <p:par>
+                    <p:cTn id="3" fill="hold">
+                      <p:stCondLst>
+                        <p:cond delay="0"/>
+                      </p:stCondLst>
+                      <p:childTnLst>
+                        <p:par>
+                          <p:cTn id="4" fill="hold">
+                            <p:stCondLst>
+                              <p:cond delay="0"/>
+                            </p:stCondLst>
+                            <p:childTnLst>
+                              <p:par>
+                                <p:cTn id="5" presetID="10" presetClass="entr" presetSubtype="0" fill="hold" grpId="0" nodeType="afterEffect">
+                                  <p:stCondLst>
+                                    <p:cond delay="0"/>
+                                  </p:stCondLst>
+                                  <p:childTnLst>
+                                    <p:set>
+                                      <p:cBhvr>
+                                        <p:cTn id="6" dur="1" fill="hold">
+                                          <p:stCondLst>
+                                            <p:cond delay="0"/>
+                                          </p:stCondLst>
+                                        </p:cTn>
+                                        <p:tgtEl>
+                                          <p:spTgt spid="2"/>
+                                        </p:tgtEl>
+                                        <p:attrNameLst>
+                                          <p:attrName>style.visibility</p:attrName>
+                                        </p:attrNameLst>
+                                      </p:cBhvr>
+                                      <p:to>
+                                        <p:strVal val="visible"/>
+                                      </p:to>
+                                    </p:set>
+                                    <p:animEffect transition="in" filter="fade">
+                                      <p:cBhvr>
+                                        <p:cTn id="7" dur="450"/>
+                                        <p:tgtEl>
+                                          <p:spTgt spid="2"/>
+                                        </p:tgtEl>
+                                      </p:cBhvr>
+                                    </p:animEffect>
+                                  </p:childTnLst>
+                                </p:cTn>
+                              </p:par>
+                              <p:par>
+                                <p:cTn id="8" presetID="10" presetClass="entr" presetSubtype="0" fill="hold" grpId="0" nodeType="afterEffect">
+                                  <p:stCondLst>
+                                    <p:cond delay="70"/>
+                                  </p:stCondLst>
+                                  <p:childTnLst>
+                                    <p:set>
+                                      <p:cBhvr>
+                                        <p:cTn id="9" dur="1" fill="hold">
+                                          <p:stCondLst>
+                                            <p:cond delay="0"/>
+                                          </p:stCondLst>
+                                        </p:cTn>
+                                        <p:tgtEl>
+                                          <p:spTgt spid="3"/>
+                                        </p:tgtEl>
+                                        <p:attrNameLst>
+                                          <p:attrName>style.visibility</p:attrName>
+                                        </p:attrNameLst>
+                                      </p:cBhvr>
+                                      <p:to>
+                                        <p:strVal val="visible"/>
+                                      </p:to>
+                                    </p:set>
+                                    <p:animEffect transition="in" filter="fade">
+                                      <p:cBhvr>
+                                        <p:cTn id="10" dur="450"/>
+                                        <p:tgtEl>
+                                          <p:spTgt spid="3"/>
+                                        </p:tgtEl>
+                                      </p:cBhvr>
+                                    </p:animEffect>
+                                  </p:childTnLst>
+                                </p:cTn>
+                              </p:par>
+                              <p:par>
+                                <p:cTn id="11" presetID="10" presetClass="entr" presetSubtype="0" fill="hold" grpId="0" nodeType="afterEffect">
+                                  <p:stCondLst>
+                                    <p:cond delay="140"/>
+                                  </p:stCondLst>
+                                  <p:childTnLst>
+                                    <p:set>
+                                      <p:cBhvr>
+                                        <p:cTn id="12" dur="1" fill="hold">
+                                          <p:stCondLst>
+                                            <p:cond delay="0"/>
+                                          </p:stCondLst>
+                                        </p:cTn>
+                                        <p:tgtEl>
+                                          <p:spTgt spid="4"/>
+                                        </p:tgtEl>
+                                        <p:attrNameLst>
+                                          <p:attrName>style.visibility</p:attrName>
+                                        </p:attrNameLst>
+                                      </p:cBhvr>
+                                      <p:to>
+                                        <p:strVal val="visible"/>
+                                      </p:to>
+                                    </p:set>
+                                    <p:animEffect transition="in" filter="fade">
+                                      <p:cBhvr>
+                                        <p:cTn id="13" dur="450"/>
+                                        <p:tgtEl>
+                                          <p:spTgt spid="4"/>
+                                        </p:tgtEl>
+                                      </p:cBhvr>
+                                    </p:animEffect>
+                                  </p:childTnLst>
+                                </p:cTn>
+                              </p:par>
+                              <p:par>
+                                <p:cTn id="14" presetID="10" presetClass="entr" presetSubtype="0" fill="hold" grpId="0" nodeType="afterEffect">
+                                  <p:stCondLst>
+                                    <p:cond delay="210"/>
+                                  </p:stCondLst>
+                                  <p:childTnLst>
+                                    <p:set>
+                                      <p:cBhvr>
+                                        <p:cTn id="15" dur="1" fill="hold">
+                                          <p:stCondLst>
+                                            <p:cond delay="0"/>
+                                          </p:stCondLst>
+                                        </p:cTn>
+                                        <p:tgtEl>
+                                          <p:spTgt spid="5"/>
+                                        </p:tgtEl>
+                                        <p:attrNameLst>
+                                          <p:attrName>style.visibility</p:attrName>
+                                        </p:attrNameLst>
+                                      </p:cBhvr>
+                                      <p:to>
+                                        <p:strVal val="visible"/>
+                                      </p:to>
+                                    </p:set>
+                                    <p:animEffect transition="in" filter="fade">
+                                      <p:cBhvr>
+                                        <p:cTn id="16" dur="450"/>
+                                        <p:tgtEl>
+                                          <p:spTgt spid="5"/>
+                                        </p:tgtEl>
+                                      </p:cBhvr>
+                                    </p:animEffect>
+                                  </p:childTnLst>
+                                </p:cTn>
+                              </p:par>
+                              <p:par>
+                                <p:cTn id="17" presetID="10" presetClass="entr" presetSubtype="0" fill="hold" grpId="0" nodeType="afterEffect">
+                                  <p:stCondLst>
+                                    <p:cond delay="280"/>
+                                  </p:stCondLst>
+                                  <p:childTnLst>
+                                    <p:set>
+                                      <p:cBhvr>
+                                        <p:cTn id="18" dur="1" fill="hold">
+                                          <p:stCondLst>
+                                            <p:cond delay="0"/>
+                                          </p:stCondLst>
+                                        </p:cTn>
+                                        <p:tgtEl>
+                                          <p:spTgt spid="6"/>
+                                        </p:tgtEl>
+                                        <p:attrNameLst>
+                                          <p:attrName>style.visibility</p:attrName>
+                                        </p:attrNameLst>
+                                      </p:cBhvr>
+                                      <p:to>
+                                        <p:strVal val="visible"/>
+                                      </p:to>
+                                    </p:set>
+                                    <p:animEffect transition="in" filter="fade">
+                                      <p:cBhvr>
+                                        <p:cTn id="19" dur="450"/>
+                                        <p:tgtEl>
+                                          <p:spTgt spid="6"/>
+                                        </p:tgtEl>
+                                      </p:cBhvr>
+                                    </p:animEffect>
+                                  </p:childTnLst>
+                                </p:cTn>
+                              </p:par>
+                              <p:par>
+                                <p:cTn id="20" presetID="10" presetClass="entr" presetSubtype="0" fill="hold" grpId="0" nodeType="afterEffect">
+                                  <p:stCondLst>
+                                    <p:cond delay="350"/>
+                                  </p:stCondLst>
+                                  <p:childTnLst>
+                                    <p:set>
+                                      <p:cBhvr>
+                                        <p:cTn id="21" dur="1" fill="hold">
+                                          <p:stCondLst>
+                                            <p:cond delay="0"/>
+                                          </p:stCondLst>
+                                        </p:cTn>
+                                        <p:tgtEl>
+                                          <p:spTgt spid="7"/>
+                                        </p:tgtEl>
+                                        <p:attrNameLst>
+                                          <p:attrName>style.visibility</p:attrName>
+                                        </p:attrNameLst>
+                                      </p:cBhvr>
+                                      <p:to>
+                                        <p:strVal val="visible"/>
+                                      </p:to>
+                                    </p:set>
+                                    <p:animEffect transition="in" filter="fade">
+                                      <p:cBhvr>
+                                        <p:cTn id="22" dur="450"/>
+                                        <p:tgtEl>
+                                          <p:spTgt spid="7"/>
+                                        </p:tgtEl>
+                                      </p:cBhvr>
+                                    </p:animEffect>
+                                  </p:childTnLst>
+                                </p:cTn>
+                              </p:par>
+                              <p:par>
+                                <p:cTn id="23" presetID="10" presetClass="entr" presetSubtype="0" fill="hold" grpId="0" nodeType="afterEffect">
+                                  <p:stCondLst>
+                                    <p:cond delay="420"/>
+                                  </p:stCondLst>
+                                  <p:childTnLst>
+                                    <p:set>
+                                      <p:cBhvr>
+                                        <p:cTn id="24" dur="1" fill="hold">
+                                          <p:stCondLst>
+                                            <p:cond delay="0"/>
+                                          </p:stCondLst>
+                                        </p:cTn>
+                                        <p:tgtEl>
+                                          <p:spTgt spid="8"/>
+                                        </p:tgtEl>
+                                        <p:attrNameLst>
+                                          <p:attrName>style.visibility</p:attrName>
+                                        </p:attrNameLst>
+                                      </p:cBhvr>
+                                      <p:to>
+                                        <p:strVal val="visible"/>
+                                      </p:to>
+                                    </p:set>
+                                    <p:animEffect transition="in" filter="fade">
+                                      <p:cBhvr>
+                                        <p:cTn id="25" dur="450"/>
+                                        <p:tgtEl>
+                                          <p:spTgt spid="8"/>
+                                        </p:tgtEl>
+                                      </p:cBhvr>
+                                    </p:animEffect>
+                                  </p:childTnLst>
+                                </p:cTn>
+                              </p:par>
+                              <p:par>
+                                <p:cTn id="26" presetID="10" presetClass="entr" presetSubtype="0" fill="hold" grpId="0" nodeType="afterEffect">
+                                  <p:stCondLst>
+                                    <p:cond delay="490"/>
+                                  </p:stCondLst>
+                                  <p:childTnLst>
+                                    <p:set>
+                                      <p:cBhvr>
+                                        <p:cTn id="27" dur="1" fill="hold">
+                                          <p:stCondLst>
+                                            <p:cond delay="0"/>
+                                          </p:stCondLst>
+                                        </p:cTn>
+                                        <p:tgtEl>
+                                          <p:spTgt spid="9"/>
+                                        </p:tgtEl>
+                                        <p:attrNameLst>
+                                          <p:attrName>style.visibility</p:attrName>
+                                        </p:attrNameLst>
+                                      </p:cBhvr>
+                                      <p:to>
+                                        <p:strVal val="visible"/>
+                                      </p:to>
+                                    </p:set>
+                                    <p:animEffect transition="in" filter="fade">
+                                      <p:cBhvr>
+                                        <p:cTn id="28" dur="450"/>
+                                        <p:tgtEl>
+                                          <p:spTgt spid="9"/>
+                                        </p:tgtEl>
+                                      </p:cBhvr>
+                                    </p:animEffect>
+                                  </p:childTnLst>
+                                </p:cTn>
+                              </p:par>
+                              <p:par>
+                                <p:cTn id="29" presetID="10" presetClass="entr" presetSubtype="0" fill="hold" grpId="0" nodeType="afterEffect">
+                                  <p:stCondLst>
+                                    <p:cond delay="560"/>
+                                  </p:stCondLst>
+                                  <p:childTnLst>
+                                    <p:set>
+                                      <p:cBhvr>
+                                        <p:cTn id="30" dur="1" fill="hold">
+                                          <p:stCondLst>
+                                            <p:cond delay="0"/>
+                                          </p:stCondLst>
+                                        </p:cTn>
+                                        <p:tgtEl>
+                                          <p:spTgt spid="10"/>
+                                        </p:tgtEl>
+                                        <p:attrNameLst>
+                                          <p:attrName>style.visibility</p:attrName>
+                                        </p:attrNameLst>
+                                      </p:cBhvr>
+                                      <p:to>
+                                        <p:strVal val="visible"/>
+                                      </p:to>
+                                    </p:set>
+                                    <p:animEffect transition="in" filter="fade">
+                                      <p:cBhvr>
+                                        <p:cTn id="31" dur="450"/>
+                                        <p:tgtEl>
+                                          <p:spTgt spid="10"/>
+                                        </p:tgtEl>
+                                      </p:cBhvr>
+                                    </p:animEffect>
+                                  </p:childTnLst>
+                                </p:cTn>
+                              </p:par>
+                              <p:par>
+                                <p:cTn id="32" presetID="10" presetClass="entr" presetSubtype="0" fill="hold" grpId="0" nodeType="afterEffect">
+                                  <p:stCondLst>
+                                    <p:cond delay="630"/>
+                                  </p:stCondLst>
+                                  <p:childTnLst>
+                                    <p:set>
+                                      <p:cBhvr>
+                                        <p:cTn id="33" dur="1" fill="hold">
+                                          <p:stCondLst>
+                                            <p:cond delay="0"/>
+                                          </p:stCondLst>
+                                        </p:cTn>
+                                        <p:tgtEl>
+                                          <p:spTgt spid="11"/>
+                                        </p:tgtEl>
+                                        <p:attrNameLst>
+                                          <p:attrName>style.visibility</p:attrName>
+                                        </p:attrNameLst>
+                                      </p:cBhvr>
+                                      <p:to>
+                                        <p:strVal val="visible"/>
+                                      </p:to>
+                                    </p:set>
+                                    <p:animEffect transition="in" filter="fade">
+                                      <p:cBhvr>
+                                        <p:cTn id="34" dur="450"/>
+                                        <p:tgtEl>
+                                          <p:spTgt spid="11"/>
+                                        </p:tgtEl>
+                                      </p:cBhvr>
+                                    </p:animEffect>
+                                  </p:childTnLst>
+                                </p:cTn>
+                              </p:par>
+                              <p:par>
+                                <p:cTn id="35" presetID="10" presetClass="entr" presetSubtype="0" fill="hold" grpId="0" nodeType="afterEffect">
+                                  <p:stCondLst>
+                                    <p:cond delay="700"/>
+                                  </p:stCondLst>
+                                  <p:childTnLst>
+                                    <p:set>
+                                      <p:cBhvr>
+                                        <p:cTn id="36" dur="1" fill="hold">
+                                          <p:stCondLst>
+                                            <p:cond delay="0"/>
+                                          </p:stCondLst>
+                                        </p:cTn>
+                                        <p:tgtEl>
+                                          <p:spTgt spid="12"/>
+                                        </p:tgtEl>
+                                        <p:attrNameLst>
+                                          <p:attrName>style.visibility</p:attrName>
+                                        </p:attrNameLst>
+                                      </p:cBhvr>
+                                      <p:to>
+                                        <p:strVal val="visible"/>
+                                      </p:to>
+                                    </p:set>
+                                    <p:animEffect transition="in" filter="fade">
+                                      <p:cBhvr>
+                                        <p:cTn id="37" dur="450"/>
+                                        <p:tgtEl>
+                                          <p:spTgt spid="12"/>
+                                        </p:tgtEl>
+                                      </p:cBhvr>
+                                    </p:animEffect>
+                                  </p:childTnLst>
+                                </p:cTn>
+                              </p:par>
+                              <p:par>
+                                <p:cTn id="38" presetID="10" presetClass="entr" presetSubtype="0" fill="hold" grpId="0" nodeType="afterEffect">
+                                  <p:stCondLst>
+                                    <p:cond delay="770"/>
+                                  </p:stCondLst>
+                                  <p:childTnLst>
+                                    <p:set>
+                                      <p:cBhvr>
+                                        <p:cTn id="39" dur="1" fill="hold">
+                                          <p:stCondLst>
+                                            <p:cond delay="0"/>
+                                          </p:stCondLst>
+                                        </p:cTn>
+                                        <p:tgtEl>
+                                          <p:spTgt spid="13"/>
+                                        </p:tgtEl>
+                                        <p:attrNameLst>
+                                          <p:attrName>style.visibility</p:attrName>
+                                        </p:attrNameLst>
+                                      </p:cBhvr>
+                                      <p:to>
+                                        <p:strVal val="visible"/>
+                                      </p:to>
+                                    </p:set>
+                                    <p:animEffect transition="in" filter="fade">
+                                      <p:cBhvr>
+                                        <p:cTn id="40" dur="450"/>
+                                        <p:tgtEl>
+                                          <p:spTgt spid="13"/>
+                                        </p:tgtEl>
+                                      </p:cBhvr>
+                                    </p:animEffect>
+                                  </p:childTnLst>
+                                </p:cTn>
+                              </p:par>
+                              <p:par>
+                                <p:cTn id="41" presetID="10" presetClass="entr" presetSubtype="0" fill="hold" grpId="0" nodeType="afterEffect">
+                                  <p:stCondLst>
+                                    <p:cond delay="840"/>
+                                  </p:stCondLst>
+                                  <p:childTnLst>
+                                    <p:set>
+                                      <p:cBhvr>
+                                        <p:cTn id="42" dur="1" fill="hold">
+                                          <p:stCondLst>
+                                            <p:cond delay="0"/>
+                                          </p:stCondLst>
+                                        </p:cTn>
+                                        <p:tgtEl>
+                                          <p:spTgt spid="14"/>
+                                        </p:tgtEl>
+                                        <p:attrNameLst>
+                                          <p:attrName>style.visibility</p:attrName>
+                                        </p:attrNameLst>
+                                      </p:cBhvr>
+                                      <p:to>
+                                        <p:strVal val="visible"/>
+                                      </p:to>
+                                    </p:set>
+                                    <p:animEffect transition="in" filter="fade">
+                                      <p:cBhvr>
+                                        <p:cTn id="43" dur="450"/>
+                                        <p:tgtEl>
+                                          <p:spTgt spid="14"/>
+                                        </p:tgtEl>
+                                      </p:cBhvr>
+                                    </p:animEffect>
+                                  </p:childTnLst>
+                                </p:cTn>
+                              </p:par>
+                              <p:par>
+                                <p:cTn id="44" presetID="10" presetClass="entr" presetSubtype="0" fill="hold" grpId="0" nodeType="afterEffect">
+                                  <p:stCondLst>
+                                    <p:cond delay="910"/>
+                                  </p:stCondLst>
+                                  <p:childTnLst>
+                                    <p:set>
+                                      <p:cBhvr>
+                                        <p:cTn id="45" dur="1" fill="hold">
+                                          <p:stCondLst>
+                                            <p:cond delay="0"/>
+                                          </p:stCondLst>
+                                        </p:cTn>
+                                        <p:tgtEl>
+                                          <p:spTgt spid="15"/>
+                                        </p:tgtEl>
+                                        <p:attrNameLst>
+                                          <p:attrName>style.visibility</p:attrName>
+                                        </p:attrNameLst>
+                                      </p:cBhvr>
+                                      <p:to>
+                                        <p:strVal val="visible"/>
+                                      </p:to>
+                                    </p:set>
+                                    <p:animEffect transition="in" filter="fade">
+                                      <p:cBhvr>
+                                        <p:cTn id="46" dur="450"/>
+                                        <p:tgtEl>
+                                          <p:spTgt spid="15"/>
+                                        </p:tgtEl>
+                                      </p:cBhvr>
+                                    </p:animEffect>
+                                  </p:childTnLst>
+                                </p:cTn>
+                              </p:par>
+                              <p:par>
+                                <p:cTn id="47" presetID="10" presetClass="entr" presetSubtype="0" fill="hold" grpId="0" nodeType="afterEffect">
+                                  <p:stCondLst>
+                                    <p:cond delay="980"/>
+                                  </p:stCondLst>
+                                  <p:childTnLst>
+                                    <p:set>
+                                      <p:cBhvr>
+                                        <p:cTn id="48" dur="1" fill="hold">
+                                          <p:stCondLst>
+                                            <p:cond delay="0"/>
+                                          </p:stCondLst>
+                                        </p:cTn>
+                                        <p:tgtEl>
+                                          <p:spTgt spid="16"/>
+                                        </p:tgtEl>
+                                        <p:attrNameLst>
+                                          <p:attrName>style.visibility</p:attrName>
+                                        </p:attrNameLst>
+                                      </p:cBhvr>
+                                      <p:to>
+                                        <p:strVal val="visible"/>
+                                      </p:to>
+                                    </p:set>
+                                    <p:animEffect transition="in" filter="fade">
+                                      <p:cBhvr>
+                                        <p:cTn id="49" dur="450"/>
+                                        <p:tgtEl>
+                                          <p:spTgt spid="16"/>
+                                        </p:tgtEl>
+                                      </p:cBhvr>
+                                    </p:animEffect>
+                                  </p:childTnLst>
+                                </p:cTn>
+                              </p:par>
+                              <p:par>
+                                <p:cTn id="50" presetID="10" presetClass="entr" presetSubtype="0" fill="hold" grpId="0" nodeType="afterEffect">
+                                  <p:stCondLst>
+                                    <p:cond delay="1050"/>
+                                  </p:stCondLst>
+                                  <p:childTnLst>
+                                    <p:set>
+                                      <p:cBhvr>
+                                        <p:cTn id="51" dur="1" fill="hold">
+                                          <p:stCondLst>
+                                            <p:cond delay="0"/>
+                                          </p:stCondLst>
+                                        </p:cTn>
+                                        <p:tgtEl>
+                                          <p:spTgt spid="17"/>
+                                        </p:tgtEl>
+                                        <p:attrNameLst>
+                                          <p:attrName>style.visibility</p:attrName>
+                                        </p:attrNameLst>
+                                      </p:cBhvr>
+                                      <p:to>
+                                        <p:strVal val="visible"/>
+                                      </p:to>
+                                    </p:set>
+                                    <p:animEffect transition="in" filter="fade">
+                                      <p:cBhvr>
+                                        <p:cTn id="52" dur="450"/>
+                                        <p:tgtEl>
+                                          <p:spTgt spid="17"/>
+                                        </p:tgtEl>
+                                      </p:cBhvr>
+                                    </p:animEffect>
+                                  </p:childTnLst>
+                                </p:cTn>
+                              </p:par>
+                              <p:par>
+                                <p:cTn id="53" presetID="10" presetClass="entr" presetSubtype="0" fill="hold" grpId="0" nodeType="afterEffect">
+                                  <p:stCondLst>
+                                    <p:cond delay="1120"/>
+                                  </p:stCondLst>
+                                  <p:childTnLst>
+                                    <p:set>
+                                      <p:cBhvr>
+                                        <p:cTn id="54" dur="1" fill="hold">
+                                          <p:stCondLst>
+                                            <p:cond delay="0"/>
+                                          </p:stCondLst>
+                                        </p:cTn>
+                                        <p:tgtEl>
+                                          <p:spTgt spid="18"/>
+                                        </p:tgtEl>
+                                        <p:attrNameLst>
+                                          <p:attrName>style.visibility</p:attrName>
+                                        </p:attrNameLst>
+                                      </p:cBhvr>
+                                      <p:to>
+                                        <p:strVal val="visible"/>
+                                      </p:to>
+                                    </p:set>
+                                    <p:animEffect transition="in" filter="fade">
+                                      <p:cBhvr>
+                                        <p:cTn id="55" dur="450"/>
+                                        <p:tgtEl>
+                                          <p:spTgt spid="18"/>
+                                        </p:tgtEl>
+                                      </p:cBhvr>
+                                    </p:animEffect>
+                                  </p:childTnLst>
+                                </p:cTn>
+                              </p:par>
+                              <p:par>
+                                <p:cTn id="56" presetID="10" presetClass="entr" presetSubtype="0" fill="hold" grpId="0" nodeType="afterEffect">
+                                  <p:stCondLst>
+                                    <p:cond delay="1190"/>
+                                  </p:stCondLst>
+                                  <p:childTnLst>
+                                    <p:set>
+                                      <p:cBhvr>
+                                        <p:cTn id="57" dur="1" fill="hold">
+                                          <p:stCondLst>
+                                            <p:cond delay="0"/>
+                                          </p:stCondLst>
+                                        </p:cTn>
+                                        <p:tgtEl>
+                                          <p:spTgt spid="19"/>
+                                        </p:tgtEl>
+                                        <p:attrNameLst>
+                                          <p:attrName>style.visibility</p:attrName>
+                                        </p:attrNameLst>
+                                      </p:cBhvr>
+                                      <p:to>
+                                        <p:strVal val="visible"/>
+                                      </p:to>
+                                    </p:set>
+                                    <p:animEffect transition="in" filter="fade">
+                                      <p:cBhvr>
+                                        <p:cTn id="58" dur="450"/>
+                                        <p:tgtEl>
+                                          <p:spTgt spid="19"/>
+                                        </p:tgtEl>
+                                      </p:cBhvr>
+                                    </p:animEffect>
+                                  </p:childTnLst>
+                                </p:cTn>
+                              </p:par>
+                              <p:par>
+                                <p:cTn id="59" presetID="10" presetClass="entr" presetSubtype="0" fill="hold" grpId="0" nodeType="afterEffect">
+                                  <p:stCondLst>
+                                    <p:cond delay="1260"/>
+                                  </p:stCondLst>
+                                  <p:childTnLst>
+                                    <p:set>
+                                      <p:cBhvr>
+                                        <p:cTn id="60" dur="1" fill="hold">
+                                          <p:stCondLst>
+                                            <p:cond delay="0"/>
+                                          </p:stCondLst>
+                                        </p:cTn>
+                                        <p:tgtEl>
+                                          <p:spTgt spid="20"/>
+                                        </p:tgtEl>
+                                        <p:attrNameLst>
+                                          <p:attrName>style.visibility</p:attrName>
+                                        </p:attrNameLst>
+                                      </p:cBhvr>
+                                      <p:to>
+                                        <p:strVal val="visible"/>
+                                      </p:to>
+                                    </p:set>
+                                    <p:animEffect transition="in" filter="fade">
+                                      <p:cBhvr>
+                                        <p:cTn id="61" dur="450"/>
+                                        <p:tgtEl>
+                                          <p:spTgt spid="20"/>
+                                        </p:tgtEl>
+                                      </p:cBhvr>
+                                    </p:animEffect>
+                                  </p:childTnLst>
+                                </p:cTn>
+                              </p:par>
+                              <p:par>
+                                <p:cTn id="62" presetID="10" presetClass="entr" presetSubtype="0" fill="hold" grpId="0" nodeType="afterEffect">
+                                  <p:stCondLst>
+                                    <p:cond delay="1300"/>
+                                  </p:stCondLst>
+                                  <p:childTnLst>
+                                    <p:set>
+                                      <p:cBhvr>
+                                        <p:cTn id="63" dur="1" fill="hold">
+                                          <p:stCondLst>
+                                            <p:cond delay="0"/>
+                                          </p:stCondLst>
+                                        </p:cTn>
+                                        <p:tgtEl>
+                                          <p:spTgt spid="21"/>
+                                        </p:tgtEl>
+                                        <p:attrNameLst>
+                                          <p:attrName>style.visibility</p:attrName>
+                                        </p:attrNameLst>
+                                      </p:cBhvr>
+                                      <p:to>
+                                        <p:strVal val="visible"/>
+                                      </p:to>
+                                    </p:set>
+                                    <p:animEffect transition="in" filter="fade">
+                                      <p:cBhvr>
+                                        <p:cTn id="64" dur="450"/>
+                                        <p:tgtEl>
+                                          <p:spTgt spid="21"/>
+                                        </p:tgtEl>
+                                      </p:cBhvr>
+                                    </p:animEffect>
+                                  </p:childTnLst>
+                                </p:cTn>
+                              </p:par>
+                              <p:par>
+                                <p:cTn id="65" presetID="10" presetClass="entr" presetSubtype="0" fill="hold" grpId="0" nodeType="afterEffect">
+                                  <p:stCondLst>
+                                    <p:cond delay="1300"/>
+                                  </p:stCondLst>
+                                  <p:childTnLst>
+                                    <p:set>
+                                      <p:cBhvr>
+                                        <p:cTn id="66" dur="1" fill="hold">
+                                          <p:stCondLst>
+                                            <p:cond delay="0"/>
+                                          </p:stCondLst>
+                                        </p:cTn>
+                                        <p:tgtEl>
+                                          <p:spTgt spid="22"/>
+                                        </p:tgtEl>
+                                        <p:attrNameLst>
+                                          <p:attrName>style.visibility</p:attrName>
+                                        </p:attrNameLst>
+                                      </p:cBhvr>
+                                      <p:to>
+                                        <p:strVal val="visible"/>
+                                      </p:to>
+                                    </p:set>
+                                    <p:animEffect transition="in" filter="fade">
+                                      <p:cBhvr>
+                                        <p:cTn id="67" dur="450"/>
+                                        <p:tgtEl>
+                                          <p:spTgt spid="22"/>
+                                        </p:tgtEl>
+                                      </p:cBhvr>
+                                    </p:animEffect>
+                                  </p:childTnLst>
+                                </p:cTn>
+                              </p:par>
+                              <p:par>
+                                <p:cTn id="68" presetID="10" presetClass="entr" presetSubtype="0" fill="hold" grpId="0" nodeType="afterEffect">
+                                  <p:stCondLst>
+                                    <p:cond delay="1300"/>
+                                  </p:stCondLst>
+                                  <p:childTnLst>
+                                    <p:set>
+                                      <p:cBhvr>
+                                        <p:cTn id="69" dur="1" fill="hold">
+                                          <p:stCondLst>
+                                            <p:cond delay="0"/>
+                                          </p:stCondLst>
+                                        </p:cTn>
+                                        <p:tgtEl>
+                                          <p:spTgt spid="23"/>
+                                        </p:tgtEl>
+                                        <p:attrNameLst>
+                                          <p:attrName>style.visibility</p:attrName>
+                                        </p:attrNameLst>
+                                      </p:cBhvr>
+                                      <p:to>
+                                        <p:strVal val="visible"/>
+                                      </p:to>
+                                    </p:set>
+                                    <p:animEffect transition="in" filter="fade">
+                                      <p:cBhvr>
+                                        <p:cTn id="70" dur="450"/>
+                                        <p:tgtEl>
+                                          <p:spTgt spid="23"/>
+                                        </p:tgtEl>
+                                      </p:cBhvr>
+                                    </p:animEffect>
+                                  </p:childTnLst>
+                                </p:cTn>
+                              </p:par>
+                              <p:par>
+                                <p:cTn id="71" presetID="10" presetClass="entr" presetSubtype="0" fill="hold" grpId="0" nodeType="afterEffect">
+                                  <p:stCondLst>
+                                    <p:cond delay="1300"/>
+                                  </p:stCondLst>
+                                  <p:childTnLst>
+                                    <p:set>
+                                      <p:cBhvr>
+                                        <p:cTn id="72" dur="1" fill="hold">
+                                          <p:stCondLst>
+                                            <p:cond delay="0"/>
+                                          </p:stCondLst>
+                                        </p:cTn>
+                                        <p:tgtEl>
+                                          <p:spTgt spid="24"/>
+                                        </p:tgtEl>
+                                        <p:attrNameLst>
+                                          <p:attrName>style.visibility</p:attrName>
+                                        </p:attrNameLst>
+                                      </p:cBhvr>
+                                      <p:to>
+                                        <p:strVal val="visible"/>
+                                      </p:to>
+                                    </p:set>
+                                    <p:animEffect transition="in" filter="fade">
+                                      <p:cBhvr>
+                                        <p:cTn id="73" dur="450"/>
+                                        <p:tgtEl>
+                                          <p:spTgt spid="24"/>
+                                        </p:tgtEl>
+                                      </p:cBhvr>
+                                    </p:animEffect>
+                                  </p:childTnLst>
+                                </p:cTn>
+                              </p:par>
+                              <p:par>
+                                <p:cTn id="74" presetID="10" presetClass="entr" presetSubtype="0" fill="hold" grpId="0" nodeType="afterEffect">
+                                  <p:stCondLst>
+                                    <p:cond delay="1300"/>
+                                  </p:stCondLst>
+                                  <p:childTnLst>
+                                    <p:set>
+                                      <p:cBhvr>
+                                        <p:cTn id="75" dur="1" fill="hold">
+                                          <p:stCondLst>
+                                            <p:cond delay="0"/>
+                                          </p:stCondLst>
+                                        </p:cTn>
+                                        <p:tgtEl>
+                                          <p:spTgt spid="25"/>
+                                        </p:tgtEl>
+                                        <p:attrNameLst>
+                                          <p:attrName>style.visibility</p:attrName>
+                                        </p:attrNameLst>
+                                      </p:cBhvr>
+                                      <p:to>
+                                        <p:strVal val="visible"/>
+                                      </p:to>
+                                    </p:set>
+                                    <p:animEffect transition="in" filter="fade">
+                                      <p:cBhvr>
+                                        <p:cTn id="76" dur="450"/>
+                                        <p:tgtEl>
+                                          <p:spTgt spid="25"/>
+                                        </p:tgtEl>
+                                      </p:cBhvr>
+                                    </p:animEffect>
+                                  </p:childTnLst>
+                                </p:cTn>
+                              </p:par>
+                              <p:par>
+                                <p:cTn id="77" presetID="10" presetClass="entr" presetSubtype="0" fill="hold" grpId="0" nodeType="afterEffect">
+                                  <p:stCondLst>
+                                    <p:cond delay="1300"/>
+                                  </p:stCondLst>
+                                  <p:childTnLst>
+                                    <p:set>
+                                      <p:cBhvr>
+                                        <p:cTn id="78" dur="1" fill="hold">
+                                          <p:stCondLst>
+                                            <p:cond delay="0"/>
+                                          </p:stCondLst>
+                                        </p:cTn>
+                                        <p:tgtEl>
+                                          <p:spTgt spid="26"/>
+                                        </p:tgtEl>
+                                        <p:attrNameLst>
+                                          <p:attrName>style.visibility</p:attrName>
+                                        </p:attrNameLst>
+                                      </p:cBhvr>
+                                      <p:to>
+                                        <p:strVal val="visible"/>
+                                      </p:to>
+                                    </p:set>
+                                    <p:animEffect transition="in" filter="fade">
+                                      <p:cBhvr>
+                                        <p:cTn id="79" dur="450"/>
+                                        <p:tgtEl>
+                                          <p:spTgt spid="26"/>
+                                        </p:tgtEl>
+                                      </p:cBhvr>
+                                    </p:animEffect>
+                                  </p:childTnLst>
+                                </p:cTn>
+                              </p:par>
+                              <p:par>
+                                <p:cTn id="80" presetID="10" presetClass="entr" presetSubtype="0" fill="hold" grpId="0" nodeType="afterEffect">
+                                  <p:stCondLst>
+                                    <p:cond delay="1300"/>
+                                  </p:stCondLst>
+                                  <p:childTnLst>
+                                    <p:set>
+                                      <p:cBhvr>
+                                        <p:cTn id="81" dur="1" fill="hold">
+                                          <p:stCondLst>
+                                            <p:cond delay="0"/>
+                                          </p:stCondLst>
+                                        </p:cTn>
+                                        <p:tgtEl>
+                                          <p:spTgt spid="27"/>
+                                        </p:tgtEl>
+                                        <p:attrNameLst>
+                                          <p:attrName>style.visibility</p:attrName>
+                                        </p:attrNameLst>
+                                      </p:cBhvr>
+                                      <p:to>
+                                        <p:strVal val="visible"/>
+                                      </p:to>
+                                    </p:set>
+                                    <p:animEffect transition="in" filter="fade">
+                                      <p:cBhvr>
+                                        <p:cTn id="82" dur="450"/>
+                                        <p:tgtEl>
+                                          <p:spTgt spid="27"/>
+                                        </p:tgtEl>
+                                      </p:cBhvr>
+                                    </p:animEffect>
+                                  </p:childTnLst>
+                                </p:cTn>
+                              </p:par>
+                              <p:par>
+                                <p:cTn id="83" presetID="10" presetClass="entr" presetSubtype="0" fill="hold" grpId="0" nodeType="afterEffect">
+                                  <p:stCondLst>
+                                    <p:cond delay="1300"/>
+                                  </p:stCondLst>
+                                  <p:childTnLst>
+                                    <p:set>
+                                      <p:cBhvr>
+                                        <p:cTn id="84" dur="1" fill="hold">
+                                          <p:stCondLst>
+                                            <p:cond delay="0"/>
+                                          </p:stCondLst>
+                                        </p:cTn>
+                                        <p:tgtEl>
+                                          <p:spTgt spid="28"/>
+                                        </p:tgtEl>
+                                        <p:attrNameLst>
+                                          <p:attrName>style.visibility</p:attrName>
+                                        </p:attrNameLst>
+                                      </p:cBhvr>
+                                      <p:to>
+                                        <p:strVal val="visible"/>
+                                      </p:to>
+                                    </p:set>
+                                    <p:animEffect transition="in" filter="fade">
+                                      <p:cBhvr>
+                                        <p:cTn id="85" dur="450"/>
+                                        <p:tgtEl>
+                                          <p:spTgt spid="28"/>
+                                        </p:tgtEl>
+                                      </p:cBhvr>
+                                    </p:animEffect>
+                                  </p:childTnLst>
+                                </p:cTn>
+                              </p:par>
+                              <p:par>
+                                <p:cTn id="86" presetID="10" presetClass="entr" presetSubtype="0" fill="hold" grpId="0" nodeType="afterEffect">
+                                  <p:stCondLst>
+                                    <p:cond delay="1300"/>
+                                  </p:stCondLst>
+                                  <p:childTnLst>
+                                    <p:set>
+                                      <p:cBhvr>
+                                        <p:cTn id="87" dur="1" fill="hold">
+                                          <p:stCondLst>
+                                            <p:cond delay="0"/>
+                                          </p:stCondLst>
+                                        </p:cTn>
+                                        <p:tgtEl>
+                                          <p:spTgt spid="29"/>
+                                        </p:tgtEl>
+                                        <p:attrNameLst>
+                                          <p:attrName>style.visibility</p:attrName>
+                                        </p:attrNameLst>
+                                      </p:cBhvr>
+                                      <p:to>
+                                        <p:strVal val="visible"/>
+                                      </p:to>
+                                    </p:set>
+                                    <p:animEffect transition="in" filter="fade">
+                                      <p:cBhvr>
+                                        <p:cTn id="88" dur="450"/>
+                                        <p:tgtEl>
+                                          <p:spTgt spid="29"/>
+                                        </p:tgtEl>
+                                      </p:cBhvr>
+                                    </p:animEffect>
+                                  </p:childTnLst>
+                                </p:cTn>
+                              </p:par>
+                              <p:par>
+                                <p:cTn id="89" presetID="10" presetClass="entr" presetSubtype="0" fill="hold" grpId="0" nodeType="afterEffect">
+                                  <p:stCondLst>
+                                    <p:cond delay="1300"/>
+                                  </p:stCondLst>
+                                  <p:childTnLst>
+                                    <p:set>
+                                      <p:cBhvr>
+                                        <p:cTn id="90" dur="1" fill="hold">
+                                          <p:stCondLst>
+                                            <p:cond delay="0"/>
+                                          </p:stCondLst>
+                                        </p:cTn>
+                                        <p:tgtEl>
+                                          <p:spTgt spid="30"/>
+                                        </p:tgtEl>
+                                        <p:attrNameLst>
+                                          <p:attrName>style.visibility</p:attrName>
+                                        </p:attrNameLst>
+                                      </p:cBhvr>
+                                      <p:to>
+                                        <p:strVal val="visible"/>
+                                      </p:to>
+                                    </p:set>
+                                    <p:animEffect transition="in" filter="fade">
+                                      <p:cBhvr>
+                                        <p:cTn id="91" dur="450"/>
+                                        <p:tgtEl>
+                                          <p:spTgt spid="30"/>
+                                        </p:tgtEl>
+                                      </p:cBhvr>
+                                    </p:animEffect>
+                                  </p:childTnLst>
+                                </p:cTn>
+                              </p:par>
+                              <p:par>
+                                <p:cTn id="92" presetID="10" presetClass="entr" presetSubtype="0" fill="hold" grpId="0" nodeType="afterEffect">
+                                  <p:stCondLst>
+                                    <p:cond delay="1300"/>
+                                  </p:stCondLst>
+                                  <p:childTnLst>
+                                    <p:set>
+                                      <p:cBhvr>
+                                        <p:cTn id="93" dur="1" fill="hold">
+                                          <p:stCondLst>
+                                            <p:cond delay="0"/>
+                                          </p:stCondLst>
+                                        </p:cTn>
+                                        <p:tgtEl>
+                                          <p:spTgt spid="31"/>
+                                        </p:tgtEl>
+                                        <p:attrNameLst>
+                                          <p:attrName>style.visibility</p:attrName>
+                                        </p:attrNameLst>
+                                      </p:cBhvr>
+                                      <p:to>
+                                        <p:strVal val="visible"/>
+                                      </p:to>
+                                    </p:set>
+                                    <p:animEffect transition="in" filter="fade">
+                                      <p:cBhvr>
+                                        <p:cTn id="94" dur="450"/>
+                                        <p:tgtEl>
+                                          <p:spTgt spid="31"/>
+                                        </p:tgtEl>
+                                      </p:cBhvr>
+                                    </p:animEffect>
+                                  </p:childTnLst>
+                                </p:cTn>
+                              </p:par>
+                              <p:par>
+                                <p:cTn id="95" presetID="10" presetClass="entr" presetSubtype="0" fill="hold" grpId="0" nodeType="afterEffect">
+                                  <p:stCondLst>
+                                    <p:cond delay="1300"/>
+                                  </p:stCondLst>
+                                  <p:childTnLst>
+                                    <p:set>
+                                      <p:cBhvr>
+                                        <p:cTn id="96" dur="1" fill="hold">
+                                          <p:stCondLst>
+                                            <p:cond delay="0"/>
+                                          </p:stCondLst>
+                                        </p:cTn>
+                                        <p:tgtEl>
+                                          <p:spTgt spid="32"/>
+                                        </p:tgtEl>
+                                        <p:attrNameLst>
+                                          <p:attrName>style.visibility</p:attrName>
+                                        </p:attrNameLst>
+                                      </p:cBhvr>
+                                      <p:to>
+                                        <p:strVal val="visible"/>
+                                      </p:to>
+                                    </p:set>
+                                    <p:animEffect transition="in" filter="fade">
+                                      <p:cBhvr>
+                                        <p:cTn id="97" dur="450"/>
+                                        <p:tgtEl>
+                                          <p:spTgt spid="32"/>
+                                        </p:tgtEl>
+                                      </p:cBhvr>
+                                    </p:animEffect>
+                                  </p:childTnLst>
+                                </p:cTn>
+                              </p:par>
+                              <p:par>
+                                <p:cTn id="98" presetID="10" presetClass="entr" presetSubtype="0" fill="hold" grpId="0" nodeType="afterEffect">
+                                  <p:stCondLst>
+                                    <p:cond delay="1300"/>
+                                  </p:stCondLst>
+                                  <p:childTnLst>
+                                    <p:set>
+                                      <p:cBhvr>
+                                        <p:cTn id="99" dur="1" fill="hold">
+                                          <p:stCondLst>
+                                            <p:cond delay="0"/>
+                                          </p:stCondLst>
+                                        </p:cTn>
+                                        <p:tgtEl>
+                                          <p:spTgt spid="33"/>
+                                        </p:tgtEl>
+                                        <p:attrNameLst>
+                                          <p:attrName>style.visibility</p:attrName>
+                                        </p:attrNameLst>
+                                      </p:cBhvr>
+                                      <p:to>
+                                        <p:strVal val="visible"/>
+                                      </p:to>
+                                    </p:set>
+                                    <p:animEffect transition="in" filter="fade">
+                                      <p:cBhvr>
+                                        <p:cTn id="100" dur="450"/>
+                                        <p:tgtEl>
+                                          <p:spTgt spid="33"/>
+                                        </p:tgtEl>
+                                      </p:cBhvr>
+                                    </p:animEffect>
+                                  </p:childTnLst>
+                                </p:cTn>
+                              </p:par>
+                            </p:childTnLst>
+                          </p:cTn>
+                        </p:par>
+                      </p:childTnLst>
+                    </p:cTn>
+                  </p:par>
+                </p:childTnLst>
+              </p:cTn>
+              <p:prevCondLst>
+                <p:cond evt="onPrev" delay="0">
+                  <p:tgtEl>
+                    <p:sldTgt/>
+                  </p:tgtEl>
+                </p:cond>
+              </p:prevCondLst>
+              <p:nextCondLst>
+                <p:cond evt="onNext" delay="0">
+                  <p:tgtEl>
+                    <p:sldTgt/>
+                  </p:tgtEl>
+                </p:cond>
+              </p:nextCondLst>
+            </p:seq>
+          </p:childTnLst>
+        </p:cTn>
+      </p:par>
+    </p:tnLst>
+    <p:bldLst>
+      <p:bldP spid="2" grpId="0" animBg="1"/>
+      <p:bldP spid="3" grpId="0" animBg="1"/>
+      <p:bldP spid="4" grpId="0" animBg="1"/>
+      <p:bldP spid="5" grpId="0" animBg="1"/>
+      <p:bldP spid="6" grpId="0" animBg="1"/>
+      <p:bldP spid="7" grpId="0" animBg="1"/>
+      <p:bldP spid="8" grpId="0" animBg="1"/>
+      <p:bldP spid="9" grpId="0" animBg="1"/>
+      <p:bldP spid="10" grpId="0" animBg="1"/>
+      <p:bldP spid="11" grpId="0" animBg="1"/>
+      <p:bldP spid="12" grpId="0" animBg="1"/>
+      <p:bldP spid="13" grpId="0" animBg="1"/>
+      <p:bldP spid="14" grpId="0" animBg="1"/>
+      <p:bldP spid="15" grpId="0" animBg="1"/>
+      <p:bldP spid="16" grpId="0" animBg="1"/>
+      <p:bldP spid="17" grpId="0" animBg="1"/>
+      <p:bldP spid="18" grpId="0" animBg="1"/>
+      <p:bldP spid="19" grpId="0" animBg="1"/>
+      <p:bldP spid="20" grpId="0" animBg="1"/>
+      <p:bldP spid="21" grpId="0" animBg="1"/>
+      <p:bldP spid="22" grpId="0" animBg="1"/>
+      <p:bldP spid="23" grpId="0" animBg="1"/>
+      <p:bldP spid="24" grpId="0" animBg="1"/>
+      <p:bldP spid="25" grpId="0" animBg="1"/>
+      <p:bldP spid="26" grpId="0" animBg="1"/>
+      <p:bldP spid="27" grpId="0" animBg="1"/>
+      <p:bldP spid="28" grpId="0" animBg="1"/>
+      <p:bldP spid="29" grpId="0" animBg="1"/>
+      <p:bldP spid="30" grpId="0" animBg="1"/>
+      <p:bldP spid="31" grpId="0" animBg="1"/>
+      <p:bldP spid="32" grpId="0" animBg="1"/>
+      <p:bldP spid="33" grpId="0" animBg="1"/>
+    </p:bldLst>
+  </p:timing>
+</p:sld>
+</file>
+
+<file path=ppt/slides/slide11.xml><?xml version="1.0" encoding="utf-8"?>
+<p:sld xmlns:a="http://schemas.openxmlformats.org/drawingml/2006/main" xmlns:r="http://schemas.openxmlformats.org/officeDocument/2006/relationships" xmlns:p="http://schemas.openxmlformats.org/presentationml/2006/main">
+  <p:cSld name="Slide 11">
+    <p:bg>
+      <p:bgPr>
+        <a:solidFill>
+          <a:srgbClr val="F4F6F8"/>
+        </a:solidFill>
+        <a:effectLst/>
+      </p:bgPr>
+    </p:bg>
+    <p:spTree>
+      <p:nvGrpSpPr>
+        <p:cNvPr id="1" name=""/>
+        <p:cNvGrpSpPr/>
+        <p:nvPr/>
+      </p:nvGrpSpPr>
+      <p:grpSpPr>
+        <a:xfrm>
+          <a:off x="0" y="0"/>
+          <a:ext cx="0" cy="0"/>
+          <a:chOff x="0" y="0"/>
+          <a:chExt cx="0" cy="0"/>
+        </a:xfrm>
+      </p:grpSpPr>
+      <p:sp>
+        <p:nvSpPr>
+          <p:cNvPr id="2" name="Text 0"/>
+          <p:cNvSpPr txBox="1"/>
+          <p:nvPr/>
+        </p:nvSpPr>
+        <p:spPr>
+          <a:xfrm>
+            <a:off x="685800" y="502920"/>
+            <a:ext cx="10820095" cy="566928"/>
+          </a:xfrm>
+          <a:prstGeom prst="rect">
+            <a:avLst/>
+          </a:prstGeom>
+          <a:noFill/>
+          <a:ln/>
+        </p:spPr>
+        <p:txBody>
+          <a:bodyPr wrap="square" lIns="0" tIns="0" rIns="0" bIns="0" rtlCol="0" anchor="ctr"/>
+          <a:lstStyle/>
+          <a:p>
+            <a:pPr marL="0" indent="0" algn="l">
+              <a:buNone/>
+            </a:pPr>
+            <a:r>
+              <a:rPr lang="en-US" sz="3200" b="1" dirty="0">
+                <a:solidFill>
+                  <a:srgbClr val="1B2430"/>
+                </a:solidFill>
+                <a:latin typeface="Cambria" pitchFamily="34" charset="0"/>
+                <a:ea typeface="Cambria" pitchFamily="34" charset="-122"/>
+                <a:cs typeface="Cambria" pitchFamily="34" charset="-120"/>
+              </a:rPr>
               <a:t>Cómo trabajamos con ustedes en el camino</a:t>
             </a:r>
             <a:endParaRPr lang="en-US" sz="3200" dirty="0"/>
@@ -4211,9 +6601,9 @@
 </p:sld>
 </file>
 
-<file path=ppt/slides/slide11.xml><?xml version="1.0" encoding="utf-8"?>
+<file path=ppt/slides/slide12.xml><?xml version="1.0" encoding="utf-8"?>
 <p:sld xmlns:a="http://schemas.openxmlformats.org/drawingml/2006/main" xmlns:r="http://schemas.openxmlformats.org/officeDocument/2006/relationships" xmlns:p="http://schemas.openxmlformats.org/presentationml/2006/main">
-  <p:cSld name="Slide 11">
+  <p:cSld name="Slide 12">
     <p:bg>
       <p:bgPr>
         <a:solidFill>
@@ -6978,9 +9368,9 @@
 </p:sld>
 </file>
 
-<file path=ppt/slides/slide12.xml><?xml version="1.0" encoding="utf-8"?>
+<file path=ppt/slides/slide13.xml><?xml version="1.0" encoding="utf-8"?>
 <p:sld xmlns:a="http://schemas.openxmlformats.org/drawingml/2006/main" xmlns:r="http://schemas.openxmlformats.org/officeDocument/2006/relationships" xmlns:p="http://schemas.openxmlformats.org/presentationml/2006/main">
-  <p:cSld name="Slide 12">
+  <p:cSld name="Slide 13">
     <p:bg>
       <p:bgPr>
         <a:solidFill>
@@ -10740,6 +13130,3101 @@
                 <a:ea typeface="Cambria" pitchFamily="34" charset="-122"/>
                 <a:cs typeface="Cambria" pitchFamily="34" charset="-120"/>
               </a:rPr>
+              <a:t>El anidado, en una imagen</a:t>
+            </a:r>
+            <a:endParaRPr lang="en-US" sz="3200" dirty="0"/>
+          </a:p>
+        </p:txBody>
+      </p:sp>
+      <p:sp>
+        <p:nvSpPr>
+          <p:cNvPr id="3" name="Text 1"/>
+          <p:cNvSpPr txBox="1"/>
+          <p:nvPr/>
+        </p:nvSpPr>
+        <p:spPr>
+          <a:xfrm>
+            <a:off x="685800" y="1097280"/>
+            <a:ext cx="10820095" cy="347472"/>
+          </a:xfrm>
+          <a:prstGeom prst="rect">
+            <a:avLst/>
+          </a:prstGeom>
+          <a:noFill/>
+          <a:ln/>
+        </p:spPr>
+        <p:txBody>
+          <a:bodyPr wrap="square" lIns="0" tIns="0" rIns="0" bIns="0" rtlCol="0" anchor="ctr"/>
+          <a:lstStyle/>
+          <a:p>
+            <a:pPr marL="0" indent="0" algn="l">
+              <a:buNone/>
+            </a:pPr>
+            <a:r>
+              <a:rPr lang="en-US" sz="1400" dirty="0">
+                <a:solidFill>
+                  <a:srgbClr val="6B7A8C"/>
+                </a:solidFill>
+                <a:latin typeface="Calibri" pitchFamily="34" charset="0"/>
+                <a:ea typeface="Calibri" pitchFamily="34" charset="-122"/>
+                <a:cs typeface="Calibri" pitchFamily="34" charset="-120"/>
+              </a:rPr>
+              <a:t>La misma plancha y el mismo juego de piezas, acomodados de dos maneras distintas.</a:t>
+            </a:r>
+            <a:endParaRPr lang="en-US" sz="1400" dirty="0"/>
+          </a:p>
+        </p:txBody>
+      </p:sp>
+      <p:sp>
+        <p:nvSpPr>
+          <p:cNvPr id="4" name="Shape 2"/>
+          <p:cNvSpPr/>
+          <p:nvPr/>
+        </p:nvSpPr>
+        <p:spPr>
+          <a:xfrm>
+            <a:off x="685800" y="1691640"/>
+            <a:ext cx="5248656" cy="3703320"/>
+          </a:xfrm>
+          <a:prstGeom prst="roundRect">
+            <a:avLst>
+              <a:gd name="adj" fmla="val 1975"/>
+            </a:avLst>
+          </a:prstGeom>
+          <a:solidFill>
+            <a:srgbClr val="FFFFFF"/>
+          </a:solidFill>
+          <a:ln w="12700">
+            <a:solidFill>
+              <a:srgbClr val="DCE3EA"/>
+            </a:solidFill>
+            <a:prstDash val="solid"/>
+          </a:ln>
+          <a:effectLst>
+            <a:outerShdw blurRad="127000" dist="25400" dir="5400000" algn="bl" rotWithShape="0">
+              <a:srgbClr val="9AA8B5">
+                <a:alpha val="25000"/>
+              </a:srgbClr>
+            </a:outerShdw>
+          </a:effectLst>
+        </p:spPr>
+      </p:sp>
+      <p:sp>
+        <p:nvSpPr>
+          <p:cNvPr id="5" name="Text 3"/>
+          <p:cNvSpPr txBox="1"/>
+          <p:nvPr/>
+        </p:nvSpPr>
+        <p:spPr>
+          <a:xfrm>
+            <a:off x="1005840" y="1828800"/>
+            <a:ext cx="4608576" cy="292608"/>
+          </a:xfrm>
+          <a:prstGeom prst="rect">
+            <a:avLst/>
+          </a:prstGeom>
+          <a:noFill/>
+          <a:ln/>
+        </p:spPr>
+        <p:txBody>
+          <a:bodyPr wrap="square" lIns="0" tIns="0" rIns="0" bIns="0" rtlCol="0" anchor="ctr"/>
+          <a:lstStyle/>
+          <a:p>
+            <a:pPr marL="0" indent="0">
+              <a:buNone/>
+            </a:pPr>
+            <a:r>
+              <a:rPr lang="en-US" sz="1450" b="1" dirty="0">
+                <a:solidFill>
+                  <a:srgbClr val="1B2430"/>
+                </a:solidFill>
+                <a:latin typeface="Calibri" pitchFamily="34" charset="0"/>
+                <a:ea typeface="Calibri" pitchFamily="34" charset="-122"/>
+                <a:cs typeface="Calibri" pitchFamily="34" charset="-120"/>
+              </a:rPr>
+              <a:t>Hoy: acomodado a ojo</a:t>
+            </a:r>
+            <a:endParaRPr lang="en-US" sz="1450" dirty="0"/>
+          </a:p>
+        </p:txBody>
+      </p:sp>
+      <p:sp>
+        <p:nvSpPr>
+          <p:cNvPr id="6" name="Text 4"/>
+          <p:cNvSpPr txBox="1"/>
+          <p:nvPr/>
+        </p:nvSpPr>
+        <p:spPr>
+          <a:xfrm>
+            <a:off x="1005840" y="2139696"/>
+            <a:ext cx="4608576" cy="274320"/>
+          </a:xfrm>
+          <a:prstGeom prst="rect">
+            <a:avLst/>
+          </a:prstGeom>
+          <a:noFill/>
+          <a:ln/>
+        </p:spPr>
+        <p:txBody>
+          <a:bodyPr wrap="square" lIns="0" tIns="0" rIns="0" bIns="0" rtlCol="0" anchor="ctr"/>
+          <a:lstStyle/>
+          <a:p>
+            <a:pPr marL="0" indent="0">
+              <a:buNone/>
+            </a:pPr>
+            <a:r>
+              <a:rPr lang="en-US" sz="1200" dirty="0">
+                <a:solidFill>
+                  <a:srgbClr val="6B7A8C"/>
+                </a:solidFill>
+                <a:latin typeface="Calibri" pitchFamily="34" charset="0"/>
+                <a:ea typeface="Calibri" pitchFamily="34" charset="-122"/>
+                <a:cs typeface="Calibri" pitchFamily="34" charset="-120"/>
+              </a:rPr>
+              <a:t>9 de las 15 piezas · hace falta una segunda plancha</a:t>
+            </a:r>
+            <a:endParaRPr lang="en-US" sz="1200" dirty="0"/>
+          </a:p>
+        </p:txBody>
+      </p:sp>
+      <p:sp>
+        <p:nvSpPr>
+          <p:cNvPr id="7" name="Shape 5"/>
+          <p:cNvSpPr/>
+          <p:nvPr/>
+        </p:nvSpPr>
+        <p:spPr>
+          <a:xfrm>
+            <a:off x="1005840" y="2487168"/>
+            <a:ext cx="4608576" cy="1984248"/>
+          </a:xfrm>
+          <a:prstGeom prst="rect">
+            <a:avLst/>
+          </a:prstGeom>
+          <a:solidFill>
+            <a:srgbClr val="C4614E">
+              <a:alpha val="78000"/>
+            </a:srgbClr>
+          </a:solidFill>
+          <a:ln w="15875">
+            <a:solidFill>
+              <a:srgbClr val="4A5561"/>
+            </a:solidFill>
+            <a:prstDash val="solid"/>
+          </a:ln>
+        </p:spPr>
+      </p:sp>
+      <p:sp>
+        <p:nvSpPr>
+          <p:cNvPr id="8" name="Shape 6"/>
+          <p:cNvSpPr/>
+          <p:nvPr/>
+        </p:nvSpPr>
+        <p:spPr>
+          <a:xfrm>
+            <a:off x="1190183" y="2625604"/>
+            <a:ext cx="1198230" cy="922906"/>
+          </a:xfrm>
+          <a:custGeom>
+            <a:avLst/>
+            <a:gdLst/>
+            <a:ahLst/>
+            <a:cxnLst/>
+            <a:rect l="l" t="t" r="r" b="b"/>
+            <a:pathLst>
+              <a:path w="1198230" h="922906">
+                <a:moveTo>
+                  <a:pt x="0" y="0"/>
+                </a:moveTo>
+                <a:lnTo>
+                  <a:pt x="1198230" y="0"/>
+                </a:lnTo>
+                <a:lnTo>
+                  <a:pt x="1198230" y="184581"/>
+                </a:lnTo>
+                <a:lnTo>
+                  <a:pt x="460858" y="184581"/>
+                </a:lnTo>
+                <a:lnTo>
+                  <a:pt x="460858" y="922906"/>
+                </a:lnTo>
+                <a:lnTo>
+                  <a:pt x="0" y="922906"/>
+                </a:lnTo>
+                <a:close/>
+              </a:path>
+            </a:pathLst>
+          </a:custGeom>
+          <a:solidFill>
+            <a:srgbClr val="FFFFFF"/>
+          </a:solidFill>
+          <a:ln w="9525">
+            <a:solidFill>
+              <a:srgbClr val="7E8B97"/>
+            </a:solidFill>
+            <a:prstDash val="solid"/>
+          </a:ln>
+        </p:spPr>
+      </p:sp>
+      <p:sp>
+        <p:nvSpPr>
+          <p:cNvPr id="9" name="Shape 7"/>
+          <p:cNvSpPr/>
+          <p:nvPr/>
+        </p:nvSpPr>
+        <p:spPr>
+          <a:xfrm>
+            <a:off x="2711013" y="2717895"/>
+            <a:ext cx="645201" cy="646034"/>
+          </a:xfrm>
+          <a:prstGeom prst="ellipse">
+            <a:avLst/>
+          </a:prstGeom>
+          <a:solidFill>
+            <a:srgbClr val="FFFFFF"/>
+          </a:solidFill>
+          <a:ln w="9525">
+            <a:solidFill>
+              <a:srgbClr val="7E8B97"/>
+            </a:solidFill>
+            <a:prstDash val="solid"/>
+          </a:ln>
+        </p:spPr>
+      </p:sp>
+      <p:sp>
+        <p:nvSpPr>
+          <p:cNvPr id="10" name="Shape 8"/>
+          <p:cNvSpPr/>
+          <p:nvPr/>
+        </p:nvSpPr>
+        <p:spPr>
+          <a:xfrm>
+            <a:off x="2872313" y="2879403"/>
+            <a:ext cx="322600" cy="323017"/>
+          </a:xfrm>
+          <a:prstGeom prst="ellipse">
+            <a:avLst/>
+          </a:prstGeom>
+          <a:solidFill>
+            <a:srgbClr val="C4614E">
+              <a:alpha val="78000"/>
+            </a:srgbClr>
+          </a:solidFill>
+          <a:ln w="9525">
+            <a:solidFill>
+              <a:srgbClr val="7E8B97"/>
+            </a:solidFill>
+            <a:prstDash val="solid"/>
+          </a:ln>
+        </p:spPr>
+      </p:sp>
+      <p:sp>
+        <p:nvSpPr>
+          <p:cNvPr id="11" name="Shape 9"/>
+          <p:cNvSpPr/>
+          <p:nvPr/>
+        </p:nvSpPr>
+        <p:spPr>
+          <a:xfrm>
+            <a:off x="3678814" y="2625604"/>
+            <a:ext cx="737372" cy="922906"/>
+          </a:xfrm>
+          <a:custGeom>
+            <a:avLst/>
+            <a:gdLst/>
+            <a:ahLst/>
+            <a:cxnLst/>
+            <a:rect l="l" t="t" r="r" b="b"/>
+            <a:pathLst>
+              <a:path w="737372" h="922906">
+                <a:moveTo>
+                  <a:pt x="0" y="922906"/>
+                </a:moveTo>
+                <a:cubicBezTo>
+                  <a:pt x="0" y="92291"/>
+                  <a:pt x="737372" y="92291"/>
+                  <a:pt x="737372" y="922906"/>
+                </a:cubicBezTo>
+                <a:lnTo>
+                  <a:pt x="529986" y="922906"/>
+                </a:lnTo>
+                <a:cubicBezTo>
+                  <a:pt x="529986" y="415308"/>
+                  <a:pt x="207386" y="415308"/>
+                  <a:pt x="207386" y="922906"/>
+                </a:cubicBezTo>
+                <a:close/>
+              </a:path>
+            </a:pathLst>
+          </a:custGeom>
+          <a:solidFill>
+            <a:srgbClr val="FFFFFF"/>
+          </a:solidFill>
+          <a:ln w="9525">
+            <a:solidFill>
+              <a:srgbClr val="7E8B97"/>
+            </a:solidFill>
+            <a:prstDash val="solid"/>
+          </a:ln>
+        </p:spPr>
+      </p:sp>
+      <p:sp>
+        <p:nvSpPr>
+          <p:cNvPr id="12" name="Shape 10"/>
+          <p:cNvSpPr/>
+          <p:nvPr/>
+        </p:nvSpPr>
+        <p:spPr>
+          <a:xfrm>
+            <a:off x="4554444" y="2671749"/>
+            <a:ext cx="921715" cy="830615"/>
+          </a:xfrm>
+          <a:custGeom>
+            <a:avLst/>
+            <a:gdLst/>
+            <a:ahLst/>
+            <a:cxnLst/>
+            <a:rect l="l" t="t" r="r" b="b"/>
+            <a:pathLst>
+              <a:path w="921715" h="830615">
+                <a:moveTo>
+                  <a:pt x="0" y="0"/>
+                </a:moveTo>
+                <a:lnTo>
+                  <a:pt x="921715" y="0"/>
+                </a:lnTo>
+                <a:lnTo>
+                  <a:pt x="921715" y="276872"/>
+                </a:lnTo>
+                <a:lnTo>
+                  <a:pt x="368686" y="830615"/>
+                </a:lnTo>
+                <a:lnTo>
+                  <a:pt x="0" y="830615"/>
+                </a:lnTo>
+                <a:close/>
+              </a:path>
+            </a:pathLst>
+          </a:custGeom>
+          <a:solidFill>
+            <a:srgbClr val="FFFFFF"/>
+          </a:solidFill>
+          <a:ln w="9525">
+            <a:solidFill>
+              <a:srgbClr val="7E8B97"/>
+            </a:solidFill>
+            <a:prstDash val="solid"/>
+          </a:ln>
+        </p:spPr>
+      </p:sp>
+      <p:sp>
+        <p:nvSpPr>
+          <p:cNvPr id="13" name="Shape 11"/>
+          <p:cNvSpPr/>
+          <p:nvPr/>
+        </p:nvSpPr>
+        <p:spPr>
+          <a:xfrm>
+            <a:off x="2664927" y="3456219"/>
+            <a:ext cx="1382573" cy="276872"/>
+          </a:xfrm>
+          <a:prstGeom prst="roundRect">
+            <a:avLst>
+              <a:gd name="adj" fmla="val 50000"/>
+            </a:avLst>
+          </a:prstGeom>
+          <a:solidFill>
+            <a:srgbClr val="FFFFFF"/>
+          </a:solidFill>
+          <a:ln w="9525">
+            <a:solidFill>
+              <a:srgbClr val="7E8B97"/>
+            </a:solidFill>
+            <a:prstDash val="solid"/>
+          </a:ln>
+        </p:spPr>
+      </p:sp>
+      <p:sp>
+        <p:nvSpPr>
+          <p:cNvPr id="14" name="Shape 12"/>
+          <p:cNvSpPr/>
+          <p:nvPr/>
+        </p:nvSpPr>
+        <p:spPr>
+          <a:xfrm>
+            <a:off x="1190183" y="3779236"/>
+            <a:ext cx="1290401" cy="553744"/>
+          </a:xfrm>
+          <a:custGeom>
+            <a:avLst/>
+            <a:gdLst/>
+            <a:ahLst/>
+            <a:cxnLst/>
+            <a:rect l="l" t="t" r="r" b="b"/>
+            <a:pathLst>
+              <a:path w="1290401" h="553744">
+                <a:moveTo>
+                  <a:pt x="0" y="0"/>
+                </a:moveTo>
+                <a:lnTo>
+                  <a:pt x="1290401" y="0"/>
+                </a:lnTo>
+                <a:lnTo>
+                  <a:pt x="1290401" y="553744"/>
+                </a:lnTo>
+                <a:lnTo>
+                  <a:pt x="829544" y="553744"/>
+                </a:lnTo>
+                <a:lnTo>
+                  <a:pt x="829544" y="323017"/>
+                </a:lnTo>
+                <a:lnTo>
+                  <a:pt x="460858" y="323017"/>
+                </a:lnTo>
+                <a:lnTo>
+                  <a:pt x="460858" y="553744"/>
+                </a:lnTo>
+                <a:lnTo>
+                  <a:pt x="0" y="553744"/>
+                </a:lnTo>
+                <a:close/>
+              </a:path>
+            </a:pathLst>
+          </a:custGeom>
+          <a:solidFill>
+            <a:srgbClr val="FFFFFF"/>
+          </a:solidFill>
+          <a:ln w="9525">
+            <a:solidFill>
+              <a:srgbClr val="7E8B97"/>
+            </a:solidFill>
+            <a:prstDash val="solid"/>
+          </a:ln>
+        </p:spPr>
+      </p:sp>
+      <p:sp>
+        <p:nvSpPr>
+          <p:cNvPr id="15" name="Shape 13"/>
+          <p:cNvSpPr/>
+          <p:nvPr/>
+        </p:nvSpPr>
+        <p:spPr>
+          <a:xfrm>
+            <a:off x="2757099" y="3871527"/>
+            <a:ext cx="829544" cy="461453"/>
+          </a:xfrm>
+          <a:prstGeom prst="chevron">
+            <a:avLst/>
+          </a:prstGeom>
+          <a:solidFill>
+            <a:srgbClr val="FFFFFF"/>
+          </a:solidFill>
+          <a:ln w="9525">
+            <a:solidFill>
+              <a:srgbClr val="7E8B97"/>
+            </a:solidFill>
+            <a:prstDash val="solid"/>
+          </a:ln>
+        </p:spPr>
+      </p:sp>
+      <p:sp>
+        <p:nvSpPr>
+          <p:cNvPr id="16" name="Shape 14"/>
+          <p:cNvSpPr/>
+          <p:nvPr/>
+        </p:nvSpPr>
+        <p:spPr>
+          <a:xfrm>
+            <a:off x="3863157" y="3779236"/>
+            <a:ext cx="691286" cy="599889"/>
+          </a:xfrm>
+          <a:prstGeom prst="hexagon">
+            <a:avLst/>
+          </a:prstGeom>
+          <a:solidFill>
+            <a:srgbClr val="FFFFFF"/>
+          </a:solidFill>
+          <a:ln w="9525">
+            <a:solidFill>
+              <a:srgbClr val="7E8B97"/>
+            </a:solidFill>
+            <a:prstDash val="solid"/>
+          </a:ln>
+        </p:spPr>
+      </p:sp>
+      <p:sp>
+        <p:nvSpPr>
+          <p:cNvPr id="17" name="Shape 15"/>
+          <p:cNvSpPr/>
+          <p:nvPr/>
+        </p:nvSpPr>
+        <p:spPr>
+          <a:xfrm>
+            <a:off x="4416186" y="4009963"/>
+            <a:ext cx="1106058" cy="323017"/>
+          </a:xfrm>
+          <a:prstGeom prst="trapezoid">
+            <a:avLst/>
+          </a:prstGeom>
+          <a:solidFill>
+            <a:srgbClr val="FFFFFF"/>
+          </a:solidFill>
+          <a:ln w="9525">
+            <a:solidFill>
+              <a:srgbClr val="7E8B97"/>
+            </a:solidFill>
+            <a:prstDash val="solid"/>
+          </a:ln>
+        </p:spPr>
+      </p:sp>
+      <p:sp>
+        <p:nvSpPr>
+          <p:cNvPr id="18" name="Text 16"/>
+          <p:cNvSpPr txBox="1"/>
+          <p:nvPr/>
+        </p:nvSpPr>
+        <p:spPr>
+          <a:xfrm>
+            <a:off x="1005840" y="4572000"/>
+            <a:ext cx="4608576" cy="777240"/>
+          </a:xfrm>
+          <a:prstGeom prst="rect">
+            <a:avLst/>
+          </a:prstGeom>
+          <a:noFill/>
+          <a:ln/>
+        </p:spPr>
+        <p:txBody>
+          <a:bodyPr wrap="square" lIns="0" tIns="0" rIns="0" bIns="0" rtlCol="0" anchor="t"/>
+          <a:lstStyle/>
+          <a:p>
+            <a:pPr marL="0" indent="0">
+              <a:lnSpc>
+                <a:spcPts val="1700"/>
+              </a:lnSpc>
+              <a:buNone/>
+            </a:pPr>
+            <a:r>
+              <a:rPr lang="en-US" sz="1250" dirty="0">
+                <a:solidFill>
+                  <a:srgbClr val="6B7A8C"/>
+                </a:solidFill>
+                <a:latin typeface="Calibri" pitchFamily="34" charset="0"/>
+                <a:ea typeface="Calibri" pitchFamily="34" charset="-122"/>
+                <a:cs typeface="Calibri" pitchFamily="34" charset="-120"/>
+              </a:rPr>
+              <a:t>Cada pieza se ubica suelta, sin aprovechar los huecos que dejan las otras. Lo que sobra queda repartido en recortes chicos que ya no sirven.</a:t>
+            </a:r>
+            <a:endParaRPr lang="en-US" sz="1250" dirty="0"/>
+          </a:p>
+        </p:txBody>
+      </p:sp>
+      <p:sp>
+        <p:nvSpPr>
+          <p:cNvPr id="19" name="Shape 17"/>
+          <p:cNvSpPr/>
+          <p:nvPr/>
+        </p:nvSpPr>
+        <p:spPr>
+          <a:xfrm>
+            <a:off x="6254496" y="1691640"/>
+            <a:ext cx="5248656" cy="3703320"/>
+          </a:xfrm>
+          <a:prstGeom prst="roundRect">
+            <a:avLst>
+              <a:gd name="adj" fmla="val 1975"/>
+            </a:avLst>
+          </a:prstGeom>
+          <a:solidFill>
+            <a:srgbClr val="FFFFFF"/>
+          </a:solidFill>
+          <a:ln w="12700">
+            <a:solidFill>
+              <a:srgbClr val="DCE3EA"/>
+            </a:solidFill>
+            <a:prstDash val="solid"/>
+          </a:ln>
+          <a:effectLst>
+            <a:outerShdw blurRad="127000" dist="25400" dir="5400000" algn="bl" rotWithShape="0">
+              <a:srgbClr val="9AA8B5">
+                <a:alpha val="25000"/>
+              </a:srgbClr>
+            </a:outerShdw>
+          </a:effectLst>
+        </p:spPr>
+      </p:sp>
+      <p:sp>
+        <p:nvSpPr>
+          <p:cNvPr id="20" name="Text 18"/>
+          <p:cNvSpPr txBox="1"/>
+          <p:nvPr/>
+        </p:nvSpPr>
+        <p:spPr>
+          <a:xfrm>
+            <a:off x="6574536" y="1828800"/>
+            <a:ext cx="4608576" cy="292608"/>
+          </a:xfrm>
+          <a:prstGeom prst="rect">
+            <a:avLst/>
+          </a:prstGeom>
+          <a:noFill/>
+          <a:ln/>
+        </p:spPr>
+        <p:txBody>
+          <a:bodyPr wrap="square" lIns="0" tIns="0" rIns="0" bIns="0" rtlCol="0" anchor="ctr"/>
+          <a:lstStyle/>
+          <a:p>
+            <a:pPr marL="0" indent="0">
+              <a:buNone/>
+            </a:pPr>
+            <a:r>
+              <a:rPr lang="en-US" sz="1450" b="1" dirty="0">
+                <a:solidFill>
+                  <a:srgbClr val="B87A1E"/>
+                </a:solidFill>
+                <a:latin typeface="Calibri" pitchFamily="34" charset="0"/>
+                <a:ea typeface="Calibri" pitchFamily="34" charset="-122"/>
+                <a:cs typeface="Calibri" pitchFamily="34" charset="-120"/>
+              </a:rPr>
+              <a:t>Con el sistema: anidado automático</a:t>
+            </a:r>
+            <a:endParaRPr lang="en-US" sz="1450" dirty="0"/>
+          </a:p>
+        </p:txBody>
+      </p:sp>
+      <p:sp>
+        <p:nvSpPr>
+          <p:cNvPr id="21" name="Text 19"/>
+          <p:cNvSpPr txBox="1"/>
+          <p:nvPr/>
+        </p:nvSpPr>
+        <p:spPr>
+          <a:xfrm>
+            <a:off x="6574536" y="2139696"/>
+            <a:ext cx="4608576" cy="274320"/>
+          </a:xfrm>
+          <a:prstGeom prst="rect">
+            <a:avLst/>
+          </a:prstGeom>
+          <a:noFill/>
+          <a:ln/>
+        </p:spPr>
+        <p:txBody>
+          <a:bodyPr wrap="square" lIns="0" tIns="0" rIns="0" bIns="0" rtlCol="0" anchor="ctr"/>
+          <a:lstStyle/>
+          <a:p>
+            <a:pPr marL="0" indent="0">
+              <a:buNone/>
+            </a:pPr>
+            <a:r>
+              <a:rPr lang="en-US" sz="1200" dirty="0">
+                <a:solidFill>
+                  <a:srgbClr val="6B7A8C"/>
+                </a:solidFill>
+                <a:latin typeface="Calibri" pitchFamily="34" charset="0"/>
+                <a:ea typeface="Calibri" pitchFamily="34" charset="-122"/>
+                <a:cs typeface="Calibri" pitchFamily="34" charset="-120"/>
+              </a:rPr>
+              <a:t>las 15 piezas · una sola plancha</a:t>
+            </a:r>
+            <a:endParaRPr lang="en-US" sz="1200" dirty="0"/>
+          </a:p>
+        </p:txBody>
+      </p:sp>
+      <p:sp>
+        <p:nvSpPr>
+          <p:cNvPr id="22" name="Shape 20"/>
+          <p:cNvSpPr/>
+          <p:nvPr/>
+        </p:nvSpPr>
+        <p:spPr>
+          <a:xfrm>
+            <a:off x="6574536" y="2487168"/>
+            <a:ext cx="4608576" cy="1984248"/>
+          </a:xfrm>
+          <a:prstGeom prst="rect">
+            <a:avLst/>
+          </a:prstGeom>
+          <a:solidFill>
+            <a:srgbClr val="C4614E">
+              <a:alpha val="78000"/>
+            </a:srgbClr>
+          </a:solidFill>
+          <a:ln w="15875">
+            <a:solidFill>
+              <a:srgbClr val="4A5561"/>
+            </a:solidFill>
+            <a:prstDash val="solid"/>
+          </a:ln>
+        </p:spPr>
+      </p:sp>
+      <p:sp>
+        <p:nvSpPr>
+          <p:cNvPr id="23" name="Shape 21"/>
+          <p:cNvSpPr/>
+          <p:nvPr/>
+        </p:nvSpPr>
+        <p:spPr>
+          <a:xfrm>
+            <a:off x="6620622" y="2533313"/>
+            <a:ext cx="1198230" cy="922906"/>
+          </a:xfrm>
+          <a:custGeom>
+            <a:avLst/>
+            <a:gdLst/>
+            <a:ahLst/>
+            <a:cxnLst/>
+            <a:rect l="l" t="t" r="r" b="b"/>
+            <a:pathLst>
+              <a:path w="1198230" h="922906">
+                <a:moveTo>
+                  <a:pt x="0" y="0"/>
+                </a:moveTo>
+                <a:lnTo>
+                  <a:pt x="1198230" y="0"/>
+                </a:lnTo>
+                <a:lnTo>
+                  <a:pt x="1198230" y="184581"/>
+                </a:lnTo>
+                <a:lnTo>
+                  <a:pt x="460858" y="184581"/>
+                </a:lnTo>
+                <a:lnTo>
+                  <a:pt x="460858" y="922906"/>
+                </a:lnTo>
+                <a:lnTo>
+                  <a:pt x="0" y="922906"/>
+                </a:lnTo>
+                <a:close/>
+              </a:path>
+            </a:pathLst>
+          </a:custGeom>
+          <a:solidFill>
+            <a:srgbClr val="FFFFFF"/>
+          </a:solidFill>
+          <a:ln w="9525">
+            <a:solidFill>
+              <a:srgbClr val="7E8B97"/>
+            </a:solidFill>
+            <a:prstDash val="solid"/>
+          </a:ln>
+        </p:spPr>
+      </p:sp>
+      <p:sp>
+        <p:nvSpPr>
+          <p:cNvPr id="24" name="Shape 22"/>
+          <p:cNvSpPr/>
+          <p:nvPr/>
+        </p:nvSpPr>
+        <p:spPr>
+          <a:xfrm>
+            <a:off x="7127565" y="2717895"/>
+            <a:ext cx="645201" cy="646034"/>
+          </a:xfrm>
+          <a:prstGeom prst="ellipse">
+            <a:avLst/>
+          </a:prstGeom>
+          <a:solidFill>
+            <a:srgbClr val="FFFFFF"/>
+          </a:solidFill>
+          <a:ln w="9525">
+            <a:solidFill>
+              <a:srgbClr val="7E8B97"/>
+            </a:solidFill>
+            <a:prstDash val="solid"/>
+          </a:ln>
+        </p:spPr>
+      </p:sp>
+      <p:sp>
+        <p:nvSpPr>
+          <p:cNvPr id="25" name="Shape 23"/>
+          <p:cNvSpPr/>
+          <p:nvPr/>
+        </p:nvSpPr>
+        <p:spPr>
+          <a:xfrm>
+            <a:off x="7288865" y="2879403"/>
+            <a:ext cx="322600" cy="323017"/>
+          </a:xfrm>
+          <a:prstGeom prst="ellipse">
+            <a:avLst/>
+          </a:prstGeom>
+          <a:solidFill>
+            <a:srgbClr val="C4614E">
+              <a:alpha val="78000"/>
+            </a:srgbClr>
+          </a:solidFill>
+          <a:ln w="9525">
+            <a:solidFill>
+              <a:srgbClr val="7E8B97"/>
+            </a:solidFill>
+            <a:prstDash val="solid"/>
+          </a:ln>
+        </p:spPr>
+      </p:sp>
+      <p:sp>
+        <p:nvSpPr>
+          <p:cNvPr id="26" name="Shape 24"/>
+          <p:cNvSpPr/>
+          <p:nvPr/>
+        </p:nvSpPr>
+        <p:spPr>
+          <a:xfrm>
+            <a:off x="7864937" y="2533313"/>
+            <a:ext cx="737372" cy="922906"/>
+          </a:xfrm>
+          <a:custGeom>
+            <a:avLst/>
+            <a:gdLst/>
+            <a:ahLst/>
+            <a:cxnLst/>
+            <a:rect l="l" t="t" r="r" b="b"/>
+            <a:pathLst>
+              <a:path w="737372" h="922906">
+                <a:moveTo>
+                  <a:pt x="0" y="922906"/>
+                </a:moveTo>
+                <a:cubicBezTo>
+                  <a:pt x="0" y="92291"/>
+                  <a:pt x="737372" y="92291"/>
+                  <a:pt x="737372" y="922906"/>
+                </a:cubicBezTo>
+                <a:lnTo>
+                  <a:pt x="529986" y="922906"/>
+                </a:lnTo>
+                <a:cubicBezTo>
+                  <a:pt x="529986" y="415308"/>
+                  <a:pt x="207386" y="415308"/>
+                  <a:pt x="207386" y="922906"/>
+                </a:cubicBezTo>
+                <a:close/>
+              </a:path>
+            </a:pathLst>
+          </a:custGeom>
+          <a:solidFill>
+            <a:srgbClr val="FFFFFF"/>
+          </a:solidFill>
+          <a:ln w="9525">
+            <a:solidFill>
+              <a:srgbClr val="7E8B97"/>
+            </a:solidFill>
+            <a:prstDash val="solid"/>
+          </a:ln>
+        </p:spPr>
+      </p:sp>
+      <p:sp>
+        <p:nvSpPr>
+          <p:cNvPr id="27" name="Shape 25"/>
+          <p:cNvSpPr/>
+          <p:nvPr/>
+        </p:nvSpPr>
+        <p:spPr>
+          <a:xfrm>
+            <a:off x="8076932" y="3017839"/>
+            <a:ext cx="322600" cy="415308"/>
+          </a:xfrm>
+          <a:prstGeom prst="trapezoid">
+            <a:avLst/>
+          </a:prstGeom>
+          <a:solidFill>
+            <a:srgbClr val="FFFFFF"/>
+          </a:solidFill>
+          <a:ln w="9525">
+            <a:solidFill>
+              <a:srgbClr val="7E8B97"/>
+            </a:solidFill>
+            <a:prstDash val="solid"/>
+          </a:ln>
+        </p:spPr>
+      </p:sp>
+      <p:sp>
+        <p:nvSpPr>
+          <p:cNvPr id="28" name="Shape 26"/>
+          <p:cNvSpPr/>
+          <p:nvPr/>
+        </p:nvSpPr>
+        <p:spPr>
+          <a:xfrm>
+            <a:off x="8648395" y="2533313"/>
+            <a:ext cx="921715" cy="830615"/>
+          </a:xfrm>
+          <a:custGeom>
+            <a:avLst/>
+            <a:gdLst/>
+            <a:ahLst/>
+            <a:cxnLst/>
+            <a:rect l="l" t="t" r="r" b="b"/>
+            <a:pathLst>
+              <a:path w="921715" h="830615">
+                <a:moveTo>
+                  <a:pt x="0" y="0"/>
+                </a:moveTo>
+                <a:lnTo>
+                  <a:pt x="921715" y="0"/>
+                </a:lnTo>
+                <a:lnTo>
+                  <a:pt x="921715" y="276872"/>
+                </a:lnTo>
+                <a:lnTo>
+                  <a:pt x="368686" y="830615"/>
+                </a:lnTo>
+                <a:lnTo>
+                  <a:pt x="0" y="830615"/>
+                </a:lnTo>
+                <a:close/>
+              </a:path>
+            </a:pathLst>
+          </a:custGeom>
+          <a:solidFill>
+            <a:srgbClr val="FFFFFF"/>
+          </a:solidFill>
+          <a:ln w="9525">
+            <a:solidFill>
+              <a:srgbClr val="7E8B97"/>
+            </a:solidFill>
+            <a:prstDash val="solid"/>
+          </a:ln>
+        </p:spPr>
+      </p:sp>
+      <p:sp>
+        <p:nvSpPr>
+          <p:cNvPr id="29" name="Shape 27"/>
+          <p:cNvSpPr/>
+          <p:nvPr/>
+        </p:nvSpPr>
+        <p:spPr>
+          <a:xfrm>
+            <a:off x="9049341" y="2796342"/>
+            <a:ext cx="553029" cy="553744"/>
+          </a:xfrm>
+          <a:custGeom>
+            <a:avLst/>
+            <a:gdLst/>
+            <a:ahLst/>
+            <a:cxnLst/>
+            <a:rect l="l" t="t" r="r" b="b"/>
+            <a:pathLst>
+              <a:path w="553029" h="553744">
+                <a:moveTo>
+                  <a:pt x="553029" y="0"/>
+                </a:moveTo>
+                <a:lnTo>
+                  <a:pt x="553029" y="553744"/>
+                </a:lnTo>
+                <a:lnTo>
+                  <a:pt x="0" y="553744"/>
+                </a:lnTo>
+                <a:close/>
+              </a:path>
+            </a:pathLst>
+          </a:custGeom>
+          <a:solidFill>
+            <a:srgbClr val="FFFFFF"/>
+          </a:solidFill>
+          <a:ln w="9525">
+            <a:solidFill>
+              <a:srgbClr val="7E8B97"/>
+            </a:solidFill>
+            <a:prstDash val="solid"/>
+          </a:ln>
+        </p:spPr>
+      </p:sp>
+      <p:sp>
+        <p:nvSpPr>
+          <p:cNvPr id="30" name="Shape 28"/>
+          <p:cNvSpPr/>
+          <p:nvPr/>
+        </p:nvSpPr>
+        <p:spPr>
+          <a:xfrm>
+            <a:off x="9616196" y="2533313"/>
+            <a:ext cx="1382573" cy="276872"/>
+          </a:xfrm>
+          <a:prstGeom prst="roundRect">
+            <a:avLst>
+              <a:gd name="adj" fmla="val 50000"/>
+            </a:avLst>
+          </a:prstGeom>
+          <a:solidFill>
+            <a:srgbClr val="FFFFFF"/>
+          </a:solidFill>
+          <a:ln w="9525">
+            <a:solidFill>
+              <a:srgbClr val="7E8B97"/>
+            </a:solidFill>
+            <a:prstDash val="solid"/>
+          </a:ln>
+        </p:spPr>
+      </p:sp>
+      <p:sp>
+        <p:nvSpPr>
+          <p:cNvPr id="31" name="Shape 29"/>
+          <p:cNvSpPr/>
+          <p:nvPr/>
+        </p:nvSpPr>
+        <p:spPr>
+          <a:xfrm>
+            <a:off x="9616196" y="2856330"/>
+            <a:ext cx="691286" cy="599889"/>
+          </a:xfrm>
+          <a:prstGeom prst="hexagon">
+            <a:avLst/>
+          </a:prstGeom>
+          <a:solidFill>
+            <a:srgbClr val="FFFFFF"/>
+          </a:solidFill>
+          <a:ln w="9525">
+            <a:solidFill>
+              <a:srgbClr val="7E8B97"/>
+            </a:solidFill>
+            <a:prstDash val="solid"/>
+          </a:ln>
+        </p:spPr>
+      </p:sp>
+      <p:sp>
+        <p:nvSpPr>
+          <p:cNvPr id="32" name="Shape 30"/>
+          <p:cNvSpPr/>
+          <p:nvPr/>
+        </p:nvSpPr>
+        <p:spPr>
+          <a:xfrm>
+            <a:off x="10399654" y="2764040"/>
+            <a:ext cx="599115" cy="738325"/>
+          </a:xfrm>
+          <a:prstGeom prst="teardrop">
+            <a:avLst/>
+          </a:prstGeom>
+          <a:solidFill>
+            <a:srgbClr val="FFFFFF"/>
+          </a:solidFill>
+          <a:ln w="9525">
+            <a:solidFill>
+              <a:srgbClr val="7E8B97"/>
+            </a:solidFill>
+            <a:prstDash val="solid"/>
+          </a:ln>
+        </p:spPr>
+      </p:sp>
+      <p:sp>
+        <p:nvSpPr>
+          <p:cNvPr id="33" name="Shape 31"/>
+          <p:cNvSpPr/>
+          <p:nvPr/>
+        </p:nvSpPr>
+        <p:spPr>
+          <a:xfrm>
+            <a:off x="6620622" y="3502365"/>
+            <a:ext cx="1290401" cy="553744"/>
+          </a:xfrm>
+          <a:custGeom>
+            <a:avLst/>
+            <a:gdLst/>
+            <a:ahLst/>
+            <a:cxnLst/>
+            <a:rect l="l" t="t" r="r" b="b"/>
+            <a:pathLst>
+              <a:path w="1290401" h="553744">
+                <a:moveTo>
+                  <a:pt x="0" y="0"/>
+                </a:moveTo>
+                <a:lnTo>
+                  <a:pt x="1290401" y="0"/>
+                </a:lnTo>
+                <a:lnTo>
+                  <a:pt x="1290401" y="553744"/>
+                </a:lnTo>
+                <a:lnTo>
+                  <a:pt x="829544" y="553744"/>
+                </a:lnTo>
+                <a:lnTo>
+                  <a:pt x="829544" y="323017"/>
+                </a:lnTo>
+                <a:lnTo>
+                  <a:pt x="460858" y="323017"/>
+                </a:lnTo>
+                <a:lnTo>
+                  <a:pt x="460858" y="553744"/>
+                </a:lnTo>
+                <a:lnTo>
+                  <a:pt x="0" y="553744"/>
+                </a:lnTo>
+                <a:close/>
+              </a:path>
+            </a:pathLst>
+          </a:custGeom>
+          <a:solidFill>
+            <a:srgbClr val="FFFFFF"/>
+          </a:solidFill>
+          <a:ln w="9525">
+            <a:solidFill>
+              <a:srgbClr val="7E8B97"/>
+            </a:solidFill>
+            <a:prstDash val="solid"/>
+          </a:ln>
+        </p:spPr>
+      </p:sp>
+      <p:sp>
+        <p:nvSpPr>
+          <p:cNvPr id="34" name="Shape 32"/>
+          <p:cNvSpPr/>
+          <p:nvPr/>
+        </p:nvSpPr>
+        <p:spPr>
+          <a:xfrm>
+            <a:off x="7957109" y="3502365"/>
+            <a:ext cx="829544" cy="461453"/>
+          </a:xfrm>
+          <a:prstGeom prst="chevron">
+            <a:avLst/>
+          </a:prstGeom>
+          <a:solidFill>
+            <a:srgbClr val="FFFFFF"/>
+          </a:solidFill>
+          <a:ln w="9525">
+            <a:solidFill>
+              <a:srgbClr val="7E8B97"/>
+            </a:solidFill>
+            <a:prstDash val="solid"/>
+          </a:ln>
+        </p:spPr>
+      </p:sp>
+      <p:sp>
+        <p:nvSpPr>
+          <p:cNvPr id="35" name="Shape 33"/>
+          <p:cNvSpPr/>
+          <p:nvPr/>
+        </p:nvSpPr>
+        <p:spPr>
+          <a:xfrm>
+            <a:off x="8832738" y="3502365"/>
+            <a:ext cx="553029" cy="599889"/>
+          </a:xfrm>
+          <a:prstGeom prst="moon">
+            <a:avLst/>
+          </a:prstGeom>
+          <a:solidFill>
+            <a:srgbClr val="FFFFFF"/>
+          </a:solidFill>
+          <a:ln w="9525">
+            <a:solidFill>
+              <a:srgbClr val="7E8B97"/>
+            </a:solidFill>
+            <a:prstDash val="solid"/>
+          </a:ln>
+        </p:spPr>
+      </p:sp>
+      <p:sp>
+        <p:nvSpPr>
+          <p:cNvPr id="36" name="Shape 34"/>
+          <p:cNvSpPr/>
+          <p:nvPr/>
+        </p:nvSpPr>
+        <p:spPr>
+          <a:xfrm>
+            <a:off x="6620622" y="4102254"/>
+            <a:ext cx="1106058" cy="323017"/>
+          </a:xfrm>
+          <a:prstGeom prst="trapezoid">
+            <a:avLst/>
+          </a:prstGeom>
+          <a:solidFill>
+            <a:srgbClr val="FFFFFF"/>
+          </a:solidFill>
+          <a:ln w="9525">
+            <a:solidFill>
+              <a:srgbClr val="7E8B97"/>
+            </a:solidFill>
+            <a:prstDash val="solid"/>
+          </a:ln>
+        </p:spPr>
+      </p:sp>
+      <p:sp>
+        <p:nvSpPr>
+          <p:cNvPr id="37" name="Shape 35"/>
+          <p:cNvSpPr/>
+          <p:nvPr/>
+        </p:nvSpPr>
+        <p:spPr>
+          <a:xfrm>
+            <a:off x="7818852" y="4148399"/>
+            <a:ext cx="921715" cy="276872"/>
+          </a:xfrm>
+          <a:prstGeom prst="roundRect">
+            <a:avLst>
+              <a:gd name="adj" fmla="val 50000"/>
+            </a:avLst>
+          </a:prstGeom>
+          <a:solidFill>
+            <a:srgbClr val="FFFFFF"/>
+          </a:solidFill>
+          <a:ln w="9525">
+            <a:solidFill>
+              <a:srgbClr val="7E8B97"/>
+            </a:solidFill>
+            <a:prstDash val="solid"/>
+          </a:ln>
+        </p:spPr>
+      </p:sp>
+      <p:sp>
+        <p:nvSpPr>
+          <p:cNvPr id="38" name="Shape 36"/>
+          <p:cNvSpPr/>
+          <p:nvPr/>
+        </p:nvSpPr>
+        <p:spPr>
+          <a:xfrm>
+            <a:off x="8832738" y="4102254"/>
+            <a:ext cx="553029" cy="369162"/>
+          </a:xfrm>
+          <a:prstGeom prst="triangle">
+            <a:avLst/>
+          </a:prstGeom>
+          <a:solidFill>
+            <a:srgbClr val="FFFFFF"/>
+          </a:solidFill>
+          <a:ln w="9525">
+            <a:solidFill>
+              <a:srgbClr val="7E8B97"/>
+            </a:solidFill>
+            <a:prstDash val="solid"/>
+          </a:ln>
+        </p:spPr>
+      </p:sp>
+      <p:sp>
+        <p:nvSpPr>
+          <p:cNvPr id="39" name="Text 37"/>
+          <p:cNvSpPr txBox="1"/>
+          <p:nvPr/>
+        </p:nvSpPr>
+        <p:spPr>
+          <a:xfrm>
+            <a:off x="9616196" y="3548510"/>
+            <a:ext cx="1520830" cy="830615"/>
+          </a:xfrm>
+          <a:prstGeom prst="rect">
+            <a:avLst/>
+          </a:prstGeom>
+          <a:noFill/>
+          <a:ln/>
+        </p:spPr>
+        <p:txBody>
+          <a:bodyPr wrap="square" lIns="0" tIns="0" rIns="0" bIns="0" rtlCol="0" anchor="ctr"/>
+          <a:lstStyle/>
+          <a:p>
+            <a:pPr marL="0" indent="0" algn="ctr">
+              <a:buNone/>
+            </a:pPr>
+            <a:r>
+              <a:rPr lang="en-US" sz="1050" b="1" dirty="0">
+                <a:solidFill>
+                  <a:srgbClr val="FFFFFF"/>
+                </a:solidFill>
+                <a:latin typeface="Calibri" pitchFamily="34" charset="0"/>
+                <a:ea typeface="Calibri" pitchFamily="34" charset="-122"/>
+                <a:cs typeface="Calibri" pitchFamily="34" charset="-120"/>
+              </a:rPr>
+              <a:t>sobra</a:t>
+            </a:r>
+            <a:endParaRPr lang="en-US" sz="1050" dirty="0"/>
+          </a:p>
+          <a:p>
+            <a:pPr marL="0" indent="0" algn="ctr">
+              <a:buNone/>
+            </a:pPr>
+            <a:r>
+              <a:rPr lang="en-US" sz="1050" b="1" dirty="0">
+                <a:solidFill>
+                  <a:srgbClr val="FFFFFF"/>
+                </a:solidFill>
+                <a:latin typeface="Calibri" pitchFamily="34" charset="0"/>
+                <a:ea typeface="Calibri" pitchFamily="34" charset="-122"/>
+                <a:cs typeface="Calibri" pitchFamily="34" charset="-120"/>
+              </a:rPr>
+              <a:t>entera</a:t>
+            </a:r>
+            <a:endParaRPr lang="en-US" sz="1050" dirty="0"/>
+          </a:p>
+        </p:txBody>
+      </p:sp>
+      <p:sp>
+        <p:nvSpPr>
+          <p:cNvPr id="40" name="Text 38"/>
+          <p:cNvSpPr txBox="1"/>
+          <p:nvPr/>
+        </p:nvSpPr>
+        <p:spPr>
+          <a:xfrm>
+            <a:off x="6574536" y="4572000"/>
+            <a:ext cx="4608576" cy="777240"/>
+          </a:xfrm>
+          <a:prstGeom prst="rect">
+            <a:avLst/>
+          </a:prstGeom>
+          <a:noFill/>
+          <a:ln/>
+        </p:spPr>
+        <p:txBody>
+          <a:bodyPr wrap="square" lIns="0" tIns="0" rIns="0" bIns="0" rtlCol="0" anchor="t"/>
+          <a:lstStyle/>
+          <a:p>
+            <a:pPr marL="0" indent="0">
+              <a:lnSpc>
+                <a:spcPts val="1700"/>
+              </a:lnSpc>
+              <a:buNone/>
+            </a:pPr>
+            <a:r>
+              <a:rPr lang="en-US" sz="1250" dirty="0">
+                <a:solidFill>
+                  <a:srgbClr val="6B7A8C"/>
+                </a:solidFill>
+                <a:latin typeface="Calibri" pitchFamily="34" charset="0"/>
+                <a:ea typeface="Calibri" pitchFamily="34" charset="-122"/>
+                <a:cs typeface="Calibri" pitchFamily="34" charset="-120"/>
+              </a:rPr>
+              <a:t>Cada pieza se mete en el hueco que deja la anterior: las curvas y los ángulos se encastran. Lo que sobra queda junto, en un pedazo entero que se puede volver a usar.</a:t>
+            </a:r>
+            <a:endParaRPr lang="en-US" sz="1250" dirty="0"/>
+          </a:p>
+        </p:txBody>
+      </p:sp>
+      <p:sp>
+        <p:nvSpPr>
+          <p:cNvPr id="41" name="Shape 39"/>
+          <p:cNvSpPr/>
+          <p:nvPr/>
+        </p:nvSpPr>
+        <p:spPr>
+          <a:xfrm>
+            <a:off x="685800" y="5596128"/>
+            <a:ext cx="201168" cy="201168"/>
+          </a:xfrm>
+          <a:prstGeom prst="rect">
+            <a:avLst/>
+          </a:prstGeom>
+          <a:solidFill>
+            <a:srgbClr val="C4614E">
+              <a:alpha val="78000"/>
+            </a:srgbClr>
+          </a:solidFill>
+          <a:ln w="9525">
+            <a:solidFill>
+              <a:srgbClr val="4A5561"/>
+            </a:solidFill>
+            <a:prstDash val="solid"/>
+          </a:ln>
+        </p:spPr>
+      </p:sp>
+      <p:sp>
+        <p:nvSpPr>
+          <p:cNvPr id="42" name="Text 40"/>
+          <p:cNvSpPr txBox="1"/>
+          <p:nvPr/>
+        </p:nvSpPr>
+        <p:spPr>
+          <a:xfrm>
+            <a:off x="996696" y="5541264"/>
+            <a:ext cx="2743200" cy="310896"/>
+          </a:xfrm>
+          <a:prstGeom prst="rect">
+            <a:avLst/>
+          </a:prstGeom>
+          <a:noFill/>
+          <a:ln/>
+        </p:spPr>
+        <p:txBody>
+          <a:bodyPr wrap="square" lIns="0" tIns="0" rIns="0" bIns="0" rtlCol="0" anchor="ctr"/>
+          <a:lstStyle/>
+          <a:p>
+            <a:pPr marL="0" indent="0">
+              <a:buNone/>
+            </a:pPr>
+            <a:r>
+              <a:rPr lang="en-US" sz="1250" dirty="0">
+                <a:solidFill>
+                  <a:srgbClr val="1B2430"/>
+                </a:solidFill>
+                <a:latin typeface="Calibri" pitchFamily="34" charset="0"/>
+                <a:ea typeface="Calibri" pitchFamily="34" charset="-122"/>
+                <a:cs typeface="Calibri" pitchFamily="34" charset="-120"/>
+              </a:rPr>
+              <a:t>Chapa que se desperdicia</a:t>
+            </a:r>
+            <a:endParaRPr lang="en-US" sz="1250" dirty="0"/>
+          </a:p>
+        </p:txBody>
+      </p:sp>
+      <p:sp>
+        <p:nvSpPr>
+          <p:cNvPr id="43" name="Text 41"/>
+          <p:cNvSpPr txBox="1"/>
+          <p:nvPr/>
+        </p:nvSpPr>
+        <p:spPr>
+          <a:xfrm>
+            <a:off x="685800" y="5989320"/>
+            <a:ext cx="10820095" cy="457200"/>
+          </a:xfrm>
+          <a:prstGeom prst="rect">
+            <a:avLst/>
+          </a:prstGeom>
+          <a:noFill/>
+          <a:ln/>
+        </p:spPr>
+        <p:txBody>
+          <a:bodyPr wrap="square" lIns="0" tIns="0" rIns="0" bIns="0" rtlCol="0" anchor="ctr"/>
+          <a:lstStyle/>
+          <a:p>
+            <a:pPr marL="0" indent="0" algn="l">
+              <a:buNone/>
+            </a:pPr>
+            <a:r>
+              <a:rPr lang="en-US" sz="1200" i="1" dirty="0">
+                <a:solidFill>
+                  <a:srgbClr val="6B7A8C"/>
+                </a:solidFill>
+                <a:latin typeface="Calibri" pitchFamily="34" charset="0"/>
+                <a:ea typeface="Calibri" pitchFamily="34" charset="-122"/>
+                <a:cs typeface="Calibri" pitchFamily="34" charset="-120"/>
+              </a:rPr>
+              <a:t>Ejemplo ilustrativo. Cuánto de lo que cortan son paneles rectos y cuánto formas irregulares lo vemos en la semana 1: de eso depende el alcance del anidado.</a:t>
+            </a:r>
+            <a:endParaRPr lang="en-US" sz="1200" dirty="0"/>
+          </a:p>
+        </p:txBody>
+      </p:sp>
+    </p:spTree>
+  </p:cSld>
+  <p:clrMapOvr>
+    <a:masterClrMapping/>
+  </p:clrMapOvr>
+  <p:transition spd="med">
+    <p:fade/>
+  </p:transition>
+  <p:timing>
+    <p:tnLst>
+      <p:par>
+        <p:cTn id="1" dur="indefinite" restart="never" nodeType="tmRoot">
+          <p:childTnLst>
+            <p:seq concurrent="1" nextAc="seek">
+              <p:cTn id="2" dur="indefinite" nodeType="mainSeq">
+                <p:childTnLst>
+                  <p:par>
+                    <p:cTn id="3" fill="hold">
+                      <p:stCondLst>
+                        <p:cond delay="0"/>
+                      </p:stCondLst>
+                      <p:childTnLst>
+                        <p:par>
+                          <p:cTn id="4" fill="hold">
+                            <p:stCondLst>
+                              <p:cond delay="0"/>
+                            </p:stCondLst>
+                            <p:childTnLst>
+                              <p:par>
+                                <p:cTn id="5" presetID="10" presetClass="entr" presetSubtype="0" fill="hold" grpId="0" nodeType="afterEffect">
+                                  <p:stCondLst>
+                                    <p:cond delay="0"/>
+                                  </p:stCondLst>
+                                  <p:childTnLst>
+                                    <p:set>
+                                      <p:cBhvr>
+                                        <p:cTn id="6" dur="1" fill="hold">
+                                          <p:stCondLst>
+                                            <p:cond delay="0"/>
+                                          </p:stCondLst>
+                                        </p:cTn>
+                                        <p:tgtEl>
+                                          <p:spTgt spid="2"/>
+                                        </p:tgtEl>
+                                        <p:attrNameLst>
+                                          <p:attrName>style.visibility</p:attrName>
+                                        </p:attrNameLst>
+                                      </p:cBhvr>
+                                      <p:to>
+                                        <p:strVal val="visible"/>
+                                      </p:to>
+                                    </p:set>
+                                    <p:animEffect transition="in" filter="fade">
+                                      <p:cBhvr>
+                                        <p:cTn id="7" dur="450"/>
+                                        <p:tgtEl>
+                                          <p:spTgt spid="2"/>
+                                        </p:tgtEl>
+                                      </p:cBhvr>
+                                    </p:animEffect>
+                                  </p:childTnLst>
+                                </p:cTn>
+                              </p:par>
+                              <p:par>
+                                <p:cTn id="8" presetID="10" presetClass="entr" presetSubtype="0" fill="hold" grpId="0" nodeType="afterEffect">
+                                  <p:stCondLst>
+                                    <p:cond delay="70"/>
+                                  </p:stCondLst>
+                                  <p:childTnLst>
+                                    <p:set>
+                                      <p:cBhvr>
+                                        <p:cTn id="9" dur="1" fill="hold">
+                                          <p:stCondLst>
+                                            <p:cond delay="0"/>
+                                          </p:stCondLst>
+                                        </p:cTn>
+                                        <p:tgtEl>
+                                          <p:spTgt spid="3"/>
+                                        </p:tgtEl>
+                                        <p:attrNameLst>
+                                          <p:attrName>style.visibility</p:attrName>
+                                        </p:attrNameLst>
+                                      </p:cBhvr>
+                                      <p:to>
+                                        <p:strVal val="visible"/>
+                                      </p:to>
+                                    </p:set>
+                                    <p:animEffect transition="in" filter="fade">
+                                      <p:cBhvr>
+                                        <p:cTn id="10" dur="450"/>
+                                        <p:tgtEl>
+                                          <p:spTgt spid="3"/>
+                                        </p:tgtEl>
+                                      </p:cBhvr>
+                                    </p:animEffect>
+                                  </p:childTnLst>
+                                </p:cTn>
+                              </p:par>
+                              <p:par>
+                                <p:cTn id="11" presetID="10" presetClass="entr" presetSubtype="0" fill="hold" grpId="0" nodeType="afterEffect">
+                                  <p:stCondLst>
+                                    <p:cond delay="140"/>
+                                  </p:stCondLst>
+                                  <p:childTnLst>
+                                    <p:set>
+                                      <p:cBhvr>
+                                        <p:cTn id="12" dur="1" fill="hold">
+                                          <p:stCondLst>
+                                            <p:cond delay="0"/>
+                                          </p:stCondLst>
+                                        </p:cTn>
+                                        <p:tgtEl>
+                                          <p:spTgt spid="4"/>
+                                        </p:tgtEl>
+                                        <p:attrNameLst>
+                                          <p:attrName>style.visibility</p:attrName>
+                                        </p:attrNameLst>
+                                      </p:cBhvr>
+                                      <p:to>
+                                        <p:strVal val="visible"/>
+                                      </p:to>
+                                    </p:set>
+                                    <p:animEffect transition="in" filter="fade">
+                                      <p:cBhvr>
+                                        <p:cTn id="13" dur="450"/>
+                                        <p:tgtEl>
+                                          <p:spTgt spid="4"/>
+                                        </p:tgtEl>
+                                      </p:cBhvr>
+                                    </p:animEffect>
+                                  </p:childTnLst>
+                                </p:cTn>
+                              </p:par>
+                              <p:par>
+                                <p:cTn id="14" presetID="10" presetClass="entr" presetSubtype="0" fill="hold" grpId="0" nodeType="afterEffect">
+                                  <p:stCondLst>
+                                    <p:cond delay="210"/>
+                                  </p:stCondLst>
+                                  <p:childTnLst>
+                                    <p:set>
+                                      <p:cBhvr>
+                                        <p:cTn id="15" dur="1" fill="hold">
+                                          <p:stCondLst>
+                                            <p:cond delay="0"/>
+                                          </p:stCondLst>
+                                        </p:cTn>
+                                        <p:tgtEl>
+                                          <p:spTgt spid="5"/>
+                                        </p:tgtEl>
+                                        <p:attrNameLst>
+                                          <p:attrName>style.visibility</p:attrName>
+                                        </p:attrNameLst>
+                                      </p:cBhvr>
+                                      <p:to>
+                                        <p:strVal val="visible"/>
+                                      </p:to>
+                                    </p:set>
+                                    <p:animEffect transition="in" filter="fade">
+                                      <p:cBhvr>
+                                        <p:cTn id="16" dur="450"/>
+                                        <p:tgtEl>
+                                          <p:spTgt spid="5"/>
+                                        </p:tgtEl>
+                                      </p:cBhvr>
+                                    </p:animEffect>
+                                  </p:childTnLst>
+                                </p:cTn>
+                              </p:par>
+                              <p:par>
+                                <p:cTn id="17" presetID="10" presetClass="entr" presetSubtype="0" fill="hold" grpId="0" nodeType="afterEffect">
+                                  <p:stCondLst>
+                                    <p:cond delay="280"/>
+                                  </p:stCondLst>
+                                  <p:childTnLst>
+                                    <p:set>
+                                      <p:cBhvr>
+                                        <p:cTn id="18" dur="1" fill="hold">
+                                          <p:stCondLst>
+                                            <p:cond delay="0"/>
+                                          </p:stCondLst>
+                                        </p:cTn>
+                                        <p:tgtEl>
+                                          <p:spTgt spid="6"/>
+                                        </p:tgtEl>
+                                        <p:attrNameLst>
+                                          <p:attrName>style.visibility</p:attrName>
+                                        </p:attrNameLst>
+                                      </p:cBhvr>
+                                      <p:to>
+                                        <p:strVal val="visible"/>
+                                      </p:to>
+                                    </p:set>
+                                    <p:animEffect transition="in" filter="fade">
+                                      <p:cBhvr>
+                                        <p:cTn id="19" dur="450"/>
+                                        <p:tgtEl>
+                                          <p:spTgt spid="6"/>
+                                        </p:tgtEl>
+                                      </p:cBhvr>
+                                    </p:animEffect>
+                                  </p:childTnLst>
+                                </p:cTn>
+                              </p:par>
+                              <p:par>
+                                <p:cTn id="20" presetID="10" presetClass="entr" presetSubtype="0" fill="hold" grpId="0" nodeType="afterEffect">
+                                  <p:stCondLst>
+                                    <p:cond delay="350"/>
+                                  </p:stCondLst>
+                                  <p:childTnLst>
+                                    <p:set>
+                                      <p:cBhvr>
+                                        <p:cTn id="21" dur="1" fill="hold">
+                                          <p:stCondLst>
+                                            <p:cond delay="0"/>
+                                          </p:stCondLst>
+                                        </p:cTn>
+                                        <p:tgtEl>
+                                          <p:spTgt spid="7"/>
+                                        </p:tgtEl>
+                                        <p:attrNameLst>
+                                          <p:attrName>style.visibility</p:attrName>
+                                        </p:attrNameLst>
+                                      </p:cBhvr>
+                                      <p:to>
+                                        <p:strVal val="visible"/>
+                                      </p:to>
+                                    </p:set>
+                                    <p:animEffect transition="in" filter="fade">
+                                      <p:cBhvr>
+                                        <p:cTn id="22" dur="450"/>
+                                        <p:tgtEl>
+                                          <p:spTgt spid="7"/>
+                                        </p:tgtEl>
+                                      </p:cBhvr>
+                                    </p:animEffect>
+                                  </p:childTnLst>
+                                </p:cTn>
+                              </p:par>
+                              <p:par>
+                                <p:cTn id="23" presetID="10" presetClass="entr" presetSubtype="0" fill="hold" grpId="0" nodeType="afterEffect">
+                                  <p:stCondLst>
+                                    <p:cond delay="420"/>
+                                  </p:stCondLst>
+                                  <p:childTnLst>
+                                    <p:set>
+                                      <p:cBhvr>
+                                        <p:cTn id="24" dur="1" fill="hold">
+                                          <p:stCondLst>
+                                            <p:cond delay="0"/>
+                                          </p:stCondLst>
+                                        </p:cTn>
+                                        <p:tgtEl>
+                                          <p:spTgt spid="8"/>
+                                        </p:tgtEl>
+                                        <p:attrNameLst>
+                                          <p:attrName>style.visibility</p:attrName>
+                                        </p:attrNameLst>
+                                      </p:cBhvr>
+                                      <p:to>
+                                        <p:strVal val="visible"/>
+                                      </p:to>
+                                    </p:set>
+                                    <p:animEffect transition="in" filter="fade">
+                                      <p:cBhvr>
+                                        <p:cTn id="25" dur="450"/>
+                                        <p:tgtEl>
+                                          <p:spTgt spid="8"/>
+                                        </p:tgtEl>
+                                      </p:cBhvr>
+                                    </p:animEffect>
+                                  </p:childTnLst>
+                                </p:cTn>
+                              </p:par>
+                              <p:par>
+                                <p:cTn id="26" presetID="10" presetClass="entr" presetSubtype="0" fill="hold" grpId="0" nodeType="afterEffect">
+                                  <p:stCondLst>
+                                    <p:cond delay="490"/>
+                                  </p:stCondLst>
+                                  <p:childTnLst>
+                                    <p:set>
+                                      <p:cBhvr>
+                                        <p:cTn id="27" dur="1" fill="hold">
+                                          <p:stCondLst>
+                                            <p:cond delay="0"/>
+                                          </p:stCondLst>
+                                        </p:cTn>
+                                        <p:tgtEl>
+                                          <p:spTgt spid="9"/>
+                                        </p:tgtEl>
+                                        <p:attrNameLst>
+                                          <p:attrName>style.visibility</p:attrName>
+                                        </p:attrNameLst>
+                                      </p:cBhvr>
+                                      <p:to>
+                                        <p:strVal val="visible"/>
+                                      </p:to>
+                                    </p:set>
+                                    <p:animEffect transition="in" filter="fade">
+                                      <p:cBhvr>
+                                        <p:cTn id="28" dur="450"/>
+                                        <p:tgtEl>
+                                          <p:spTgt spid="9"/>
+                                        </p:tgtEl>
+                                      </p:cBhvr>
+                                    </p:animEffect>
+                                  </p:childTnLst>
+                                </p:cTn>
+                              </p:par>
+                              <p:par>
+                                <p:cTn id="29" presetID="10" presetClass="entr" presetSubtype="0" fill="hold" grpId="0" nodeType="afterEffect">
+                                  <p:stCondLst>
+                                    <p:cond delay="560"/>
+                                  </p:stCondLst>
+                                  <p:childTnLst>
+                                    <p:set>
+                                      <p:cBhvr>
+                                        <p:cTn id="30" dur="1" fill="hold">
+                                          <p:stCondLst>
+                                            <p:cond delay="0"/>
+                                          </p:stCondLst>
+                                        </p:cTn>
+                                        <p:tgtEl>
+                                          <p:spTgt spid="10"/>
+                                        </p:tgtEl>
+                                        <p:attrNameLst>
+                                          <p:attrName>style.visibility</p:attrName>
+                                        </p:attrNameLst>
+                                      </p:cBhvr>
+                                      <p:to>
+                                        <p:strVal val="visible"/>
+                                      </p:to>
+                                    </p:set>
+                                    <p:animEffect transition="in" filter="fade">
+                                      <p:cBhvr>
+                                        <p:cTn id="31" dur="450"/>
+                                        <p:tgtEl>
+                                          <p:spTgt spid="10"/>
+                                        </p:tgtEl>
+                                      </p:cBhvr>
+                                    </p:animEffect>
+                                  </p:childTnLst>
+                                </p:cTn>
+                              </p:par>
+                              <p:par>
+                                <p:cTn id="32" presetID="10" presetClass="entr" presetSubtype="0" fill="hold" grpId="0" nodeType="afterEffect">
+                                  <p:stCondLst>
+                                    <p:cond delay="630"/>
+                                  </p:stCondLst>
+                                  <p:childTnLst>
+                                    <p:set>
+                                      <p:cBhvr>
+                                        <p:cTn id="33" dur="1" fill="hold">
+                                          <p:stCondLst>
+                                            <p:cond delay="0"/>
+                                          </p:stCondLst>
+                                        </p:cTn>
+                                        <p:tgtEl>
+                                          <p:spTgt spid="11"/>
+                                        </p:tgtEl>
+                                        <p:attrNameLst>
+                                          <p:attrName>style.visibility</p:attrName>
+                                        </p:attrNameLst>
+                                      </p:cBhvr>
+                                      <p:to>
+                                        <p:strVal val="visible"/>
+                                      </p:to>
+                                    </p:set>
+                                    <p:animEffect transition="in" filter="fade">
+                                      <p:cBhvr>
+                                        <p:cTn id="34" dur="450"/>
+                                        <p:tgtEl>
+                                          <p:spTgt spid="11"/>
+                                        </p:tgtEl>
+                                      </p:cBhvr>
+                                    </p:animEffect>
+                                  </p:childTnLst>
+                                </p:cTn>
+                              </p:par>
+                              <p:par>
+                                <p:cTn id="35" presetID="10" presetClass="entr" presetSubtype="0" fill="hold" grpId="0" nodeType="afterEffect">
+                                  <p:stCondLst>
+                                    <p:cond delay="700"/>
+                                  </p:stCondLst>
+                                  <p:childTnLst>
+                                    <p:set>
+                                      <p:cBhvr>
+                                        <p:cTn id="36" dur="1" fill="hold">
+                                          <p:stCondLst>
+                                            <p:cond delay="0"/>
+                                          </p:stCondLst>
+                                        </p:cTn>
+                                        <p:tgtEl>
+                                          <p:spTgt spid="12"/>
+                                        </p:tgtEl>
+                                        <p:attrNameLst>
+                                          <p:attrName>style.visibility</p:attrName>
+                                        </p:attrNameLst>
+                                      </p:cBhvr>
+                                      <p:to>
+                                        <p:strVal val="visible"/>
+                                      </p:to>
+                                    </p:set>
+                                    <p:animEffect transition="in" filter="fade">
+                                      <p:cBhvr>
+                                        <p:cTn id="37" dur="450"/>
+                                        <p:tgtEl>
+                                          <p:spTgt spid="12"/>
+                                        </p:tgtEl>
+                                      </p:cBhvr>
+                                    </p:animEffect>
+                                  </p:childTnLst>
+                                </p:cTn>
+                              </p:par>
+                              <p:par>
+                                <p:cTn id="38" presetID="10" presetClass="entr" presetSubtype="0" fill="hold" grpId="0" nodeType="afterEffect">
+                                  <p:stCondLst>
+                                    <p:cond delay="770"/>
+                                  </p:stCondLst>
+                                  <p:childTnLst>
+                                    <p:set>
+                                      <p:cBhvr>
+                                        <p:cTn id="39" dur="1" fill="hold">
+                                          <p:stCondLst>
+                                            <p:cond delay="0"/>
+                                          </p:stCondLst>
+                                        </p:cTn>
+                                        <p:tgtEl>
+                                          <p:spTgt spid="13"/>
+                                        </p:tgtEl>
+                                        <p:attrNameLst>
+                                          <p:attrName>style.visibility</p:attrName>
+                                        </p:attrNameLst>
+                                      </p:cBhvr>
+                                      <p:to>
+                                        <p:strVal val="visible"/>
+                                      </p:to>
+                                    </p:set>
+                                    <p:animEffect transition="in" filter="fade">
+                                      <p:cBhvr>
+                                        <p:cTn id="40" dur="450"/>
+                                        <p:tgtEl>
+                                          <p:spTgt spid="13"/>
+                                        </p:tgtEl>
+                                      </p:cBhvr>
+                                    </p:animEffect>
+                                  </p:childTnLst>
+                                </p:cTn>
+                              </p:par>
+                              <p:par>
+                                <p:cTn id="41" presetID="10" presetClass="entr" presetSubtype="0" fill="hold" grpId="0" nodeType="afterEffect">
+                                  <p:stCondLst>
+                                    <p:cond delay="840"/>
+                                  </p:stCondLst>
+                                  <p:childTnLst>
+                                    <p:set>
+                                      <p:cBhvr>
+                                        <p:cTn id="42" dur="1" fill="hold">
+                                          <p:stCondLst>
+                                            <p:cond delay="0"/>
+                                          </p:stCondLst>
+                                        </p:cTn>
+                                        <p:tgtEl>
+                                          <p:spTgt spid="14"/>
+                                        </p:tgtEl>
+                                        <p:attrNameLst>
+                                          <p:attrName>style.visibility</p:attrName>
+                                        </p:attrNameLst>
+                                      </p:cBhvr>
+                                      <p:to>
+                                        <p:strVal val="visible"/>
+                                      </p:to>
+                                    </p:set>
+                                    <p:animEffect transition="in" filter="fade">
+                                      <p:cBhvr>
+                                        <p:cTn id="43" dur="450"/>
+                                        <p:tgtEl>
+                                          <p:spTgt spid="14"/>
+                                        </p:tgtEl>
+                                      </p:cBhvr>
+                                    </p:animEffect>
+                                  </p:childTnLst>
+                                </p:cTn>
+                              </p:par>
+                              <p:par>
+                                <p:cTn id="44" presetID="10" presetClass="entr" presetSubtype="0" fill="hold" grpId="0" nodeType="afterEffect">
+                                  <p:stCondLst>
+                                    <p:cond delay="910"/>
+                                  </p:stCondLst>
+                                  <p:childTnLst>
+                                    <p:set>
+                                      <p:cBhvr>
+                                        <p:cTn id="45" dur="1" fill="hold">
+                                          <p:stCondLst>
+                                            <p:cond delay="0"/>
+                                          </p:stCondLst>
+                                        </p:cTn>
+                                        <p:tgtEl>
+                                          <p:spTgt spid="15"/>
+                                        </p:tgtEl>
+                                        <p:attrNameLst>
+                                          <p:attrName>style.visibility</p:attrName>
+                                        </p:attrNameLst>
+                                      </p:cBhvr>
+                                      <p:to>
+                                        <p:strVal val="visible"/>
+                                      </p:to>
+                                    </p:set>
+                                    <p:animEffect transition="in" filter="fade">
+                                      <p:cBhvr>
+                                        <p:cTn id="46" dur="450"/>
+                                        <p:tgtEl>
+                                          <p:spTgt spid="15"/>
+                                        </p:tgtEl>
+                                      </p:cBhvr>
+                                    </p:animEffect>
+                                  </p:childTnLst>
+                                </p:cTn>
+                              </p:par>
+                              <p:par>
+                                <p:cTn id="47" presetID="10" presetClass="entr" presetSubtype="0" fill="hold" grpId="0" nodeType="afterEffect">
+                                  <p:stCondLst>
+                                    <p:cond delay="980"/>
+                                  </p:stCondLst>
+                                  <p:childTnLst>
+                                    <p:set>
+                                      <p:cBhvr>
+                                        <p:cTn id="48" dur="1" fill="hold">
+                                          <p:stCondLst>
+                                            <p:cond delay="0"/>
+                                          </p:stCondLst>
+                                        </p:cTn>
+                                        <p:tgtEl>
+                                          <p:spTgt spid="16"/>
+                                        </p:tgtEl>
+                                        <p:attrNameLst>
+                                          <p:attrName>style.visibility</p:attrName>
+                                        </p:attrNameLst>
+                                      </p:cBhvr>
+                                      <p:to>
+                                        <p:strVal val="visible"/>
+                                      </p:to>
+                                    </p:set>
+                                    <p:animEffect transition="in" filter="fade">
+                                      <p:cBhvr>
+                                        <p:cTn id="49" dur="450"/>
+                                        <p:tgtEl>
+                                          <p:spTgt spid="16"/>
+                                        </p:tgtEl>
+                                      </p:cBhvr>
+                                    </p:animEffect>
+                                  </p:childTnLst>
+                                </p:cTn>
+                              </p:par>
+                              <p:par>
+                                <p:cTn id="50" presetID="10" presetClass="entr" presetSubtype="0" fill="hold" grpId="0" nodeType="afterEffect">
+                                  <p:stCondLst>
+                                    <p:cond delay="1050"/>
+                                  </p:stCondLst>
+                                  <p:childTnLst>
+                                    <p:set>
+                                      <p:cBhvr>
+                                        <p:cTn id="51" dur="1" fill="hold">
+                                          <p:stCondLst>
+                                            <p:cond delay="0"/>
+                                          </p:stCondLst>
+                                        </p:cTn>
+                                        <p:tgtEl>
+                                          <p:spTgt spid="17"/>
+                                        </p:tgtEl>
+                                        <p:attrNameLst>
+                                          <p:attrName>style.visibility</p:attrName>
+                                        </p:attrNameLst>
+                                      </p:cBhvr>
+                                      <p:to>
+                                        <p:strVal val="visible"/>
+                                      </p:to>
+                                    </p:set>
+                                    <p:animEffect transition="in" filter="fade">
+                                      <p:cBhvr>
+                                        <p:cTn id="52" dur="450"/>
+                                        <p:tgtEl>
+                                          <p:spTgt spid="17"/>
+                                        </p:tgtEl>
+                                      </p:cBhvr>
+                                    </p:animEffect>
+                                  </p:childTnLst>
+                                </p:cTn>
+                              </p:par>
+                              <p:par>
+                                <p:cTn id="53" presetID="10" presetClass="entr" presetSubtype="0" fill="hold" grpId="0" nodeType="afterEffect">
+                                  <p:stCondLst>
+                                    <p:cond delay="1120"/>
+                                  </p:stCondLst>
+                                  <p:childTnLst>
+                                    <p:set>
+                                      <p:cBhvr>
+                                        <p:cTn id="54" dur="1" fill="hold">
+                                          <p:stCondLst>
+                                            <p:cond delay="0"/>
+                                          </p:stCondLst>
+                                        </p:cTn>
+                                        <p:tgtEl>
+                                          <p:spTgt spid="18"/>
+                                        </p:tgtEl>
+                                        <p:attrNameLst>
+                                          <p:attrName>style.visibility</p:attrName>
+                                        </p:attrNameLst>
+                                      </p:cBhvr>
+                                      <p:to>
+                                        <p:strVal val="visible"/>
+                                      </p:to>
+                                    </p:set>
+                                    <p:animEffect transition="in" filter="fade">
+                                      <p:cBhvr>
+                                        <p:cTn id="55" dur="450"/>
+                                        <p:tgtEl>
+                                          <p:spTgt spid="18"/>
+                                        </p:tgtEl>
+                                      </p:cBhvr>
+                                    </p:animEffect>
+                                  </p:childTnLst>
+                                </p:cTn>
+                              </p:par>
+                              <p:par>
+                                <p:cTn id="56" presetID="10" presetClass="entr" presetSubtype="0" fill="hold" grpId="0" nodeType="afterEffect">
+                                  <p:stCondLst>
+                                    <p:cond delay="1190"/>
+                                  </p:stCondLst>
+                                  <p:childTnLst>
+                                    <p:set>
+                                      <p:cBhvr>
+                                        <p:cTn id="57" dur="1" fill="hold">
+                                          <p:stCondLst>
+                                            <p:cond delay="0"/>
+                                          </p:stCondLst>
+                                        </p:cTn>
+                                        <p:tgtEl>
+                                          <p:spTgt spid="19"/>
+                                        </p:tgtEl>
+                                        <p:attrNameLst>
+                                          <p:attrName>style.visibility</p:attrName>
+                                        </p:attrNameLst>
+                                      </p:cBhvr>
+                                      <p:to>
+                                        <p:strVal val="visible"/>
+                                      </p:to>
+                                    </p:set>
+                                    <p:animEffect transition="in" filter="fade">
+                                      <p:cBhvr>
+                                        <p:cTn id="58" dur="450"/>
+                                        <p:tgtEl>
+                                          <p:spTgt spid="19"/>
+                                        </p:tgtEl>
+                                      </p:cBhvr>
+                                    </p:animEffect>
+                                  </p:childTnLst>
+                                </p:cTn>
+                              </p:par>
+                              <p:par>
+                                <p:cTn id="59" presetID="10" presetClass="entr" presetSubtype="0" fill="hold" grpId="0" nodeType="afterEffect">
+                                  <p:stCondLst>
+                                    <p:cond delay="1260"/>
+                                  </p:stCondLst>
+                                  <p:childTnLst>
+                                    <p:set>
+                                      <p:cBhvr>
+                                        <p:cTn id="60" dur="1" fill="hold">
+                                          <p:stCondLst>
+                                            <p:cond delay="0"/>
+                                          </p:stCondLst>
+                                        </p:cTn>
+                                        <p:tgtEl>
+                                          <p:spTgt spid="20"/>
+                                        </p:tgtEl>
+                                        <p:attrNameLst>
+                                          <p:attrName>style.visibility</p:attrName>
+                                        </p:attrNameLst>
+                                      </p:cBhvr>
+                                      <p:to>
+                                        <p:strVal val="visible"/>
+                                      </p:to>
+                                    </p:set>
+                                    <p:animEffect transition="in" filter="fade">
+                                      <p:cBhvr>
+                                        <p:cTn id="61" dur="450"/>
+                                        <p:tgtEl>
+                                          <p:spTgt spid="20"/>
+                                        </p:tgtEl>
+                                      </p:cBhvr>
+                                    </p:animEffect>
+                                  </p:childTnLst>
+                                </p:cTn>
+                              </p:par>
+                              <p:par>
+                                <p:cTn id="62" presetID="10" presetClass="entr" presetSubtype="0" fill="hold" grpId="0" nodeType="afterEffect">
+                                  <p:stCondLst>
+                                    <p:cond delay="1300"/>
+                                  </p:stCondLst>
+                                  <p:childTnLst>
+                                    <p:set>
+                                      <p:cBhvr>
+                                        <p:cTn id="63" dur="1" fill="hold">
+                                          <p:stCondLst>
+                                            <p:cond delay="0"/>
+                                          </p:stCondLst>
+                                        </p:cTn>
+                                        <p:tgtEl>
+                                          <p:spTgt spid="21"/>
+                                        </p:tgtEl>
+                                        <p:attrNameLst>
+                                          <p:attrName>style.visibility</p:attrName>
+                                        </p:attrNameLst>
+                                      </p:cBhvr>
+                                      <p:to>
+                                        <p:strVal val="visible"/>
+                                      </p:to>
+                                    </p:set>
+                                    <p:animEffect transition="in" filter="fade">
+                                      <p:cBhvr>
+                                        <p:cTn id="64" dur="450"/>
+                                        <p:tgtEl>
+                                          <p:spTgt spid="21"/>
+                                        </p:tgtEl>
+                                      </p:cBhvr>
+                                    </p:animEffect>
+                                  </p:childTnLst>
+                                </p:cTn>
+                              </p:par>
+                              <p:par>
+                                <p:cTn id="65" presetID="10" presetClass="entr" presetSubtype="0" fill="hold" grpId="0" nodeType="afterEffect">
+                                  <p:stCondLst>
+                                    <p:cond delay="1300"/>
+                                  </p:stCondLst>
+                                  <p:childTnLst>
+                                    <p:set>
+                                      <p:cBhvr>
+                                        <p:cTn id="66" dur="1" fill="hold">
+                                          <p:stCondLst>
+                                            <p:cond delay="0"/>
+                                          </p:stCondLst>
+                                        </p:cTn>
+                                        <p:tgtEl>
+                                          <p:spTgt spid="22"/>
+                                        </p:tgtEl>
+                                        <p:attrNameLst>
+                                          <p:attrName>style.visibility</p:attrName>
+                                        </p:attrNameLst>
+                                      </p:cBhvr>
+                                      <p:to>
+                                        <p:strVal val="visible"/>
+                                      </p:to>
+                                    </p:set>
+                                    <p:animEffect transition="in" filter="fade">
+                                      <p:cBhvr>
+                                        <p:cTn id="67" dur="450"/>
+                                        <p:tgtEl>
+                                          <p:spTgt spid="22"/>
+                                        </p:tgtEl>
+                                      </p:cBhvr>
+                                    </p:animEffect>
+                                  </p:childTnLst>
+                                </p:cTn>
+                              </p:par>
+                              <p:par>
+                                <p:cTn id="68" presetID="10" presetClass="entr" presetSubtype="0" fill="hold" grpId="0" nodeType="afterEffect">
+                                  <p:stCondLst>
+                                    <p:cond delay="1300"/>
+                                  </p:stCondLst>
+                                  <p:childTnLst>
+                                    <p:set>
+                                      <p:cBhvr>
+                                        <p:cTn id="69" dur="1" fill="hold">
+                                          <p:stCondLst>
+                                            <p:cond delay="0"/>
+                                          </p:stCondLst>
+                                        </p:cTn>
+                                        <p:tgtEl>
+                                          <p:spTgt spid="23"/>
+                                        </p:tgtEl>
+                                        <p:attrNameLst>
+                                          <p:attrName>style.visibility</p:attrName>
+                                        </p:attrNameLst>
+                                      </p:cBhvr>
+                                      <p:to>
+                                        <p:strVal val="visible"/>
+                                      </p:to>
+                                    </p:set>
+                                    <p:animEffect transition="in" filter="fade">
+                                      <p:cBhvr>
+                                        <p:cTn id="70" dur="450"/>
+                                        <p:tgtEl>
+                                          <p:spTgt spid="23"/>
+                                        </p:tgtEl>
+                                      </p:cBhvr>
+                                    </p:animEffect>
+                                  </p:childTnLst>
+                                </p:cTn>
+                              </p:par>
+                              <p:par>
+                                <p:cTn id="71" presetID="10" presetClass="entr" presetSubtype="0" fill="hold" grpId="0" nodeType="afterEffect">
+                                  <p:stCondLst>
+                                    <p:cond delay="1300"/>
+                                  </p:stCondLst>
+                                  <p:childTnLst>
+                                    <p:set>
+                                      <p:cBhvr>
+                                        <p:cTn id="72" dur="1" fill="hold">
+                                          <p:stCondLst>
+                                            <p:cond delay="0"/>
+                                          </p:stCondLst>
+                                        </p:cTn>
+                                        <p:tgtEl>
+                                          <p:spTgt spid="24"/>
+                                        </p:tgtEl>
+                                        <p:attrNameLst>
+                                          <p:attrName>style.visibility</p:attrName>
+                                        </p:attrNameLst>
+                                      </p:cBhvr>
+                                      <p:to>
+                                        <p:strVal val="visible"/>
+                                      </p:to>
+                                    </p:set>
+                                    <p:animEffect transition="in" filter="fade">
+                                      <p:cBhvr>
+                                        <p:cTn id="73" dur="450"/>
+                                        <p:tgtEl>
+                                          <p:spTgt spid="24"/>
+                                        </p:tgtEl>
+                                      </p:cBhvr>
+                                    </p:animEffect>
+                                  </p:childTnLst>
+                                </p:cTn>
+                              </p:par>
+                              <p:par>
+                                <p:cTn id="74" presetID="10" presetClass="entr" presetSubtype="0" fill="hold" grpId="0" nodeType="afterEffect">
+                                  <p:stCondLst>
+                                    <p:cond delay="1300"/>
+                                  </p:stCondLst>
+                                  <p:childTnLst>
+                                    <p:set>
+                                      <p:cBhvr>
+                                        <p:cTn id="75" dur="1" fill="hold">
+                                          <p:stCondLst>
+                                            <p:cond delay="0"/>
+                                          </p:stCondLst>
+                                        </p:cTn>
+                                        <p:tgtEl>
+                                          <p:spTgt spid="25"/>
+                                        </p:tgtEl>
+                                        <p:attrNameLst>
+                                          <p:attrName>style.visibility</p:attrName>
+                                        </p:attrNameLst>
+                                      </p:cBhvr>
+                                      <p:to>
+                                        <p:strVal val="visible"/>
+                                      </p:to>
+                                    </p:set>
+                                    <p:animEffect transition="in" filter="fade">
+                                      <p:cBhvr>
+                                        <p:cTn id="76" dur="450"/>
+                                        <p:tgtEl>
+                                          <p:spTgt spid="25"/>
+                                        </p:tgtEl>
+                                      </p:cBhvr>
+                                    </p:animEffect>
+                                  </p:childTnLst>
+                                </p:cTn>
+                              </p:par>
+                              <p:par>
+                                <p:cTn id="77" presetID="10" presetClass="entr" presetSubtype="0" fill="hold" grpId="0" nodeType="afterEffect">
+                                  <p:stCondLst>
+                                    <p:cond delay="1300"/>
+                                  </p:stCondLst>
+                                  <p:childTnLst>
+                                    <p:set>
+                                      <p:cBhvr>
+                                        <p:cTn id="78" dur="1" fill="hold">
+                                          <p:stCondLst>
+                                            <p:cond delay="0"/>
+                                          </p:stCondLst>
+                                        </p:cTn>
+                                        <p:tgtEl>
+                                          <p:spTgt spid="26"/>
+                                        </p:tgtEl>
+                                        <p:attrNameLst>
+                                          <p:attrName>style.visibility</p:attrName>
+                                        </p:attrNameLst>
+                                      </p:cBhvr>
+                                      <p:to>
+                                        <p:strVal val="visible"/>
+                                      </p:to>
+                                    </p:set>
+                                    <p:animEffect transition="in" filter="fade">
+                                      <p:cBhvr>
+                                        <p:cTn id="79" dur="450"/>
+                                        <p:tgtEl>
+                                          <p:spTgt spid="26"/>
+                                        </p:tgtEl>
+                                      </p:cBhvr>
+                                    </p:animEffect>
+                                  </p:childTnLst>
+                                </p:cTn>
+                              </p:par>
+                              <p:par>
+                                <p:cTn id="80" presetID="10" presetClass="entr" presetSubtype="0" fill="hold" grpId="0" nodeType="afterEffect">
+                                  <p:stCondLst>
+                                    <p:cond delay="1300"/>
+                                  </p:stCondLst>
+                                  <p:childTnLst>
+                                    <p:set>
+                                      <p:cBhvr>
+                                        <p:cTn id="81" dur="1" fill="hold">
+                                          <p:stCondLst>
+                                            <p:cond delay="0"/>
+                                          </p:stCondLst>
+                                        </p:cTn>
+                                        <p:tgtEl>
+                                          <p:spTgt spid="27"/>
+                                        </p:tgtEl>
+                                        <p:attrNameLst>
+                                          <p:attrName>style.visibility</p:attrName>
+                                        </p:attrNameLst>
+                                      </p:cBhvr>
+                                      <p:to>
+                                        <p:strVal val="visible"/>
+                                      </p:to>
+                                    </p:set>
+                                    <p:animEffect transition="in" filter="fade">
+                                      <p:cBhvr>
+                                        <p:cTn id="82" dur="450"/>
+                                        <p:tgtEl>
+                                          <p:spTgt spid="27"/>
+                                        </p:tgtEl>
+                                      </p:cBhvr>
+                                    </p:animEffect>
+                                  </p:childTnLst>
+                                </p:cTn>
+                              </p:par>
+                              <p:par>
+                                <p:cTn id="83" presetID="10" presetClass="entr" presetSubtype="0" fill="hold" grpId="0" nodeType="afterEffect">
+                                  <p:stCondLst>
+                                    <p:cond delay="1300"/>
+                                  </p:stCondLst>
+                                  <p:childTnLst>
+                                    <p:set>
+                                      <p:cBhvr>
+                                        <p:cTn id="84" dur="1" fill="hold">
+                                          <p:stCondLst>
+                                            <p:cond delay="0"/>
+                                          </p:stCondLst>
+                                        </p:cTn>
+                                        <p:tgtEl>
+                                          <p:spTgt spid="28"/>
+                                        </p:tgtEl>
+                                        <p:attrNameLst>
+                                          <p:attrName>style.visibility</p:attrName>
+                                        </p:attrNameLst>
+                                      </p:cBhvr>
+                                      <p:to>
+                                        <p:strVal val="visible"/>
+                                      </p:to>
+                                    </p:set>
+                                    <p:animEffect transition="in" filter="fade">
+                                      <p:cBhvr>
+                                        <p:cTn id="85" dur="450"/>
+                                        <p:tgtEl>
+                                          <p:spTgt spid="28"/>
+                                        </p:tgtEl>
+                                      </p:cBhvr>
+                                    </p:animEffect>
+                                  </p:childTnLst>
+                                </p:cTn>
+                              </p:par>
+                              <p:par>
+                                <p:cTn id="86" presetID="10" presetClass="entr" presetSubtype="0" fill="hold" grpId="0" nodeType="afterEffect">
+                                  <p:stCondLst>
+                                    <p:cond delay="1300"/>
+                                  </p:stCondLst>
+                                  <p:childTnLst>
+                                    <p:set>
+                                      <p:cBhvr>
+                                        <p:cTn id="87" dur="1" fill="hold">
+                                          <p:stCondLst>
+                                            <p:cond delay="0"/>
+                                          </p:stCondLst>
+                                        </p:cTn>
+                                        <p:tgtEl>
+                                          <p:spTgt spid="29"/>
+                                        </p:tgtEl>
+                                        <p:attrNameLst>
+                                          <p:attrName>style.visibility</p:attrName>
+                                        </p:attrNameLst>
+                                      </p:cBhvr>
+                                      <p:to>
+                                        <p:strVal val="visible"/>
+                                      </p:to>
+                                    </p:set>
+                                    <p:animEffect transition="in" filter="fade">
+                                      <p:cBhvr>
+                                        <p:cTn id="88" dur="450"/>
+                                        <p:tgtEl>
+                                          <p:spTgt spid="29"/>
+                                        </p:tgtEl>
+                                      </p:cBhvr>
+                                    </p:animEffect>
+                                  </p:childTnLst>
+                                </p:cTn>
+                              </p:par>
+                              <p:par>
+                                <p:cTn id="89" presetID="10" presetClass="entr" presetSubtype="0" fill="hold" grpId="0" nodeType="afterEffect">
+                                  <p:stCondLst>
+                                    <p:cond delay="1300"/>
+                                  </p:stCondLst>
+                                  <p:childTnLst>
+                                    <p:set>
+                                      <p:cBhvr>
+                                        <p:cTn id="90" dur="1" fill="hold">
+                                          <p:stCondLst>
+                                            <p:cond delay="0"/>
+                                          </p:stCondLst>
+                                        </p:cTn>
+                                        <p:tgtEl>
+                                          <p:spTgt spid="30"/>
+                                        </p:tgtEl>
+                                        <p:attrNameLst>
+                                          <p:attrName>style.visibility</p:attrName>
+                                        </p:attrNameLst>
+                                      </p:cBhvr>
+                                      <p:to>
+                                        <p:strVal val="visible"/>
+                                      </p:to>
+                                    </p:set>
+                                    <p:animEffect transition="in" filter="fade">
+                                      <p:cBhvr>
+                                        <p:cTn id="91" dur="450"/>
+                                        <p:tgtEl>
+                                          <p:spTgt spid="30"/>
+                                        </p:tgtEl>
+                                      </p:cBhvr>
+                                    </p:animEffect>
+                                  </p:childTnLst>
+                                </p:cTn>
+                              </p:par>
+                              <p:par>
+                                <p:cTn id="92" presetID="10" presetClass="entr" presetSubtype="0" fill="hold" grpId="0" nodeType="afterEffect">
+                                  <p:stCondLst>
+                                    <p:cond delay="1300"/>
+                                  </p:stCondLst>
+                                  <p:childTnLst>
+                                    <p:set>
+                                      <p:cBhvr>
+                                        <p:cTn id="93" dur="1" fill="hold">
+                                          <p:stCondLst>
+                                            <p:cond delay="0"/>
+                                          </p:stCondLst>
+                                        </p:cTn>
+                                        <p:tgtEl>
+                                          <p:spTgt spid="31"/>
+                                        </p:tgtEl>
+                                        <p:attrNameLst>
+                                          <p:attrName>style.visibility</p:attrName>
+                                        </p:attrNameLst>
+                                      </p:cBhvr>
+                                      <p:to>
+                                        <p:strVal val="visible"/>
+                                      </p:to>
+                                    </p:set>
+                                    <p:animEffect transition="in" filter="fade">
+                                      <p:cBhvr>
+                                        <p:cTn id="94" dur="450"/>
+                                        <p:tgtEl>
+                                          <p:spTgt spid="31"/>
+                                        </p:tgtEl>
+                                      </p:cBhvr>
+                                    </p:animEffect>
+                                  </p:childTnLst>
+                                </p:cTn>
+                              </p:par>
+                              <p:par>
+                                <p:cTn id="95" presetID="10" presetClass="entr" presetSubtype="0" fill="hold" grpId="0" nodeType="afterEffect">
+                                  <p:stCondLst>
+                                    <p:cond delay="1300"/>
+                                  </p:stCondLst>
+                                  <p:childTnLst>
+                                    <p:set>
+                                      <p:cBhvr>
+                                        <p:cTn id="96" dur="1" fill="hold">
+                                          <p:stCondLst>
+                                            <p:cond delay="0"/>
+                                          </p:stCondLst>
+                                        </p:cTn>
+                                        <p:tgtEl>
+                                          <p:spTgt spid="32"/>
+                                        </p:tgtEl>
+                                        <p:attrNameLst>
+                                          <p:attrName>style.visibility</p:attrName>
+                                        </p:attrNameLst>
+                                      </p:cBhvr>
+                                      <p:to>
+                                        <p:strVal val="visible"/>
+                                      </p:to>
+                                    </p:set>
+                                    <p:animEffect transition="in" filter="fade">
+                                      <p:cBhvr>
+                                        <p:cTn id="97" dur="450"/>
+                                        <p:tgtEl>
+                                          <p:spTgt spid="32"/>
+                                        </p:tgtEl>
+                                      </p:cBhvr>
+                                    </p:animEffect>
+                                  </p:childTnLst>
+                                </p:cTn>
+                              </p:par>
+                              <p:par>
+                                <p:cTn id="98" presetID="10" presetClass="entr" presetSubtype="0" fill="hold" grpId="0" nodeType="afterEffect">
+                                  <p:stCondLst>
+                                    <p:cond delay="1300"/>
+                                  </p:stCondLst>
+                                  <p:childTnLst>
+                                    <p:set>
+                                      <p:cBhvr>
+                                        <p:cTn id="99" dur="1" fill="hold">
+                                          <p:stCondLst>
+                                            <p:cond delay="0"/>
+                                          </p:stCondLst>
+                                        </p:cTn>
+                                        <p:tgtEl>
+                                          <p:spTgt spid="33"/>
+                                        </p:tgtEl>
+                                        <p:attrNameLst>
+                                          <p:attrName>style.visibility</p:attrName>
+                                        </p:attrNameLst>
+                                      </p:cBhvr>
+                                      <p:to>
+                                        <p:strVal val="visible"/>
+                                      </p:to>
+                                    </p:set>
+                                    <p:animEffect transition="in" filter="fade">
+                                      <p:cBhvr>
+                                        <p:cTn id="100" dur="450"/>
+                                        <p:tgtEl>
+                                          <p:spTgt spid="33"/>
+                                        </p:tgtEl>
+                                      </p:cBhvr>
+                                    </p:animEffect>
+                                  </p:childTnLst>
+                                </p:cTn>
+                              </p:par>
+                              <p:par>
+                                <p:cTn id="101" presetID="10" presetClass="entr" presetSubtype="0" fill="hold" grpId="0" nodeType="afterEffect">
+                                  <p:stCondLst>
+                                    <p:cond delay="1300"/>
+                                  </p:stCondLst>
+                                  <p:childTnLst>
+                                    <p:set>
+                                      <p:cBhvr>
+                                        <p:cTn id="102" dur="1" fill="hold">
+                                          <p:stCondLst>
+                                            <p:cond delay="0"/>
+                                          </p:stCondLst>
+                                        </p:cTn>
+                                        <p:tgtEl>
+                                          <p:spTgt spid="34"/>
+                                        </p:tgtEl>
+                                        <p:attrNameLst>
+                                          <p:attrName>style.visibility</p:attrName>
+                                        </p:attrNameLst>
+                                      </p:cBhvr>
+                                      <p:to>
+                                        <p:strVal val="visible"/>
+                                      </p:to>
+                                    </p:set>
+                                    <p:animEffect transition="in" filter="fade">
+                                      <p:cBhvr>
+                                        <p:cTn id="103" dur="450"/>
+                                        <p:tgtEl>
+                                          <p:spTgt spid="34"/>
+                                        </p:tgtEl>
+                                      </p:cBhvr>
+                                    </p:animEffect>
+                                  </p:childTnLst>
+                                </p:cTn>
+                              </p:par>
+                              <p:par>
+                                <p:cTn id="104" presetID="10" presetClass="entr" presetSubtype="0" fill="hold" grpId="0" nodeType="afterEffect">
+                                  <p:stCondLst>
+                                    <p:cond delay="1300"/>
+                                  </p:stCondLst>
+                                  <p:childTnLst>
+                                    <p:set>
+                                      <p:cBhvr>
+                                        <p:cTn id="105" dur="1" fill="hold">
+                                          <p:stCondLst>
+                                            <p:cond delay="0"/>
+                                          </p:stCondLst>
+                                        </p:cTn>
+                                        <p:tgtEl>
+                                          <p:spTgt spid="35"/>
+                                        </p:tgtEl>
+                                        <p:attrNameLst>
+                                          <p:attrName>style.visibility</p:attrName>
+                                        </p:attrNameLst>
+                                      </p:cBhvr>
+                                      <p:to>
+                                        <p:strVal val="visible"/>
+                                      </p:to>
+                                    </p:set>
+                                    <p:animEffect transition="in" filter="fade">
+                                      <p:cBhvr>
+                                        <p:cTn id="106" dur="450"/>
+                                        <p:tgtEl>
+                                          <p:spTgt spid="35"/>
+                                        </p:tgtEl>
+                                      </p:cBhvr>
+                                    </p:animEffect>
+                                  </p:childTnLst>
+                                </p:cTn>
+                              </p:par>
+                              <p:par>
+                                <p:cTn id="107" presetID="10" presetClass="entr" presetSubtype="0" fill="hold" grpId="0" nodeType="afterEffect">
+                                  <p:stCondLst>
+                                    <p:cond delay="1300"/>
+                                  </p:stCondLst>
+                                  <p:childTnLst>
+                                    <p:set>
+                                      <p:cBhvr>
+                                        <p:cTn id="108" dur="1" fill="hold">
+                                          <p:stCondLst>
+                                            <p:cond delay="0"/>
+                                          </p:stCondLst>
+                                        </p:cTn>
+                                        <p:tgtEl>
+                                          <p:spTgt spid="36"/>
+                                        </p:tgtEl>
+                                        <p:attrNameLst>
+                                          <p:attrName>style.visibility</p:attrName>
+                                        </p:attrNameLst>
+                                      </p:cBhvr>
+                                      <p:to>
+                                        <p:strVal val="visible"/>
+                                      </p:to>
+                                    </p:set>
+                                    <p:animEffect transition="in" filter="fade">
+                                      <p:cBhvr>
+                                        <p:cTn id="109" dur="450"/>
+                                        <p:tgtEl>
+                                          <p:spTgt spid="36"/>
+                                        </p:tgtEl>
+                                      </p:cBhvr>
+                                    </p:animEffect>
+                                  </p:childTnLst>
+                                </p:cTn>
+                              </p:par>
+                              <p:par>
+                                <p:cTn id="110" presetID="10" presetClass="entr" presetSubtype="0" fill="hold" grpId="0" nodeType="afterEffect">
+                                  <p:stCondLst>
+                                    <p:cond delay="1300"/>
+                                  </p:stCondLst>
+                                  <p:childTnLst>
+                                    <p:set>
+                                      <p:cBhvr>
+                                        <p:cTn id="111" dur="1" fill="hold">
+                                          <p:stCondLst>
+                                            <p:cond delay="0"/>
+                                          </p:stCondLst>
+                                        </p:cTn>
+                                        <p:tgtEl>
+                                          <p:spTgt spid="37"/>
+                                        </p:tgtEl>
+                                        <p:attrNameLst>
+                                          <p:attrName>style.visibility</p:attrName>
+                                        </p:attrNameLst>
+                                      </p:cBhvr>
+                                      <p:to>
+                                        <p:strVal val="visible"/>
+                                      </p:to>
+                                    </p:set>
+                                    <p:animEffect transition="in" filter="fade">
+                                      <p:cBhvr>
+                                        <p:cTn id="112" dur="450"/>
+                                        <p:tgtEl>
+                                          <p:spTgt spid="37"/>
+                                        </p:tgtEl>
+                                      </p:cBhvr>
+                                    </p:animEffect>
+                                  </p:childTnLst>
+                                </p:cTn>
+                              </p:par>
+                              <p:par>
+                                <p:cTn id="113" presetID="10" presetClass="entr" presetSubtype="0" fill="hold" grpId="0" nodeType="afterEffect">
+                                  <p:stCondLst>
+                                    <p:cond delay="1300"/>
+                                  </p:stCondLst>
+                                  <p:childTnLst>
+                                    <p:set>
+                                      <p:cBhvr>
+                                        <p:cTn id="114" dur="1" fill="hold">
+                                          <p:stCondLst>
+                                            <p:cond delay="0"/>
+                                          </p:stCondLst>
+                                        </p:cTn>
+                                        <p:tgtEl>
+                                          <p:spTgt spid="38"/>
+                                        </p:tgtEl>
+                                        <p:attrNameLst>
+                                          <p:attrName>style.visibility</p:attrName>
+                                        </p:attrNameLst>
+                                      </p:cBhvr>
+                                      <p:to>
+                                        <p:strVal val="visible"/>
+                                      </p:to>
+                                    </p:set>
+                                    <p:animEffect transition="in" filter="fade">
+                                      <p:cBhvr>
+                                        <p:cTn id="115" dur="450"/>
+                                        <p:tgtEl>
+                                          <p:spTgt spid="38"/>
+                                        </p:tgtEl>
+                                      </p:cBhvr>
+                                    </p:animEffect>
+                                  </p:childTnLst>
+                                </p:cTn>
+                              </p:par>
+                              <p:par>
+                                <p:cTn id="116" presetID="10" presetClass="entr" presetSubtype="0" fill="hold" grpId="0" nodeType="afterEffect">
+                                  <p:stCondLst>
+                                    <p:cond delay="1300"/>
+                                  </p:stCondLst>
+                                  <p:childTnLst>
+                                    <p:set>
+                                      <p:cBhvr>
+                                        <p:cTn id="117" dur="1" fill="hold">
+                                          <p:stCondLst>
+                                            <p:cond delay="0"/>
+                                          </p:stCondLst>
+                                        </p:cTn>
+                                        <p:tgtEl>
+                                          <p:spTgt spid="39"/>
+                                        </p:tgtEl>
+                                        <p:attrNameLst>
+                                          <p:attrName>style.visibility</p:attrName>
+                                        </p:attrNameLst>
+                                      </p:cBhvr>
+                                      <p:to>
+                                        <p:strVal val="visible"/>
+                                      </p:to>
+                                    </p:set>
+                                    <p:animEffect transition="in" filter="fade">
+                                      <p:cBhvr>
+                                        <p:cTn id="118" dur="450"/>
+                                        <p:tgtEl>
+                                          <p:spTgt spid="39"/>
+                                        </p:tgtEl>
+                                      </p:cBhvr>
+                                    </p:animEffect>
+                                  </p:childTnLst>
+                                </p:cTn>
+                              </p:par>
+                              <p:par>
+                                <p:cTn id="119" presetID="10" presetClass="entr" presetSubtype="0" fill="hold" grpId="0" nodeType="afterEffect">
+                                  <p:stCondLst>
+                                    <p:cond delay="1300"/>
+                                  </p:stCondLst>
+                                  <p:childTnLst>
+                                    <p:set>
+                                      <p:cBhvr>
+                                        <p:cTn id="120" dur="1" fill="hold">
+                                          <p:stCondLst>
+                                            <p:cond delay="0"/>
+                                          </p:stCondLst>
+                                        </p:cTn>
+                                        <p:tgtEl>
+                                          <p:spTgt spid="40"/>
+                                        </p:tgtEl>
+                                        <p:attrNameLst>
+                                          <p:attrName>style.visibility</p:attrName>
+                                        </p:attrNameLst>
+                                      </p:cBhvr>
+                                      <p:to>
+                                        <p:strVal val="visible"/>
+                                      </p:to>
+                                    </p:set>
+                                    <p:animEffect transition="in" filter="fade">
+                                      <p:cBhvr>
+                                        <p:cTn id="121" dur="450"/>
+                                        <p:tgtEl>
+                                          <p:spTgt spid="40"/>
+                                        </p:tgtEl>
+                                      </p:cBhvr>
+                                    </p:animEffect>
+                                  </p:childTnLst>
+                                </p:cTn>
+                              </p:par>
+                              <p:par>
+                                <p:cTn id="122" presetID="10" presetClass="entr" presetSubtype="0" fill="hold" grpId="0" nodeType="afterEffect">
+                                  <p:stCondLst>
+                                    <p:cond delay="1300"/>
+                                  </p:stCondLst>
+                                  <p:childTnLst>
+                                    <p:set>
+                                      <p:cBhvr>
+                                        <p:cTn id="123" dur="1" fill="hold">
+                                          <p:stCondLst>
+                                            <p:cond delay="0"/>
+                                          </p:stCondLst>
+                                        </p:cTn>
+                                        <p:tgtEl>
+                                          <p:spTgt spid="41"/>
+                                        </p:tgtEl>
+                                        <p:attrNameLst>
+                                          <p:attrName>style.visibility</p:attrName>
+                                        </p:attrNameLst>
+                                      </p:cBhvr>
+                                      <p:to>
+                                        <p:strVal val="visible"/>
+                                      </p:to>
+                                    </p:set>
+                                    <p:animEffect transition="in" filter="fade">
+                                      <p:cBhvr>
+                                        <p:cTn id="124" dur="450"/>
+                                        <p:tgtEl>
+                                          <p:spTgt spid="41"/>
+                                        </p:tgtEl>
+                                      </p:cBhvr>
+                                    </p:animEffect>
+                                  </p:childTnLst>
+                                </p:cTn>
+                              </p:par>
+                              <p:par>
+                                <p:cTn id="125" presetID="10" presetClass="entr" presetSubtype="0" fill="hold" grpId="0" nodeType="afterEffect">
+                                  <p:stCondLst>
+                                    <p:cond delay="1300"/>
+                                  </p:stCondLst>
+                                  <p:childTnLst>
+                                    <p:set>
+                                      <p:cBhvr>
+                                        <p:cTn id="126" dur="1" fill="hold">
+                                          <p:stCondLst>
+                                            <p:cond delay="0"/>
+                                          </p:stCondLst>
+                                        </p:cTn>
+                                        <p:tgtEl>
+                                          <p:spTgt spid="42"/>
+                                        </p:tgtEl>
+                                        <p:attrNameLst>
+                                          <p:attrName>style.visibility</p:attrName>
+                                        </p:attrNameLst>
+                                      </p:cBhvr>
+                                      <p:to>
+                                        <p:strVal val="visible"/>
+                                      </p:to>
+                                    </p:set>
+                                    <p:animEffect transition="in" filter="fade">
+                                      <p:cBhvr>
+                                        <p:cTn id="127" dur="450"/>
+                                        <p:tgtEl>
+                                          <p:spTgt spid="42"/>
+                                        </p:tgtEl>
+                                      </p:cBhvr>
+                                    </p:animEffect>
+                                  </p:childTnLst>
+                                </p:cTn>
+                              </p:par>
+                              <p:par>
+                                <p:cTn id="128" presetID="10" presetClass="entr" presetSubtype="0" fill="hold" grpId="0" nodeType="afterEffect">
+                                  <p:stCondLst>
+                                    <p:cond delay="1300"/>
+                                  </p:stCondLst>
+                                  <p:childTnLst>
+                                    <p:set>
+                                      <p:cBhvr>
+                                        <p:cTn id="129" dur="1" fill="hold">
+                                          <p:stCondLst>
+                                            <p:cond delay="0"/>
+                                          </p:stCondLst>
+                                        </p:cTn>
+                                        <p:tgtEl>
+                                          <p:spTgt spid="43"/>
+                                        </p:tgtEl>
+                                        <p:attrNameLst>
+                                          <p:attrName>style.visibility</p:attrName>
+                                        </p:attrNameLst>
+                                      </p:cBhvr>
+                                      <p:to>
+                                        <p:strVal val="visible"/>
+                                      </p:to>
+                                    </p:set>
+                                    <p:animEffect transition="in" filter="fade">
+                                      <p:cBhvr>
+                                        <p:cTn id="130" dur="450"/>
+                                        <p:tgtEl>
+                                          <p:spTgt spid="43"/>
+                                        </p:tgtEl>
+                                      </p:cBhvr>
+                                    </p:animEffect>
+                                  </p:childTnLst>
+                                </p:cTn>
+                              </p:par>
+                            </p:childTnLst>
+                          </p:cTn>
+                        </p:par>
+                      </p:childTnLst>
+                    </p:cTn>
+                  </p:par>
+                </p:childTnLst>
+              </p:cTn>
+              <p:prevCondLst>
+                <p:cond evt="onPrev" delay="0">
+                  <p:tgtEl>
+                    <p:sldTgt/>
+                  </p:tgtEl>
+                </p:cond>
+              </p:prevCondLst>
+              <p:nextCondLst>
+                <p:cond evt="onNext" delay="0">
+                  <p:tgtEl>
+                    <p:sldTgt/>
+                  </p:tgtEl>
+                </p:cond>
+              </p:nextCondLst>
+            </p:seq>
+          </p:childTnLst>
+        </p:cTn>
+      </p:par>
+    </p:tnLst>
+    <p:bldLst>
+      <p:bldP spid="2" grpId="0" animBg="1"/>
+      <p:bldP spid="3" grpId="0" animBg="1"/>
+      <p:bldP spid="4" grpId="0" animBg="1"/>
+      <p:bldP spid="5" grpId="0" animBg="1"/>
+      <p:bldP spid="6" grpId="0" animBg="1"/>
+      <p:bldP spid="7" grpId="0" animBg="1"/>
+      <p:bldP spid="8" grpId="0" animBg="1"/>
+      <p:bldP spid="9" grpId="0" animBg="1"/>
+      <p:bldP spid="10" grpId="0" animBg="1"/>
+      <p:bldP spid="11" grpId="0" animBg="1"/>
+      <p:bldP spid="12" grpId="0" animBg="1"/>
+      <p:bldP spid="13" grpId="0" animBg="1"/>
+      <p:bldP spid="14" grpId="0" animBg="1"/>
+      <p:bldP spid="15" grpId="0" animBg="1"/>
+      <p:bldP spid="16" grpId="0" animBg="1"/>
+      <p:bldP spid="17" grpId="0" animBg="1"/>
+      <p:bldP spid="18" grpId="0" animBg="1"/>
+      <p:bldP spid="19" grpId="0" animBg="1"/>
+      <p:bldP spid="20" grpId="0" animBg="1"/>
+      <p:bldP spid="21" grpId="0" animBg="1"/>
+      <p:bldP spid="22" grpId="0" animBg="1"/>
+      <p:bldP spid="23" grpId="0" animBg="1"/>
+      <p:bldP spid="24" grpId="0" animBg="1"/>
+      <p:bldP spid="25" grpId="0" animBg="1"/>
+      <p:bldP spid="26" grpId="0" animBg="1"/>
+      <p:bldP spid="27" grpId="0" animBg="1"/>
+      <p:bldP spid="28" grpId="0" animBg="1"/>
+      <p:bldP spid="29" grpId="0" animBg="1"/>
+      <p:bldP spid="30" grpId="0" animBg="1"/>
+      <p:bldP spid="31" grpId="0" animBg="1"/>
+      <p:bldP spid="32" grpId="0" animBg="1"/>
+      <p:bldP spid="33" grpId="0" animBg="1"/>
+      <p:bldP spid="34" grpId="0" animBg="1"/>
+      <p:bldP spid="35" grpId="0" animBg="1"/>
+      <p:bldP spid="36" grpId="0" animBg="1"/>
+      <p:bldP spid="37" grpId="0" animBg="1"/>
+      <p:bldP spid="38" grpId="0" animBg="1"/>
+      <p:bldP spid="39" grpId="0" animBg="1"/>
+      <p:bldP spid="40" grpId="0" animBg="1"/>
+      <p:bldP spid="41" grpId="0" animBg="1"/>
+      <p:bldP spid="42" grpId="0" animBg="1"/>
+      <p:bldP spid="43" grpId="0" animBg="1"/>
+    </p:bldLst>
+  </p:timing>
+</p:sld>
+</file>
+
+<file path=ppt/slides/slide4.xml><?xml version="1.0" encoding="utf-8"?>
+<p:sld xmlns:a="http://schemas.openxmlformats.org/drawingml/2006/main" xmlns:r="http://schemas.openxmlformats.org/officeDocument/2006/relationships" xmlns:p="http://schemas.openxmlformats.org/presentationml/2006/main">
+  <p:cSld name="Slide 4">
+    <p:bg>
+      <p:bgPr>
+        <a:solidFill>
+          <a:srgbClr val="F4F6F8"/>
+        </a:solidFill>
+        <a:effectLst/>
+      </p:bgPr>
+    </p:bg>
+    <p:spTree>
+      <p:nvGrpSpPr>
+        <p:cNvPr id="1" name=""/>
+        <p:cNvGrpSpPr/>
+        <p:nvPr/>
+      </p:nvGrpSpPr>
+      <p:grpSpPr>
+        <a:xfrm>
+          <a:off x="0" y="0"/>
+          <a:ext cx="0" cy="0"/>
+          <a:chOff x="0" y="0"/>
+          <a:chExt cx="0" cy="0"/>
+        </a:xfrm>
+      </p:grpSpPr>
+      <p:sp>
+        <p:nvSpPr>
+          <p:cNvPr id="2" name="Text 0"/>
+          <p:cNvSpPr txBox="1"/>
+          <p:nvPr/>
+        </p:nvSpPr>
+        <p:spPr>
+          <a:xfrm>
+            <a:off x="685800" y="502920"/>
+            <a:ext cx="10820095" cy="566928"/>
+          </a:xfrm>
+          <a:prstGeom prst="rect">
+            <a:avLst/>
+          </a:prstGeom>
+          <a:noFill/>
+          <a:ln/>
+        </p:spPr>
+        <p:txBody>
+          <a:bodyPr wrap="square" lIns="0" tIns="0" rIns="0" bIns="0" rtlCol="0" anchor="ctr"/>
+          <a:lstStyle/>
+          <a:p>
+            <a:pPr marL="0" indent="0" algn="l">
+              <a:buNone/>
+            </a:pPr>
+            <a:r>
+              <a:rPr lang="en-US" sz="3200" b="1" dirty="0">
+                <a:solidFill>
+                  <a:srgbClr val="1B2430"/>
+                </a:solidFill>
+                <a:latin typeface="Cambria" pitchFamily="34" charset="0"/>
+                <a:ea typeface="Cambria" pitchFamily="34" charset="-122"/>
+                <a:cs typeface="Cambria" pitchFamily="34" charset="-120"/>
+              </a:rPr>
               <a:t>Qué les proponemos construir</a:t>
             </a:r>
             <a:endParaRPr lang="en-US" sz="3200" dirty="0"/>
@@ -13147,9 +18632,9 @@
 </p:sld>
 </file>
 
-<file path=ppt/slides/slide4.xml><?xml version="1.0" encoding="utf-8"?>
+<file path=ppt/slides/slide5.xml><?xml version="1.0" encoding="utf-8"?>
 <p:sld xmlns:a="http://schemas.openxmlformats.org/drawingml/2006/main" xmlns:r="http://schemas.openxmlformats.org/officeDocument/2006/relationships" xmlns:p="http://schemas.openxmlformats.org/presentationml/2006/main">
-  <p:cSld name="Slide 4">
+  <p:cSld name="Slide 5">
     <p:bg>
       <p:bgPr>
         <a:solidFill>
@@ -14193,9 +19678,9 @@
 </p:sld>
 </file>
 
-<file path=ppt/slides/slide5.xml><?xml version="1.0" encoding="utf-8"?>
+<file path=ppt/slides/slide6.xml><?xml version="1.0" encoding="utf-8"?>
 <p:sld xmlns:a="http://schemas.openxmlformats.org/drawingml/2006/main" xmlns:r="http://schemas.openxmlformats.org/officeDocument/2006/relationships" xmlns:p="http://schemas.openxmlformats.org/presentationml/2006/main">
-  <p:cSld name="Slide 5">
+  <p:cSld name="Slide 6">
     <p:bg>
       <p:bgPr>
         <a:solidFill>
@@ -15700,9 +21185,9 @@
 </p:sld>
 </file>
 
-<file path=ppt/slides/slide6.xml><?xml version="1.0" encoding="utf-8"?>
+<file path=ppt/slides/slide7.xml><?xml version="1.0" encoding="utf-8"?>
 <p:sld xmlns:a="http://schemas.openxmlformats.org/drawingml/2006/main" xmlns:r="http://schemas.openxmlformats.org/officeDocument/2006/relationships" xmlns:p="http://schemas.openxmlformats.org/presentationml/2006/main">
-  <p:cSld name="Slide 6">
+  <p:cSld name="Slide 7">
     <p:bg>
       <p:bgPr>
         <a:solidFill>
@@ -18414,9 +23899,9 @@
 </p:sld>
 </file>
 
-<file path=ppt/slides/slide7.xml><?xml version="1.0" encoding="utf-8"?>
+<file path=ppt/slides/slide8.xml><?xml version="1.0" encoding="utf-8"?>
 <p:sld xmlns:a="http://schemas.openxmlformats.org/drawingml/2006/main" xmlns:r="http://schemas.openxmlformats.org/officeDocument/2006/relationships" xmlns:p="http://schemas.openxmlformats.org/presentationml/2006/main">
-  <p:cSld name="Slide 7">
+  <p:cSld name="Slide 8">
     <p:bg>
       <p:bgPr>
         <a:solidFill>
@@ -19266,9 +24751,9 @@
 </p:sld>
 </file>
 
-<file path=ppt/slides/slide8.xml><?xml version="1.0" encoding="utf-8"?>
+<file path=ppt/slides/slide9.xml><?xml version="1.0" encoding="utf-8"?>
 <p:sld xmlns:a="http://schemas.openxmlformats.org/drawingml/2006/main" xmlns:r="http://schemas.openxmlformats.org/officeDocument/2006/relationships" xmlns:p="http://schemas.openxmlformats.org/presentationml/2006/main">
-  <p:cSld name="Slide 8">
+  <p:cSld name="Slide 9">
     <p:bg>
       <p:bgPr>
         <a:solidFill>
@@ -20471,2298 +25956,6 @@
       <p:bldP spid="12" grpId="0" animBg="1"/>
       <p:bldP spid="13" grpId="0" animBg="1"/>
       <p:bldP spid="14" grpId="0" animBg="1"/>
-    </p:bldLst>
-  </p:timing>
-</p:sld>
-</file>
-
-<file path=ppt/slides/slide9.xml><?xml version="1.0" encoding="utf-8"?>
-<p:sld xmlns:a="http://schemas.openxmlformats.org/drawingml/2006/main" xmlns:r="http://schemas.openxmlformats.org/officeDocument/2006/relationships" xmlns:p="http://schemas.openxmlformats.org/presentationml/2006/main">
-  <p:cSld name="Slide 9">
-    <p:bg>
-      <p:bgPr>
-        <a:solidFill>
-          <a:srgbClr val="F4F6F8"/>
-        </a:solidFill>
-        <a:effectLst/>
-      </p:bgPr>
-    </p:bg>
-    <p:spTree>
-      <p:nvGrpSpPr>
-        <p:cNvPr id="1" name=""/>
-        <p:cNvGrpSpPr/>
-        <p:nvPr/>
-      </p:nvGrpSpPr>
-      <p:grpSpPr>
-        <a:xfrm>
-          <a:off x="0" y="0"/>
-          <a:ext cx="0" cy="0"/>
-          <a:chOff x="0" y="0"/>
-          <a:chExt cx="0" cy="0"/>
-        </a:xfrm>
-      </p:grpSpPr>
-      <p:sp>
-        <p:nvSpPr>
-          <p:cNvPr id="2" name="Text 0"/>
-          <p:cNvSpPr txBox="1"/>
-          <p:nvPr/>
-        </p:nvSpPr>
-        <p:spPr>
-          <a:xfrm>
-            <a:off x="685800" y="502920"/>
-            <a:ext cx="10820095" cy="566928"/>
-          </a:xfrm>
-          <a:prstGeom prst="rect">
-            <a:avLst/>
-          </a:prstGeom>
-          <a:noFill/>
-          <a:ln/>
-        </p:spPr>
-        <p:txBody>
-          <a:bodyPr wrap="square" lIns="0" tIns="0" rIns="0" bIns="0" rtlCol="0" anchor="ctr"/>
-          <a:lstStyle/>
-          <a:p>
-            <a:pPr marL="0" indent="0" algn="l">
-              <a:buNone/>
-            </a:pPr>
-            <a:r>
-              <a:rPr lang="en-US" sz="3200" b="1" dirty="0">
-                <a:solidFill>
-                  <a:srgbClr val="1B2430"/>
-                </a:solidFill>
-                <a:latin typeface="Cambria" pitchFamily="34" charset="0"/>
-                <a:ea typeface="Cambria" pitchFamily="34" charset="-122"/>
-                <a:cs typeface="Cambria" pitchFamily="34" charset="-120"/>
-              </a:rPr>
-              <a:t>Qué no incluye esta primera etapa</a:t>
-            </a:r>
-            <a:endParaRPr lang="en-US" sz="3200" dirty="0"/>
-          </a:p>
-        </p:txBody>
-      </p:sp>
-      <p:sp>
-        <p:nvSpPr>
-          <p:cNvPr id="3" name="Text 1"/>
-          <p:cNvSpPr txBox="1"/>
-          <p:nvPr/>
-        </p:nvSpPr>
-        <p:spPr>
-          <a:xfrm>
-            <a:off x="685800" y="1097280"/>
-            <a:ext cx="10820095" cy="347472"/>
-          </a:xfrm>
-          <a:prstGeom prst="rect">
-            <a:avLst/>
-          </a:prstGeom>
-          <a:noFill/>
-          <a:ln/>
-        </p:spPr>
-        <p:txBody>
-          <a:bodyPr wrap="square" lIns="0" tIns="0" rIns="0" bIns="0" rtlCol="0" anchor="ctr"/>
-          <a:lstStyle/>
-          <a:p>
-            <a:pPr marL="0" indent="0" algn="l">
-              <a:buNone/>
-            </a:pPr>
-            <a:r>
-              <a:rPr lang="en-US" sz="1400" dirty="0">
-                <a:solidFill>
-                  <a:srgbClr val="6B7A8C"/>
-                </a:solidFill>
-                <a:latin typeface="Calibri" pitchFamily="34" charset="0"/>
-                <a:ea typeface="Calibri" pitchFamily="34" charset="-122"/>
-                <a:cs typeface="Calibri" pitchFamily="34" charset="-120"/>
-              </a:rPr>
-              <a:t>Lo dejamos claro desde ahora para que no aparezca como sorpresa más adelante.</a:t>
-            </a:r>
-            <a:endParaRPr lang="en-US" sz="1400" dirty="0"/>
-          </a:p>
-        </p:txBody>
-      </p:sp>
-      <p:sp>
-        <p:nvSpPr>
-          <p:cNvPr id="4" name="Shape 2"/>
-          <p:cNvSpPr/>
-          <p:nvPr/>
-        </p:nvSpPr>
-        <p:spPr>
-          <a:xfrm>
-            <a:off x="685800" y="1783080"/>
-            <a:ext cx="5248656" cy="658368"/>
-          </a:xfrm>
-          <a:prstGeom prst="roundRect">
-            <a:avLst>
-              <a:gd name="adj" fmla="val 11111"/>
-            </a:avLst>
-          </a:prstGeom>
-          <a:solidFill>
-            <a:srgbClr val="FFFFFF"/>
-          </a:solidFill>
-          <a:ln w="12700">
-            <a:solidFill>
-              <a:srgbClr val="DCE3EA"/>
-            </a:solidFill>
-            <a:prstDash val="solid"/>
-          </a:ln>
-        </p:spPr>
-      </p:sp>
-      <p:sp>
-        <p:nvSpPr>
-          <p:cNvPr id="5" name="Shape 3"/>
-          <p:cNvSpPr/>
-          <p:nvPr/>
-        </p:nvSpPr>
-        <p:spPr>
-          <a:xfrm>
-            <a:off x="941832" y="1975104"/>
-            <a:ext cx="274320" cy="274320"/>
-          </a:xfrm>
-          <a:prstGeom prst="ellipse">
-            <a:avLst/>
-          </a:prstGeom>
-          <a:solidFill>
-            <a:srgbClr val="E3E9EE"/>
-          </a:solidFill>
-          <a:ln w="12700">
-            <a:solidFill>
-              <a:srgbClr val="333333"/>
-            </a:solidFill>
-            <a:prstDash val="solid"/>
-          </a:ln>
-        </p:spPr>
-      </p:sp>
-      <p:sp>
-        <p:nvSpPr>
-          <p:cNvPr id="6" name="Text 4"/>
-          <p:cNvSpPr txBox="1"/>
-          <p:nvPr/>
-        </p:nvSpPr>
-        <p:spPr>
-          <a:xfrm>
-            <a:off x="941832" y="1975104"/>
-            <a:ext cx="274320" cy="274320"/>
-          </a:xfrm>
-          <a:prstGeom prst="rect">
-            <a:avLst/>
-          </a:prstGeom>
-          <a:noFill/>
-          <a:ln/>
-        </p:spPr>
-        <p:txBody>
-          <a:bodyPr wrap="square" lIns="0" tIns="0" rIns="0" bIns="0" rtlCol="0" anchor="ctr"/>
-          <a:lstStyle/>
-          <a:p>
-            <a:pPr marL="0" indent="0" algn="ctr">
-              <a:buNone/>
-            </a:pPr>
-            <a:r>
-              <a:rPr lang="en-US" sz="1100" b="1" dirty="0">
-                <a:solidFill>
-                  <a:srgbClr val="7A8896"/>
-                </a:solidFill>
-                <a:latin typeface="Calibri" pitchFamily="34" charset="0"/>
-                <a:ea typeface="Calibri" pitchFamily="34" charset="-122"/>
-                <a:cs typeface="Calibri" pitchFamily="34" charset="-120"/>
-              </a:rPr>
-              <a:t>✕</a:t>
-            </a:r>
-            <a:endParaRPr lang="en-US" sz="1100" dirty="0"/>
-          </a:p>
-        </p:txBody>
-      </p:sp>
-      <p:sp>
-        <p:nvSpPr>
-          <p:cNvPr id="7" name="Text 5"/>
-          <p:cNvSpPr txBox="1"/>
-          <p:nvPr/>
-        </p:nvSpPr>
-        <p:spPr>
-          <a:xfrm>
-            <a:off x="1344168" y="1783080"/>
-            <a:ext cx="4334256" cy="658368"/>
-          </a:xfrm>
-          <a:prstGeom prst="rect">
-            <a:avLst/>
-          </a:prstGeom>
-          <a:noFill/>
-          <a:ln/>
-        </p:spPr>
-        <p:txBody>
-          <a:bodyPr wrap="square" lIns="0" tIns="0" rIns="0" bIns="0" rtlCol="0" anchor="ctr"/>
-          <a:lstStyle/>
-          <a:p>
-            <a:pPr marL="0" indent="0">
-              <a:buNone/>
-            </a:pPr>
-            <a:r>
-              <a:rPr lang="en-US" sz="1300" dirty="0">
-                <a:solidFill>
-                  <a:srgbClr val="1B2430"/>
-                </a:solidFill>
-                <a:latin typeface="Calibri" pitchFamily="34" charset="0"/>
-                <a:ea typeface="Calibri" pitchFamily="34" charset="-122"/>
-                <a:cs typeface="Calibri" pitchFamily="34" charset="-120"/>
-              </a:rPr>
-              <a:t>Facturación y cobranzas — esto es un cotizador, no un sistema contable</a:t>
-            </a:r>
-            <a:endParaRPr lang="en-US" sz="1300" dirty="0"/>
-          </a:p>
-        </p:txBody>
-      </p:sp>
-      <p:sp>
-        <p:nvSpPr>
-          <p:cNvPr id="8" name="Shape 6"/>
-          <p:cNvSpPr/>
-          <p:nvPr/>
-        </p:nvSpPr>
-        <p:spPr>
-          <a:xfrm>
-            <a:off x="6254496" y="1783080"/>
-            <a:ext cx="5248656" cy="658368"/>
-          </a:xfrm>
-          <a:prstGeom prst="roundRect">
-            <a:avLst>
-              <a:gd name="adj" fmla="val 11111"/>
-            </a:avLst>
-          </a:prstGeom>
-          <a:solidFill>
-            <a:srgbClr val="FFFFFF"/>
-          </a:solidFill>
-          <a:ln w="12700">
-            <a:solidFill>
-              <a:srgbClr val="DCE3EA"/>
-            </a:solidFill>
-            <a:prstDash val="solid"/>
-          </a:ln>
-        </p:spPr>
-      </p:sp>
-      <p:sp>
-        <p:nvSpPr>
-          <p:cNvPr id="9" name="Shape 7"/>
-          <p:cNvSpPr/>
-          <p:nvPr/>
-        </p:nvSpPr>
-        <p:spPr>
-          <a:xfrm>
-            <a:off x="6510528" y="1975104"/>
-            <a:ext cx="274320" cy="274320"/>
-          </a:xfrm>
-          <a:prstGeom prst="ellipse">
-            <a:avLst/>
-          </a:prstGeom>
-          <a:solidFill>
-            <a:srgbClr val="E3E9EE"/>
-          </a:solidFill>
-          <a:ln w="12700">
-            <a:solidFill>
-              <a:srgbClr val="333333"/>
-            </a:solidFill>
-            <a:prstDash val="solid"/>
-          </a:ln>
-        </p:spPr>
-      </p:sp>
-      <p:sp>
-        <p:nvSpPr>
-          <p:cNvPr id="10" name="Text 8"/>
-          <p:cNvSpPr txBox="1"/>
-          <p:nvPr/>
-        </p:nvSpPr>
-        <p:spPr>
-          <a:xfrm>
-            <a:off x="6510528" y="1975104"/>
-            <a:ext cx="274320" cy="274320"/>
-          </a:xfrm>
-          <a:prstGeom prst="rect">
-            <a:avLst/>
-          </a:prstGeom>
-          <a:noFill/>
-          <a:ln/>
-        </p:spPr>
-        <p:txBody>
-          <a:bodyPr wrap="square" lIns="0" tIns="0" rIns="0" bIns="0" rtlCol="0" anchor="ctr"/>
-          <a:lstStyle/>
-          <a:p>
-            <a:pPr marL="0" indent="0" algn="ctr">
-              <a:buNone/>
-            </a:pPr>
-            <a:r>
-              <a:rPr lang="en-US" sz="1100" b="1" dirty="0">
-                <a:solidFill>
-                  <a:srgbClr val="7A8896"/>
-                </a:solidFill>
-                <a:latin typeface="Calibri" pitchFamily="34" charset="0"/>
-                <a:ea typeface="Calibri" pitchFamily="34" charset="-122"/>
-                <a:cs typeface="Calibri" pitchFamily="34" charset="-120"/>
-              </a:rPr>
-              <a:t>✕</a:t>
-            </a:r>
-            <a:endParaRPr lang="en-US" sz="1100" dirty="0"/>
-          </a:p>
-        </p:txBody>
-      </p:sp>
-      <p:sp>
-        <p:nvSpPr>
-          <p:cNvPr id="11" name="Text 9"/>
-          <p:cNvSpPr txBox="1"/>
-          <p:nvPr/>
-        </p:nvSpPr>
-        <p:spPr>
-          <a:xfrm>
-            <a:off x="6912864" y="1783080"/>
-            <a:ext cx="4334256" cy="658368"/>
-          </a:xfrm>
-          <a:prstGeom prst="rect">
-            <a:avLst/>
-          </a:prstGeom>
-          <a:noFill/>
-          <a:ln/>
-        </p:spPr>
-        <p:txBody>
-          <a:bodyPr wrap="square" lIns="0" tIns="0" rIns="0" bIns="0" rtlCol="0" anchor="ctr"/>
-          <a:lstStyle/>
-          <a:p>
-            <a:pPr marL="0" indent="0">
-              <a:buNone/>
-            </a:pPr>
-            <a:r>
-              <a:rPr lang="en-US" sz="1300" dirty="0">
-                <a:solidFill>
-                  <a:srgbClr val="1B2430"/>
-                </a:solidFill>
-                <a:latin typeface="Calibri" pitchFamily="34" charset="0"/>
-                <a:ea typeface="Calibri" pitchFamily="34" charset="-122"/>
-                <a:cs typeface="Calibri" pitchFamily="34" charset="-120"/>
-              </a:rPr>
-              <a:t>Control de stock real de material</a:t>
-            </a:r>
-            <a:endParaRPr lang="en-US" sz="1300" dirty="0"/>
-          </a:p>
-        </p:txBody>
-      </p:sp>
-      <p:sp>
-        <p:nvSpPr>
-          <p:cNvPr id="12" name="Shape 10"/>
-          <p:cNvSpPr/>
-          <p:nvPr/>
-        </p:nvSpPr>
-        <p:spPr>
-          <a:xfrm>
-            <a:off x="685800" y="2569464"/>
-            <a:ext cx="5248656" cy="658368"/>
-          </a:xfrm>
-          <a:prstGeom prst="roundRect">
-            <a:avLst>
-              <a:gd name="adj" fmla="val 11111"/>
-            </a:avLst>
-          </a:prstGeom>
-          <a:solidFill>
-            <a:srgbClr val="FFFFFF"/>
-          </a:solidFill>
-          <a:ln w="12700">
-            <a:solidFill>
-              <a:srgbClr val="DCE3EA"/>
-            </a:solidFill>
-            <a:prstDash val="solid"/>
-          </a:ln>
-        </p:spPr>
-      </p:sp>
-      <p:sp>
-        <p:nvSpPr>
-          <p:cNvPr id="13" name="Shape 11"/>
-          <p:cNvSpPr/>
-          <p:nvPr/>
-        </p:nvSpPr>
-        <p:spPr>
-          <a:xfrm>
-            <a:off x="941832" y="2761488"/>
-            <a:ext cx="274320" cy="274320"/>
-          </a:xfrm>
-          <a:prstGeom prst="ellipse">
-            <a:avLst/>
-          </a:prstGeom>
-          <a:solidFill>
-            <a:srgbClr val="E3E9EE"/>
-          </a:solidFill>
-          <a:ln w="12700">
-            <a:solidFill>
-              <a:srgbClr val="333333"/>
-            </a:solidFill>
-            <a:prstDash val="solid"/>
-          </a:ln>
-        </p:spPr>
-      </p:sp>
-      <p:sp>
-        <p:nvSpPr>
-          <p:cNvPr id="14" name="Text 12"/>
-          <p:cNvSpPr txBox="1"/>
-          <p:nvPr/>
-        </p:nvSpPr>
-        <p:spPr>
-          <a:xfrm>
-            <a:off x="941832" y="2761488"/>
-            <a:ext cx="274320" cy="274320"/>
-          </a:xfrm>
-          <a:prstGeom prst="rect">
-            <a:avLst/>
-          </a:prstGeom>
-          <a:noFill/>
-          <a:ln/>
-        </p:spPr>
-        <p:txBody>
-          <a:bodyPr wrap="square" lIns="0" tIns="0" rIns="0" bIns="0" rtlCol="0" anchor="ctr"/>
-          <a:lstStyle/>
-          <a:p>
-            <a:pPr marL="0" indent="0" algn="ctr">
-              <a:buNone/>
-            </a:pPr>
-            <a:r>
-              <a:rPr lang="en-US" sz="1100" b="1" dirty="0">
-                <a:solidFill>
-                  <a:srgbClr val="7A8896"/>
-                </a:solidFill>
-                <a:latin typeface="Calibri" pitchFamily="34" charset="0"/>
-                <a:ea typeface="Calibri" pitchFamily="34" charset="-122"/>
-                <a:cs typeface="Calibri" pitchFamily="34" charset="-120"/>
-              </a:rPr>
-              <a:t>✕</a:t>
-            </a:r>
-            <a:endParaRPr lang="en-US" sz="1100" dirty="0"/>
-          </a:p>
-        </p:txBody>
-      </p:sp>
-      <p:sp>
-        <p:nvSpPr>
-          <p:cNvPr id="15" name="Text 13"/>
-          <p:cNvSpPr txBox="1"/>
-          <p:nvPr/>
-        </p:nvSpPr>
-        <p:spPr>
-          <a:xfrm>
-            <a:off x="1344168" y="2569464"/>
-            <a:ext cx="4334256" cy="658368"/>
-          </a:xfrm>
-          <a:prstGeom prst="rect">
-            <a:avLst/>
-          </a:prstGeom>
-          <a:noFill/>
-          <a:ln/>
-        </p:spPr>
-        <p:txBody>
-          <a:bodyPr wrap="square" lIns="0" tIns="0" rIns="0" bIns="0" rtlCol="0" anchor="ctr"/>
-          <a:lstStyle/>
-          <a:p>
-            <a:pPr marL="0" indent="0">
-              <a:buNone/>
-            </a:pPr>
-            <a:r>
-              <a:rPr lang="en-US" sz="1300" dirty="0">
-                <a:solidFill>
-                  <a:srgbClr val="1B2430"/>
-                </a:solidFill>
-                <a:latin typeface="Calibri" pitchFamily="34" charset="0"/>
-                <a:ea typeface="Calibri" pitchFamily="34" charset="-122"/>
-                <a:cs typeface="Calibri" pitchFamily="34" charset="-120"/>
-              </a:rPr>
-              <a:t>Seguimiento de las órdenes dentro del taller</a:t>
-            </a:r>
-            <a:endParaRPr lang="en-US" sz="1300" dirty="0"/>
-          </a:p>
-        </p:txBody>
-      </p:sp>
-      <p:sp>
-        <p:nvSpPr>
-          <p:cNvPr id="16" name="Shape 14"/>
-          <p:cNvSpPr/>
-          <p:nvPr/>
-        </p:nvSpPr>
-        <p:spPr>
-          <a:xfrm>
-            <a:off x="6254496" y="2569464"/>
-            <a:ext cx="5248656" cy="658368"/>
-          </a:xfrm>
-          <a:prstGeom prst="roundRect">
-            <a:avLst>
-              <a:gd name="adj" fmla="val 11111"/>
-            </a:avLst>
-          </a:prstGeom>
-          <a:solidFill>
-            <a:srgbClr val="FFFFFF"/>
-          </a:solidFill>
-          <a:ln w="12700">
-            <a:solidFill>
-              <a:srgbClr val="DCE3EA"/>
-            </a:solidFill>
-            <a:prstDash val="solid"/>
-          </a:ln>
-        </p:spPr>
-      </p:sp>
-      <p:sp>
-        <p:nvSpPr>
-          <p:cNvPr id="17" name="Shape 15"/>
-          <p:cNvSpPr/>
-          <p:nvPr/>
-        </p:nvSpPr>
-        <p:spPr>
-          <a:xfrm>
-            <a:off x="6510528" y="2761488"/>
-            <a:ext cx="274320" cy="274320"/>
-          </a:xfrm>
-          <a:prstGeom prst="ellipse">
-            <a:avLst/>
-          </a:prstGeom>
-          <a:solidFill>
-            <a:srgbClr val="E3E9EE"/>
-          </a:solidFill>
-          <a:ln w="12700">
-            <a:solidFill>
-              <a:srgbClr val="333333"/>
-            </a:solidFill>
-            <a:prstDash val="solid"/>
-          </a:ln>
-        </p:spPr>
-      </p:sp>
-      <p:sp>
-        <p:nvSpPr>
-          <p:cNvPr id="18" name="Text 16"/>
-          <p:cNvSpPr txBox="1"/>
-          <p:nvPr/>
-        </p:nvSpPr>
-        <p:spPr>
-          <a:xfrm>
-            <a:off x="6510528" y="2761488"/>
-            <a:ext cx="274320" cy="274320"/>
-          </a:xfrm>
-          <a:prstGeom prst="rect">
-            <a:avLst/>
-          </a:prstGeom>
-          <a:noFill/>
-          <a:ln/>
-        </p:spPr>
-        <p:txBody>
-          <a:bodyPr wrap="square" lIns="0" tIns="0" rIns="0" bIns="0" rtlCol="0" anchor="ctr"/>
-          <a:lstStyle/>
-          <a:p>
-            <a:pPr marL="0" indent="0" algn="ctr">
-              <a:buNone/>
-            </a:pPr>
-            <a:r>
-              <a:rPr lang="en-US" sz="1100" b="1" dirty="0">
-                <a:solidFill>
-                  <a:srgbClr val="7A8896"/>
-                </a:solidFill>
-                <a:latin typeface="Calibri" pitchFamily="34" charset="0"/>
-                <a:ea typeface="Calibri" pitchFamily="34" charset="-122"/>
-                <a:cs typeface="Calibri" pitchFamily="34" charset="-120"/>
-              </a:rPr>
-              <a:t>✕</a:t>
-            </a:r>
-            <a:endParaRPr lang="en-US" sz="1100" dirty="0"/>
-          </a:p>
-        </p:txBody>
-      </p:sp>
-      <p:sp>
-        <p:nvSpPr>
-          <p:cNvPr id="19" name="Text 17"/>
-          <p:cNvSpPr txBox="1"/>
-          <p:nvPr/>
-        </p:nvSpPr>
-        <p:spPr>
-          <a:xfrm>
-            <a:off x="6912864" y="2569464"/>
-            <a:ext cx="4334256" cy="658368"/>
-          </a:xfrm>
-          <a:prstGeom prst="rect">
-            <a:avLst/>
-          </a:prstGeom>
-          <a:noFill/>
-          <a:ln/>
-        </p:spPr>
-        <p:txBody>
-          <a:bodyPr wrap="square" lIns="0" tIns="0" rIns="0" bIns="0" rtlCol="0" anchor="ctr"/>
-          <a:lstStyle/>
-          <a:p>
-            <a:pPr marL="0" indent="0">
-              <a:buNone/>
-            </a:pPr>
-            <a:r>
-              <a:rPr lang="en-US" sz="1300" dirty="0">
-                <a:solidFill>
-                  <a:srgbClr val="1B2430"/>
-                </a:solidFill>
-                <a:latin typeface="Calibri" pitchFamily="34" charset="0"/>
-                <a:ea typeface="Calibri" pitchFamily="34" charset="-122"/>
-                <a:cs typeface="Calibri" pitchFamily="34" charset="-120"/>
-              </a:rPr>
-              <a:t>Generación de archivos para la máquina de corte — el sistema da el plano de corte</a:t>
-            </a:r>
-            <a:endParaRPr lang="en-US" sz="1300" dirty="0"/>
-          </a:p>
-        </p:txBody>
-      </p:sp>
-      <p:sp>
-        <p:nvSpPr>
-          <p:cNvPr id="20" name="Shape 18"/>
-          <p:cNvSpPr/>
-          <p:nvPr/>
-        </p:nvSpPr>
-        <p:spPr>
-          <a:xfrm>
-            <a:off x="685800" y="3355848"/>
-            <a:ext cx="5248656" cy="658368"/>
-          </a:xfrm>
-          <a:prstGeom prst="roundRect">
-            <a:avLst>
-              <a:gd name="adj" fmla="val 11111"/>
-            </a:avLst>
-          </a:prstGeom>
-          <a:solidFill>
-            <a:srgbClr val="FFFFFF"/>
-          </a:solidFill>
-          <a:ln w="12700">
-            <a:solidFill>
-              <a:srgbClr val="DCE3EA"/>
-            </a:solidFill>
-            <a:prstDash val="solid"/>
-          </a:ln>
-        </p:spPr>
-      </p:sp>
-      <p:sp>
-        <p:nvSpPr>
-          <p:cNvPr id="21" name="Shape 19"/>
-          <p:cNvSpPr/>
-          <p:nvPr/>
-        </p:nvSpPr>
-        <p:spPr>
-          <a:xfrm>
-            <a:off x="941832" y="3547872"/>
-            <a:ext cx="274320" cy="274320"/>
-          </a:xfrm>
-          <a:prstGeom prst="ellipse">
-            <a:avLst/>
-          </a:prstGeom>
-          <a:solidFill>
-            <a:srgbClr val="E3E9EE"/>
-          </a:solidFill>
-          <a:ln w="12700">
-            <a:solidFill>
-              <a:srgbClr val="333333"/>
-            </a:solidFill>
-            <a:prstDash val="solid"/>
-          </a:ln>
-        </p:spPr>
-      </p:sp>
-      <p:sp>
-        <p:nvSpPr>
-          <p:cNvPr id="22" name="Text 20"/>
-          <p:cNvSpPr txBox="1"/>
-          <p:nvPr/>
-        </p:nvSpPr>
-        <p:spPr>
-          <a:xfrm>
-            <a:off x="941832" y="3547872"/>
-            <a:ext cx="274320" cy="274320"/>
-          </a:xfrm>
-          <a:prstGeom prst="rect">
-            <a:avLst/>
-          </a:prstGeom>
-          <a:noFill/>
-          <a:ln/>
-        </p:spPr>
-        <p:txBody>
-          <a:bodyPr wrap="square" lIns="0" tIns="0" rIns="0" bIns="0" rtlCol="0" anchor="ctr"/>
-          <a:lstStyle/>
-          <a:p>
-            <a:pPr marL="0" indent="0" algn="ctr">
-              <a:buNone/>
-            </a:pPr>
-            <a:r>
-              <a:rPr lang="en-US" sz="1100" b="1" dirty="0">
-                <a:solidFill>
-                  <a:srgbClr val="7A8896"/>
-                </a:solidFill>
-                <a:latin typeface="Calibri" pitchFamily="34" charset="0"/>
-                <a:ea typeface="Calibri" pitchFamily="34" charset="-122"/>
-                <a:cs typeface="Calibri" pitchFamily="34" charset="-120"/>
-              </a:rPr>
-              <a:t>✕</a:t>
-            </a:r>
-            <a:endParaRPr lang="en-US" sz="1100" dirty="0"/>
-          </a:p>
-        </p:txBody>
-      </p:sp>
-      <p:sp>
-        <p:nvSpPr>
-          <p:cNvPr id="23" name="Text 21"/>
-          <p:cNvSpPr txBox="1"/>
-          <p:nvPr/>
-        </p:nvSpPr>
-        <p:spPr>
-          <a:xfrm>
-            <a:off x="1344168" y="3355848"/>
-            <a:ext cx="4334256" cy="658368"/>
-          </a:xfrm>
-          <a:prstGeom prst="rect">
-            <a:avLst/>
-          </a:prstGeom>
-          <a:noFill/>
-          <a:ln/>
-        </p:spPr>
-        <p:txBody>
-          <a:bodyPr wrap="square" lIns="0" tIns="0" rIns="0" bIns="0" rtlCol="0" anchor="ctr"/>
-          <a:lstStyle/>
-          <a:p>
-            <a:pPr marL="0" indent="0">
-              <a:buNone/>
-            </a:pPr>
-            <a:r>
-              <a:rPr lang="en-US" sz="1300" dirty="0">
-                <a:solidFill>
-                  <a:srgbClr val="1B2430"/>
-                </a:solidFill>
-                <a:latin typeface="Calibri" pitchFamily="34" charset="0"/>
-                <a:ea typeface="Calibri" pitchFamily="34" charset="-122"/>
-                <a:cs typeface="Calibri" pitchFamily="34" charset="-120"/>
-              </a:rPr>
-              <a:t>App para instalar en el celular — la aprobación va por navegador</a:t>
-            </a:r>
-            <a:endParaRPr lang="en-US" sz="1300" dirty="0"/>
-          </a:p>
-        </p:txBody>
-      </p:sp>
-      <p:sp>
-        <p:nvSpPr>
-          <p:cNvPr id="24" name="Shape 22"/>
-          <p:cNvSpPr/>
-          <p:nvPr/>
-        </p:nvSpPr>
-        <p:spPr>
-          <a:xfrm>
-            <a:off x="6254496" y="3355848"/>
-            <a:ext cx="5248656" cy="658368"/>
-          </a:xfrm>
-          <a:prstGeom prst="roundRect">
-            <a:avLst>
-              <a:gd name="adj" fmla="val 11111"/>
-            </a:avLst>
-          </a:prstGeom>
-          <a:solidFill>
-            <a:srgbClr val="FFFFFF"/>
-          </a:solidFill>
-          <a:ln w="12700">
-            <a:solidFill>
-              <a:srgbClr val="DCE3EA"/>
-            </a:solidFill>
-            <a:prstDash val="solid"/>
-          </a:ln>
-        </p:spPr>
-      </p:sp>
-      <p:sp>
-        <p:nvSpPr>
-          <p:cNvPr id="25" name="Shape 23"/>
-          <p:cNvSpPr/>
-          <p:nvPr/>
-        </p:nvSpPr>
-        <p:spPr>
-          <a:xfrm>
-            <a:off x="6510528" y="3547872"/>
-            <a:ext cx="274320" cy="274320"/>
-          </a:xfrm>
-          <a:prstGeom prst="ellipse">
-            <a:avLst/>
-          </a:prstGeom>
-          <a:solidFill>
-            <a:srgbClr val="E3E9EE"/>
-          </a:solidFill>
-          <a:ln w="12700">
-            <a:solidFill>
-              <a:srgbClr val="333333"/>
-            </a:solidFill>
-            <a:prstDash val="solid"/>
-          </a:ln>
-        </p:spPr>
-      </p:sp>
-      <p:sp>
-        <p:nvSpPr>
-          <p:cNvPr id="26" name="Text 24"/>
-          <p:cNvSpPr txBox="1"/>
-          <p:nvPr/>
-        </p:nvSpPr>
-        <p:spPr>
-          <a:xfrm>
-            <a:off x="6510528" y="3547872"/>
-            <a:ext cx="274320" cy="274320"/>
-          </a:xfrm>
-          <a:prstGeom prst="rect">
-            <a:avLst/>
-          </a:prstGeom>
-          <a:noFill/>
-          <a:ln/>
-        </p:spPr>
-        <p:txBody>
-          <a:bodyPr wrap="square" lIns="0" tIns="0" rIns="0" bIns="0" rtlCol="0" anchor="ctr"/>
-          <a:lstStyle/>
-          <a:p>
-            <a:pPr marL="0" indent="0" algn="ctr">
-              <a:buNone/>
-            </a:pPr>
-            <a:r>
-              <a:rPr lang="en-US" sz="1100" b="1" dirty="0">
-                <a:solidFill>
-                  <a:srgbClr val="7A8896"/>
-                </a:solidFill>
-                <a:latin typeface="Calibri" pitchFamily="34" charset="0"/>
-                <a:ea typeface="Calibri" pitchFamily="34" charset="-122"/>
-                <a:cs typeface="Calibri" pitchFamily="34" charset="-120"/>
-              </a:rPr>
-              <a:t>✕</a:t>
-            </a:r>
-            <a:endParaRPr lang="en-US" sz="1100" dirty="0"/>
-          </a:p>
-        </p:txBody>
-      </p:sp>
-      <p:sp>
-        <p:nvSpPr>
-          <p:cNvPr id="27" name="Text 25"/>
-          <p:cNvSpPr txBox="1"/>
-          <p:nvPr/>
-        </p:nvSpPr>
-        <p:spPr>
-          <a:xfrm>
-            <a:off x="6912864" y="3355848"/>
-            <a:ext cx="4334256" cy="658368"/>
-          </a:xfrm>
-          <a:prstGeom prst="rect">
-            <a:avLst/>
-          </a:prstGeom>
-          <a:noFill/>
-          <a:ln/>
-        </p:spPr>
-        <p:txBody>
-          <a:bodyPr wrap="square" lIns="0" tIns="0" rIns="0" bIns="0" rtlCol="0" anchor="ctr"/>
-          <a:lstStyle/>
-          <a:p>
-            <a:pPr marL="0" indent="0">
-              <a:buNone/>
-            </a:pPr>
-            <a:r>
-              <a:rPr lang="en-US" sz="1300" dirty="0">
-                <a:solidFill>
-                  <a:srgbClr val="1B2430"/>
-                </a:solidFill>
-                <a:latin typeface="Calibri" pitchFamily="34" charset="0"/>
-                <a:ea typeface="Calibri" pitchFamily="34" charset="-122"/>
-                <a:cs typeface="Calibri" pitchFamily="34" charset="-120"/>
-              </a:rPr>
-              <a:t>Más de una sucursal o empresa</a:t>
-            </a:r>
-            <a:endParaRPr lang="en-US" sz="1300" dirty="0"/>
-          </a:p>
-        </p:txBody>
-      </p:sp>
-      <p:sp>
-        <p:nvSpPr>
-          <p:cNvPr id="28" name="Shape 26"/>
-          <p:cNvSpPr/>
-          <p:nvPr/>
-        </p:nvSpPr>
-        <p:spPr>
-          <a:xfrm>
-            <a:off x="685800" y="4142232"/>
-            <a:ext cx="5248656" cy="658368"/>
-          </a:xfrm>
-          <a:prstGeom prst="roundRect">
-            <a:avLst>
-              <a:gd name="adj" fmla="val 11111"/>
-            </a:avLst>
-          </a:prstGeom>
-          <a:solidFill>
-            <a:srgbClr val="FFFFFF"/>
-          </a:solidFill>
-          <a:ln w="12700">
-            <a:solidFill>
-              <a:srgbClr val="DCE3EA"/>
-            </a:solidFill>
-            <a:prstDash val="solid"/>
-          </a:ln>
-        </p:spPr>
-      </p:sp>
-      <p:sp>
-        <p:nvSpPr>
-          <p:cNvPr id="29" name="Shape 27"/>
-          <p:cNvSpPr/>
-          <p:nvPr/>
-        </p:nvSpPr>
-        <p:spPr>
-          <a:xfrm>
-            <a:off x="941832" y="4334256"/>
-            <a:ext cx="274320" cy="274320"/>
-          </a:xfrm>
-          <a:prstGeom prst="ellipse">
-            <a:avLst/>
-          </a:prstGeom>
-          <a:solidFill>
-            <a:srgbClr val="E3E9EE"/>
-          </a:solidFill>
-          <a:ln w="12700">
-            <a:solidFill>
-              <a:srgbClr val="333333"/>
-            </a:solidFill>
-            <a:prstDash val="solid"/>
-          </a:ln>
-        </p:spPr>
-      </p:sp>
-      <p:sp>
-        <p:nvSpPr>
-          <p:cNvPr id="30" name="Text 28"/>
-          <p:cNvSpPr txBox="1"/>
-          <p:nvPr/>
-        </p:nvSpPr>
-        <p:spPr>
-          <a:xfrm>
-            <a:off x="941832" y="4334256"/>
-            <a:ext cx="274320" cy="274320"/>
-          </a:xfrm>
-          <a:prstGeom prst="rect">
-            <a:avLst/>
-          </a:prstGeom>
-          <a:noFill/>
-          <a:ln/>
-        </p:spPr>
-        <p:txBody>
-          <a:bodyPr wrap="square" lIns="0" tIns="0" rIns="0" bIns="0" rtlCol="0" anchor="ctr"/>
-          <a:lstStyle/>
-          <a:p>
-            <a:pPr marL="0" indent="0" algn="ctr">
-              <a:buNone/>
-            </a:pPr>
-            <a:r>
-              <a:rPr lang="en-US" sz="1100" b="1" dirty="0">
-                <a:solidFill>
-                  <a:srgbClr val="7A8896"/>
-                </a:solidFill>
-                <a:latin typeface="Calibri" pitchFamily="34" charset="0"/>
-                <a:ea typeface="Calibri" pitchFamily="34" charset="-122"/>
-                <a:cs typeface="Calibri" pitchFamily="34" charset="-120"/>
-              </a:rPr>
-              <a:t>✕</a:t>
-            </a:r>
-            <a:endParaRPr lang="en-US" sz="1100" dirty="0"/>
-          </a:p>
-        </p:txBody>
-      </p:sp>
-      <p:sp>
-        <p:nvSpPr>
-          <p:cNvPr id="31" name="Text 29"/>
-          <p:cNvSpPr txBox="1"/>
-          <p:nvPr/>
-        </p:nvSpPr>
-        <p:spPr>
-          <a:xfrm>
-            <a:off x="1344168" y="4142232"/>
-            <a:ext cx="4334256" cy="658368"/>
-          </a:xfrm>
-          <a:prstGeom prst="rect">
-            <a:avLst/>
-          </a:prstGeom>
-          <a:noFill/>
-          <a:ln/>
-        </p:spPr>
-        <p:txBody>
-          <a:bodyPr wrap="square" lIns="0" tIns="0" rIns="0" bIns="0" rtlCol="0" anchor="ctr"/>
-          <a:lstStyle/>
-          <a:p>
-            <a:pPr marL="0" indent="0">
-              <a:buNone/>
-            </a:pPr>
-            <a:r>
-              <a:rPr lang="en-US" sz="1300" dirty="0">
-                <a:solidFill>
-                  <a:srgbClr val="1B2430"/>
-                </a:solidFill>
-                <a:latin typeface="Calibri" pitchFamily="34" charset="0"/>
-                <a:ea typeface="Calibri" pitchFamily="34" charset="-122"/>
-                <a:cs typeface="Calibri" pitchFamily="34" charset="-120"/>
-              </a:rPr>
-              <a:t>Carga del historial de presupuestos viejos — el sistema arranca vacío</a:t>
-            </a:r>
-            <a:endParaRPr lang="en-US" sz="1300" dirty="0"/>
-          </a:p>
-        </p:txBody>
-      </p:sp>
-      <p:sp>
-        <p:nvSpPr>
-          <p:cNvPr id="32" name="Shape 30"/>
-          <p:cNvSpPr/>
-          <p:nvPr/>
-        </p:nvSpPr>
-        <p:spPr>
-          <a:xfrm>
-            <a:off x="685800" y="5257800"/>
-            <a:ext cx="10820095" cy="777240"/>
-          </a:xfrm>
-          <a:prstGeom prst="roundRect">
-            <a:avLst>
-              <a:gd name="adj" fmla="val 9412"/>
-            </a:avLst>
-          </a:prstGeom>
-          <a:solidFill>
-            <a:srgbClr val="1F2C3A"/>
-          </a:solidFill>
-          <a:ln w="12700">
-            <a:solidFill>
-              <a:srgbClr val="1F2C3A"/>
-            </a:solidFill>
-            <a:prstDash val="solid"/>
-          </a:ln>
-        </p:spPr>
-      </p:sp>
-      <p:sp>
-        <p:nvSpPr>
-          <p:cNvPr id="33" name="Text 31"/>
-          <p:cNvSpPr txBox="1"/>
-          <p:nvPr/>
-        </p:nvSpPr>
-        <p:spPr>
-          <a:xfrm>
-            <a:off x="1097280" y="5257800"/>
-            <a:ext cx="9997135" cy="777240"/>
-          </a:xfrm>
-          <a:prstGeom prst="rect">
-            <a:avLst/>
-          </a:prstGeom>
-          <a:noFill/>
-          <a:ln/>
-        </p:spPr>
-        <p:txBody>
-          <a:bodyPr wrap="square" lIns="0" tIns="0" rIns="0" bIns="0" rtlCol="0" anchor="ctr"/>
-          <a:lstStyle/>
-          <a:p>
-            <a:pPr marL="0" indent="0">
-              <a:buNone/>
-            </a:pPr>
-            <a:r>
-              <a:rPr lang="en-US" sz="1450" b="1" dirty="0">
-                <a:solidFill>
-                  <a:srgbClr val="FFFFFF"/>
-                </a:solidFill>
-                <a:latin typeface="Calibri" pitchFamily="34" charset="0"/>
-                <a:ea typeface="Calibri" pitchFamily="34" charset="-122"/>
-                <a:cs typeface="Calibri" pitchFamily="34" charset="-120"/>
-              </a:rPr>
-              <a:t>Nada de esto está descartado para más adelante — solo no es parte de estos dos meses.</a:t>
-            </a:r>
-            <a:endParaRPr lang="en-US" sz="1450" dirty="0"/>
-          </a:p>
-        </p:txBody>
-      </p:sp>
-    </p:spTree>
-  </p:cSld>
-  <p:clrMapOvr>
-    <a:masterClrMapping/>
-  </p:clrMapOvr>
-  <p:transition spd="med">
-    <p:fade/>
-  </p:transition>
-  <p:timing>
-    <p:tnLst>
-      <p:par>
-        <p:cTn id="1" dur="indefinite" restart="never" nodeType="tmRoot">
-          <p:childTnLst>
-            <p:seq concurrent="1" nextAc="seek">
-              <p:cTn id="2" dur="indefinite" nodeType="mainSeq">
-                <p:childTnLst>
-                  <p:par>
-                    <p:cTn id="3" fill="hold">
-                      <p:stCondLst>
-                        <p:cond delay="0"/>
-                      </p:stCondLst>
-                      <p:childTnLst>
-                        <p:par>
-                          <p:cTn id="4" fill="hold">
-                            <p:stCondLst>
-                              <p:cond delay="0"/>
-                            </p:stCondLst>
-                            <p:childTnLst>
-                              <p:par>
-                                <p:cTn id="5" presetID="10" presetClass="entr" presetSubtype="0" fill="hold" grpId="0" nodeType="afterEffect">
-                                  <p:stCondLst>
-                                    <p:cond delay="0"/>
-                                  </p:stCondLst>
-                                  <p:childTnLst>
-                                    <p:set>
-                                      <p:cBhvr>
-                                        <p:cTn id="6" dur="1" fill="hold">
-                                          <p:stCondLst>
-                                            <p:cond delay="0"/>
-                                          </p:stCondLst>
-                                        </p:cTn>
-                                        <p:tgtEl>
-                                          <p:spTgt spid="2"/>
-                                        </p:tgtEl>
-                                        <p:attrNameLst>
-                                          <p:attrName>style.visibility</p:attrName>
-                                        </p:attrNameLst>
-                                      </p:cBhvr>
-                                      <p:to>
-                                        <p:strVal val="visible"/>
-                                      </p:to>
-                                    </p:set>
-                                    <p:animEffect transition="in" filter="fade">
-                                      <p:cBhvr>
-                                        <p:cTn id="7" dur="450"/>
-                                        <p:tgtEl>
-                                          <p:spTgt spid="2"/>
-                                        </p:tgtEl>
-                                      </p:cBhvr>
-                                    </p:animEffect>
-                                  </p:childTnLst>
-                                </p:cTn>
-                              </p:par>
-                              <p:par>
-                                <p:cTn id="8" presetID="10" presetClass="entr" presetSubtype="0" fill="hold" grpId="0" nodeType="afterEffect">
-                                  <p:stCondLst>
-                                    <p:cond delay="70"/>
-                                  </p:stCondLst>
-                                  <p:childTnLst>
-                                    <p:set>
-                                      <p:cBhvr>
-                                        <p:cTn id="9" dur="1" fill="hold">
-                                          <p:stCondLst>
-                                            <p:cond delay="0"/>
-                                          </p:stCondLst>
-                                        </p:cTn>
-                                        <p:tgtEl>
-                                          <p:spTgt spid="3"/>
-                                        </p:tgtEl>
-                                        <p:attrNameLst>
-                                          <p:attrName>style.visibility</p:attrName>
-                                        </p:attrNameLst>
-                                      </p:cBhvr>
-                                      <p:to>
-                                        <p:strVal val="visible"/>
-                                      </p:to>
-                                    </p:set>
-                                    <p:animEffect transition="in" filter="fade">
-                                      <p:cBhvr>
-                                        <p:cTn id="10" dur="450"/>
-                                        <p:tgtEl>
-                                          <p:spTgt spid="3"/>
-                                        </p:tgtEl>
-                                      </p:cBhvr>
-                                    </p:animEffect>
-                                  </p:childTnLst>
-                                </p:cTn>
-                              </p:par>
-                              <p:par>
-                                <p:cTn id="11" presetID="10" presetClass="entr" presetSubtype="0" fill="hold" grpId="0" nodeType="afterEffect">
-                                  <p:stCondLst>
-                                    <p:cond delay="140"/>
-                                  </p:stCondLst>
-                                  <p:childTnLst>
-                                    <p:set>
-                                      <p:cBhvr>
-                                        <p:cTn id="12" dur="1" fill="hold">
-                                          <p:stCondLst>
-                                            <p:cond delay="0"/>
-                                          </p:stCondLst>
-                                        </p:cTn>
-                                        <p:tgtEl>
-                                          <p:spTgt spid="4"/>
-                                        </p:tgtEl>
-                                        <p:attrNameLst>
-                                          <p:attrName>style.visibility</p:attrName>
-                                        </p:attrNameLst>
-                                      </p:cBhvr>
-                                      <p:to>
-                                        <p:strVal val="visible"/>
-                                      </p:to>
-                                    </p:set>
-                                    <p:animEffect transition="in" filter="fade">
-                                      <p:cBhvr>
-                                        <p:cTn id="13" dur="450"/>
-                                        <p:tgtEl>
-                                          <p:spTgt spid="4"/>
-                                        </p:tgtEl>
-                                      </p:cBhvr>
-                                    </p:animEffect>
-                                  </p:childTnLst>
-                                </p:cTn>
-                              </p:par>
-                              <p:par>
-                                <p:cTn id="14" presetID="10" presetClass="entr" presetSubtype="0" fill="hold" grpId="0" nodeType="afterEffect">
-                                  <p:stCondLst>
-                                    <p:cond delay="210"/>
-                                  </p:stCondLst>
-                                  <p:childTnLst>
-                                    <p:set>
-                                      <p:cBhvr>
-                                        <p:cTn id="15" dur="1" fill="hold">
-                                          <p:stCondLst>
-                                            <p:cond delay="0"/>
-                                          </p:stCondLst>
-                                        </p:cTn>
-                                        <p:tgtEl>
-                                          <p:spTgt spid="5"/>
-                                        </p:tgtEl>
-                                        <p:attrNameLst>
-                                          <p:attrName>style.visibility</p:attrName>
-                                        </p:attrNameLst>
-                                      </p:cBhvr>
-                                      <p:to>
-                                        <p:strVal val="visible"/>
-                                      </p:to>
-                                    </p:set>
-                                    <p:animEffect transition="in" filter="fade">
-                                      <p:cBhvr>
-                                        <p:cTn id="16" dur="450"/>
-                                        <p:tgtEl>
-                                          <p:spTgt spid="5"/>
-                                        </p:tgtEl>
-                                      </p:cBhvr>
-                                    </p:animEffect>
-                                  </p:childTnLst>
-                                </p:cTn>
-                              </p:par>
-                              <p:par>
-                                <p:cTn id="17" presetID="10" presetClass="entr" presetSubtype="0" fill="hold" grpId="0" nodeType="afterEffect">
-                                  <p:stCondLst>
-                                    <p:cond delay="280"/>
-                                  </p:stCondLst>
-                                  <p:childTnLst>
-                                    <p:set>
-                                      <p:cBhvr>
-                                        <p:cTn id="18" dur="1" fill="hold">
-                                          <p:stCondLst>
-                                            <p:cond delay="0"/>
-                                          </p:stCondLst>
-                                        </p:cTn>
-                                        <p:tgtEl>
-                                          <p:spTgt spid="6"/>
-                                        </p:tgtEl>
-                                        <p:attrNameLst>
-                                          <p:attrName>style.visibility</p:attrName>
-                                        </p:attrNameLst>
-                                      </p:cBhvr>
-                                      <p:to>
-                                        <p:strVal val="visible"/>
-                                      </p:to>
-                                    </p:set>
-                                    <p:animEffect transition="in" filter="fade">
-                                      <p:cBhvr>
-                                        <p:cTn id="19" dur="450"/>
-                                        <p:tgtEl>
-                                          <p:spTgt spid="6"/>
-                                        </p:tgtEl>
-                                      </p:cBhvr>
-                                    </p:animEffect>
-                                  </p:childTnLst>
-                                </p:cTn>
-                              </p:par>
-                              <p:par>
-                                <p:cTn id="20" presetID="10" presetClass="entr" presetSubtype="0" fill="hold" grpId="0" nodeType="afterEffect">
-                                  <p:stCondLst>
-                                    <p:cond delay="350"/>
-                                  </p:stCondLst>
-                                  <p:childTnLst>
-                                    <p:set>
-                                      <p:cBhvr>
-                                        <p:cTn id="21" dur="1" fill="hold">
-                                          <p:stCondLst>
-                                            <p:cond delay="0"/>
-                                          </p:stCondLst>
-                                        </p:cTn>
-                                        <p:tgtEl>
-                                          <p:spTgt spid="7"/>
-                                        </p:tgtEl>
-                                        <p:attrNameLst>
-                                          <p:attrName>style.visibility</p:attrName>
-                                        </p:attrNameLst>
-                                      </p:cBhvr>
-                                      <p:to>
-                                        <p:strVal val="visible"/>
-                                      </p:to>
-                                    </p:set>
-                                    <p:animEffect transition="in" filter="fade">
-                                      <p:cBhvr>
-                                        <p:cTn id="22" dur="450"/>
-                                        <p:tgtEl>
-                                          <p:spTgt spid="7"/>
-                                        </p:tgtEl>
-                                      </p:cBhvr>
-                                    </p:animEffect>
-                                  </p:childTnLst>
-                                </p:cTn>
-                              </p:par>
-                              <p:par>
-                                <p:cTn id="23" presetID="10" presetClass="entr" presetSubtype="0" fill="hold" grpId="0" nodeType="afterEffect">
-                                  <p:stCondLst>
-                                    <p:cond delay="420"/>
-                                  </p:stCondLst>
-                                  <p:childTnLst>
-                                    <p:set>
-                                      <p:cBhvr>
-                                        <p:cTn id="24" dur="1" fill="hold">
-                                          <p:stCondLst>
-                                            <p:cond delay="0"/>
-                                          </p:stCondLst>
-                                        </p:cTn>
-                                        <p:tgtEl>
-                                          <p:spTgt spid="8"/>
-                                        </p:tgtEl>
-                                        <p:attrNameLst>
-                                          <p:attrName>style.visibility</p:attrName>
-                                        </p:attrNameLst>
-                                      </p:cBhvr>
-                                      <p:to>
-                                        <p:strVal val="visible"/>
-                                      </p:to>
-                                    </p:set>
-                                    <p:animEffect transition="in" filter="fade">
-                                      <p:cBhvr>
-                                        <p:cTn id="25" dur="450"/>
-                                        <p:tgtEl>
-                                          <p:spTgt spid="8"/>
-                                        </p:tgtEl>
-                                      </p:cBhvr>
-                                    </p:animEffect>
-                                  </p:childTnLst>
-                                </p:cTn>
-                              </p:par>
-                              <p:par>
-                                <p:cTn id="26" presetID="10" presetClass="entr" presetSubtype="0" fill="hold" grpId="0" nodeType="afterEffect">
-                                  <p:stCondLst>
-                                    <p:cond delay="490"/>
-                                  </p:stCondLst>
-                                  <p:childTnLst>
-                                    <p:set>
-                                      <p:cBhvr>
-                                        <p:cTn id="27" dur="1" fill="hold">
-                                          <p:stCondLst>
-                                            <p:cond delay="0"/>
-                                          </p:stCondLst>
-                                        </p:cTn>
-                                        <p:tgtEl>
-                                          <p:spTgt spid="9"/>
-                                        </p:tgtEl>
-                                        <p:attrNameLst>
-                                          <p:attrName>style.visibility</p:attrName>
-                                        </p:attrNameLst>
-                                      </p:cBhvr>
-                                      <p:to>
-                                        <p:strVal val="visible"/>
-                                      </p:to>
-                                    </p:set>
-                                    <p:animEffect transition="in" filter="fade">
-                                      <p:cBhvr>
-                                        <p:cTn id="28" dur="450"/>
-                                        <p:tgtEl>
-                                          <p:spTgt spid="9"/>
-                                        </p:tgtEl>
-                                      </p:cBhvr>
-                                    </p:animEffect>
-                                  </p:childTnLst>
-                                </p:cTn>
-                              </p:par>
-                              <p:par>
-                                <p:cTn id="29" presetID="10" presetClass="entr" presetSubtype="0" fill="hold" grpId="0" nodeType="afterEffect">
-                                  <p:stCondLst>
-                                    <p:cond delay="560"/>
-                                  </p:stCondLst>
-                                  <p:childTnLst>
-                                    <p:set>
-                                      <p:cBhvr>
-                                        <p:cTn id="30" dur="1" fill="hold">
-                                          <p:stCondLst>
-                                            <p:cond delay="0"/>
-                                          </p:stCondLst>
-                                        </p:cTn>
-                                        <p:tgtEl>
-                                          <p:spTgt spid="10"/>
-                                        </p:tgtEl>
-                                        <p:attrNameLst>
-                                          <p:attrName>style.visibility</p:attrName>
-                                        </p:attrNameLst>
-                                      </p:cBhvr>
-                                      <p:to>
-                                        <p:strVal val="visible"/>
-                                      </p:to>
-                                    </p:set>
-                                    <p:animEffect transition="in" filter="fade">
-                                      <p:cBhvr>
-                                        <p:cTn id="31" dur="450"/>
-                                        <p:tgtEl>
-                                          <p:spTgt spid="10"/>
-                                        </p:tgtEl>
-                                      </p:cBhvr>
-                                    </p:animEffect>
-                                  </p:childTnLst>
-                                </p:cTn>
-                              </p:par>
-                              <p:par>
-                                <p:cTn id="32" presetID="10" presetClass="entr" presetSubtype="0" fill="hold" grpId="0" nodeType="afterEffect">
-                                  <p:stCondLst>
-                                    <p:cond delay="630"/>
-                                  </p:stCondLst>
-                                  <p:childTnLst>
-                                    <p:set>
-                                      <p:cBhvr>
-                                        <p:cTn id="33" dur="1" fill="hold">
-                                          <p:stCondLst>
-                                            <p:cond delay="0"/>
-                                          </p:stCondLst>
-                                        </p:cTn>
-                                        <p:tgtEl>
-                                          <p:spTgt spid="11"/>
-                                        </p:tgtEl>
-                                        <p:attrNameLst>
-                                          <p:attrName>style.visibility</p:attrName>
-                                        </p:attrNameLst>
-                                      </p:cBhvr>
-                                      <p:to>
-                                        <p:strVal val="visible"/>
-                                      </p:to>
-                                    </p:set>
-                                    <p:animEffect transition="in" filter="fade">
-                                      <p:cBhvr>
-                                        <p:cTn id="34" dur="450"/>
-                                        <p:tgtEl>
-                                          <p:spTgt spid="11"/>
-                                        </p:tgtEl>
-                                      </p:cBhvr>
-                                    </p:animEffect>
-                                  </p:childTnLst>
-                                </p:cTn>
-                              </p:par>
-                              <p:par>
-                                <p:cTn id="35" presetID="10" presetClass="entr" presetSubtype="0" fill="hold" grpId="0" nodeType="afterEffect">
-                                  <p:stCondLst>
-                                    <p:cond delay="700"/>
-                                  </p:stCondLst>
-                                  <p:childTnLst>
-                                    <p:set>
-                                      <p:cBhvr>
-                                        <p:cTn id="36" dur="1" fill="hold">
-                                          <p:stCondLst>
-                                            <p:cond delay="0"/>
-                                          </p:stCondLst>
-                                        </p:cTn>
-                                        <p:tgtEl>
-                                          <p:spTgt spid="12"/>
-                                        </p:tgtEl>
-                                        <p:attrNameLst>
-                                          <p:attrName>style.visibility</p:attrName>
-                                        </p:attrNameLst>
-                                      </p:cBhvr>
-                                      <p:to>
-                                        <p:strVal val="visible"/>
-                                      </p:to>
-                                    </p:set>
-                                    <p:animEffect transition="in" filter="fade">
-                                      <p:cBhvr>
-                                        <p:cTn id="37" dur="450"/>
-                                        <p:tgtEl>
-                                          <p:spTgt spid="12"/>
-                                        </p:tgtEl>
-                                      </p:cBhvr>
-                                    </p:animEffect>
-                                  </p:childTnLst>
-                                </p:cTn>
-                              </p:par>
-                              <p:par>
-                                <p:cTn id="38" presetID="10" presetClass="entr" presetSubtype="0" fill="hold" grpId="0" nodeType="afterEffect">
-                                  <p:stCondLst>
-                                    <p:cond delay="770"/>
-                                  </p:stCondLst>
-                                  <p:childTnLst>
-                                    <p:set>
-                                      <p:cBhvr>
-                                        <p:cTn id="39" dur="1" fill="hold">
-                                          <p:stCondLst>
-                                            <p:cond delay="0"/>
-                                          </p:stCondLst>
-                                        </p:cTn>
-                                        <p:tgtEl>
-                                          <p:spTgt spid="13"/>
-                                        </p:tgtEl>
-                                        <p:attrNameLst>
-                                          <p:attrName>style.visibility</p:attrName>
-                                        </p:attrNameLst>
-                                      </p:cBhvr>
-                                      <p:to>
-                                        <p:strVal val="visible"/>
-                                      </p:to>
-                                    </p:set>
-                                    <p:animEffect transition="in" filter="fade">
-                                      <p:cBhvr>
-                                        <p:cTn id="40" dur="450"/>
-                                        <p:tgtEl>
-                                          <p:spTgt spid="13"/>
-                                        </p:tgtEl>
-                                      </p:cBhvr>
-                                    </p:animEffect>
-                                  </p:childTnLst>
-                                </p:cTn>
-                              </p:par>
-                              <p:par>
-                                <p:cTn id="41" presetID="10" presetClass="entr" presetSubtype="0" fill="hold" grpId="0" nodeType="afterEffect">
-                                  <p:stCondLst>
-                                    <p:cond delay="840"/>
-                                  </p:stCondLst>
-                                  <p:childTnLst>
-                                    <p:set>
-                                      <p:cBhvr>
-                                        <p:cTn id="42" dur="1" fill="hold">
-                                          <p:stCondLst>
-                                            <p:cond delay="0"/>
-                                          </p:stCondLst>
-                                        </p:cTn>
-                                        <p:tgtEl>
-                                          <p:spTgt spid="14"/>
-                                        </p:tgtEl>
-                                        <p:attrNameLst>
-                                          <p:attrName>style.visibility</p:attrName>
-                                        </p:attrNameLst>
-                                      </p:cBhvr>
-                                      <p:to>
-                                        <p:strVal val="visible"/>
-                                      </p:to>
-                                    </p:set>
-                                    <p:animEffect transition="in" filter="fade">
-                                      <p:cBhvr>
-                                        <p:cTn id="43" dur="450"/>
-                                        <p:tgtEl>
-                                          <p:spTgt spid="14"/>
-                                        </p:tgtEl>
-                                      </p:cBhvr>
-                                    </p:animEffect>
-                                  </p:childTnLst>
-                                </p:cTn>
-                              </p:par>
-                              <p:par>
-                                <p:cTn id="44" presetID="10" presetClass="entr" presetSubtype="0" fill="hold" grpId="0" nodeType="afterEffect">
-                                  <p:stCondLst>
-                                    <p:cond delay="910"/>
-                                  </p:stCondLst>
-                                  <p:childTnLst>
-                                    <p:set>
-                                      <p:cBhvr>
-                                        <p:cTn id="45" dur="1" fill="hold">
-                                          <p:stCondLst>
-                                            <p:cond delay="0"/>
-                                          </p:stCondLst>
-                                        </p:cTn>
-                                        <p:tgtEl>
-                                          <p:spTgt spid="15"/>
-                                        </p:tgtEl>
-                                        <p:attrNameLst>
-                                          <p:attrName>style.visibility</p:attrName>
-                                        </p:attrNameLst>
-                                      </p:cBhvr>
-                                      <p:to>
-                                        <p:strVal val="visible"/>
-                                      </p:to>
-                                    </p:set>
-                                    <p:animEffect transition="in" filter="fade">
-                                      <p:cBhvr>
-                                        <p:cTn id="46" dur="450"/>
-                                        <p:tgtEl>
-                                          <p:spTgt spid="15"/>
-                                        </p:tgtEl>
-                                      </p:cBhvr>
-                                    </p:animEffect>
-                                  </p:childTnLst>
-                                </p:cTn>
-                              </p:par>
-                              <p:par>
-                                <p:cTn id="47" presetID="10" presetClass="entr" presetSubtype="0" fill="hold" grpId="0" nodeType="afterEffect">
-                                  <p:stCondLst>
-                                    <p:cond delay="980"/>
-                                  </p:stCondLst>
-                                  <p:childTnLst>
-                                    <p:set>
-                                      <p:cBhvr>
-                                        <p:cTn id="48" dur="1" fill="hold">
-                                          <p:stCondLst>
-                                            <p:cond delay="0"/>
-                                          </p:stCondLst>
-                                        </p:cTn>
-                                        <p:tgtEl>
-                                          <p:spTgt spid="16"/>
-                                        </p:tgtEl>
-                                        <p:attrNameLst>
-                                          <p:attrName>style.visibility</p:attrName>
-                                        </p:attrNameLst>
-                                      </p:cBhvr>
-                                      <p:to>
-                                        <p:strVal val="visible"/>
-                                      </p:to>
-                                    </p:set>
-                                    <p:animEffect transition="in" filter="fade">
-                                      <p:cBhvr>
-                                        <p:cTn id="49" dur="450"/>
-                                        <p:tgtEl>
-                                          <p:spTgt spid="16"/>
-                                        </p:tgtEl>
-                                      </p:cBhvr>
-                                    </p:animEffect>
-                                  </p:childTnLst>
-                                </p:cTn>
-                              </p:par>
-                              <p:par>
-                                <p:cTn id="50" presetID="10" presetClass="entr" presetSubtype="0" fill="hold" grpId="0" nodeType="afterEffect">
-                                  <p:stCondLst>
-                                    <p:cond delay="1050"/>
-                                  </p:stCondLst>
-                                  <p:childTnLst>
-                                    <p:set>
-                                      <p:cBhvr>
-                                        <p:cTn id="51" dur="1" fill="hold">
-                                          <p:stCondLst>
-                                            <p:cond delay="0"/>
-                                          </p:stCondLst>
-                                        </p:cTn>
-                                        <p:tgtEl>
-                                          <p:spTgt spid="17"/>
-                                        </p:tgtEl>
-                                        <p:attrNameLst>
-                                          <p:attrName>style.visibility</p:attrName>
-                                        </p:attrNameLst>
-                                      </p:cBhvr>
-                                      <p:to>
-                                        <p:strVal val="visible"/>
-                                      </p:to>
-                                    </p:set>
-                                    <p:animEffect transition="in" filter="fade">
-                                      <p:cBhvr>
-                                        <p:cTn id="52" dur="450"/>
-                                        <p:tgtEl>
-                                          <p:spTgt spid="17"/>
-                                        </p:tgtEl>
-                                      </p:cBhvr>
-                                    </p:animEffect>
-                                  </p:childTnLst>
-                                </p:cTn>
-                              </p:par>
-                              <p:par>
-                                <p:cTn id="53" presetID="10" presetClass="entr" presetSubtype="0" fill="hold" grpId="0" nodeType="afterEffect">
-                                  <p:stCondLst>
-                                    <p:cond delay="1120"/>
-                                  </p:stCondLst>
-                                  <p:childTnLst>
-                                    <p:set>
-                                      <p:cBhvr>
-                                        <p:cTn id="54" dur="1" fill="hold">
-                                          <p:stCondLst>
-                                            <p:cond delay="0"/>
-                                          </p:stCondLst>
-                                        </p:cTn>
-                                        <p:tgtEl>
-                                          <p:spTgt spid="18"/>
-                                        </p:tgtEl>
-                                        <p:attrNameLst>
-                                          <p:attrName>style.visibility</p:attrName>
-                                        </p:attrNameLst>
-                                      </p:cBhvr>
-                                      <p:to>
-                                        <p:strVal val="visible"/>
-                                      </p:to>
-                                    </p:set>
-                                    <p:animEffect transition="in" filter="fade">
-                                      <p:cBhvr>
-                                        <p:cTn id="55" dur="450"/>
-                                        <p:tgtEl>
-                                          <p:spTgt spid="18"/>
-                                        </p:tgtEl>
-                                      </p:cBhvr>
-                                    </p:animEffect>
-                                  </p:childTnLst>
-                                </p:cTn>
-                              </p:par>
-                              <p:par>
-                                <p:cTn id="56" presetID="10" presetClass="entr" presetSubtype="0" fill="hold" grpId="0" nodeType="afterEffect">
-                                  <p:stCondLst>
-                                    <p:cond delay="1190"/>
-                                  </p:stCondLst>
-                                  <p:childTnLst>
-                                    <p:set>
-                                      <p:cBhvr>
-                                        <p:cTn id="57" dur="1" fill="hold">
-                                          <p:stCondLst>
-                                            <p:cond delay="0"/>
-                                          </p:stCondLst>
-                                        </p:cTn>
-                                        <p:tgtEl>
-                                          <p:spTgt spid="19"/>
-                                        </p:tgtEl>
-                                        <p:attrNameLst>
-                                          <p:attrName>style.visibility</p:attrName>
-                                        </p:attrNameLst>
-                                      </p:cBhvr>
-                                      <p:to>
-                                        <p:strVal val="visible"/>
-                                      </p:to>
-                                    </p:set>
-                                    <p:animEffect transition="in" filter="fade">
-                                      <p:cBhvr>
-                                        <p:cTn id="58" dur="450"/>
-                                        <p:tgtEl>
-                                          <p:spTgt spid="19"/>
-                                        </p:tgtEl>
-                                      </p:cBhvr>
-                                    </p:animEffect>
-                                  </p:childTnLst>
-                                </p:cTn>
-                              </p:par>
-                              <p:par>
-                                <p:cTn id="59" presetID="10" presetClass="entr" presetSubtype="0" fill="hold" grpId="0" nodeType="afterEffect">
-                                  <p:stCondLst>
-                                    <p:cond delay="1260"/>
-                                  </p:stCondLst>
-                                  <p:childTnLst>
-                                    <p:set>
-                                      <p:cBhvr>
-                                        <p:cTn id="60" dur="1" fill="hold">
-                                          <p:stCondLst>
-                                            <p:cond delay="0"/>
-                                          </p:stCondLst>
-                                        </p:cTn>
-                                        <p:tgtEl>
-                                          <p:spTgt spid="20"/>
-                                        </p:tgtEl>
-                                        <p:attrNameLst>
-                                          <p:attrName>style.visibility</p:attrName>
-                                        </p:attrNameLst>
-                                      </p:cBhvr>
-                                      <p:to>
-                                        <p:strVal val="visible"/>
-                                      </p:to>
-                                    </p:set>
-                                    <p:animEffect transition="in" filter="fade">
-                                      <p:cBhvr>
-                                        <p:cTn id="61" dur="450"/>
-                                        <p:tgtEl>
-                                          <p:spTgt spid="20"/>
-                                        </p:tgtEl>
-                                      </p:cBhvr>
-                                    </p:animEffect>
-                                  </p:childTnLst>
-                                </p:cTn>
-                              </p:par>
-                              <p:par>
-                                <p:cTn id="62" presetID="10" presetClass="entr" presetSubtype="0" fill="hold" grpId="0" nodeType="afterEffect">
-                                  <p:stCondLst>
-                                    <p:cond delay="1300"/>
-                                  </p:stCondLst>
-                                  <p:childTnLst>
-                                    <p:set>
-                                      <p:cBhvr>
-                                        <p:cTn id="63" dur="1" fill="hold">
-                                          <p:stCondLst>
-                                            <p:cond delay="0"/>
-                                          </p:stCondLst>
-                                        </p:cTn>
-                                        <p:tgtEl>
-                                          <p:spTgt spid="21"/>
-                                        </p:tgtEl>
-                                        <p:attrNameLst>
-                                          <p:attrName>style.visibility</p:attrName>
-                                        </p:attrNameLst>
-                                      </p:cBhvr>
-                                      <p:to>
-                                        <p:strVal val="visible"/>
-                                      </p:to>
-                                    </p:set>
-                                    <p:animEffect transition="in" filter="fade">
-                                      <p:cBhvr>
-                                        <p:cTn id="64" dur="450"/>
-                                        <p:tgtEl>
-                                          <p:spTgt spid="21"/>
-                                        </p:tgtEl>
-                                      </p:cBhvr>
-                                    </p:animEffect>
-                                  </p:childTnLst>
-                                </p:cTn>
-                              </p:par>
-                              <p:par>
-                                <p:cTn id="65" presetID="10" presetClass="entr" presetSubtype="0" fill="hold" grpId="0" nodeType="afterEffect">
-                                  <p:stCondLst>
-                                    <p:cond delay="1300"/>
-                                  </p:stCondLst>
-                                  <p:childTnLst>
-                                    <p:set>
-                                      <p:cBhvr>
-                                        <p:cTn id="66" dur="1" fill="hold">
-                                          <p:stCondLst>
-                                            <p:cond delay="0"/>
-                                          </p:stCondLst>
-                                        </p:cTn>
-                                        <p:tgtEl>
-                                          <p:spTgt spid="22"/>
-                                        </p:tgtEl>
-                                        <p:attrNameLst>
-                                          <p:attrName>style.visibility</p:attrName>
-                                        </p:attrNameLst>
-                                      </p:cBhvr>
-                                      <p:to>
-                                        <p:strVal val="visible"/>
-                                      </p:to>
-                                    </p:set>
-                                    <p:animEffect transition="in" filter="fade">
-                                      <p:cBhvr>
-                                        <p:cTn id="67" dur="450"/>
-                                        <p:tgtEl>
-                                          <p:spTgt spid="22"/>
-                                        </p:tgtEl>
-                                      </p:cBhvr>
-                                    </p:animEffect>
-                                  </p:childTnLst>
-                                </p:cTn>
-                              </p:par>
-                              <p:par>
-                                <p:cTn id="68" presetID="10" presetClass="entr" presetSubtype="0" fill="hold" grpId="0" nodeType="afterEffect">
-                                  <p:stCondLst>
-                                    <p:cond delay="1300"/>
-                                  </p:stCondLst>
-                                  <p:childTnLst>
-                                    <p:set>
-                                      <p:cBhvr>
-                                        <p:cTn id="69" dur="1" fill="hold">
-                                          <p:stCondLst>
-                                            <p:cond delay="0"/>
-                                          </p:stCondLst>
-                                        </p:cTn>
-                                        <p:tgtEl>
-                                          <p:spTgt spid="23"/>
-                                        </p:tgtEl>
-                                        <p:attrNameLst>
-                                          <p:attrName>style.visibility</p:attrName>
-                                        </p:attrNameLst>
-                                      </p:cBhvr>
-                                      <p:to>
-                                        <p:strVal val="visible"/>
-                                      </p:to>
-                                    </p:set>
-                                    <p:animEffect transition="in" filter="fade">
-                                      <p:cBhvr>
-                                        <p:cTn id="70" dur="450"/>
-                                        <p:tgtEl>
-                                          <p:spTgt spid="23"/>
-                                        </p:tgtEl>
-                                      </p:cBhvr>
-                                    </p:animEffect>
-                                  </p:childTnLst>
-                                </p:cTn>
-                              </p:par>
-                              <p:par>
-                                <p:cTn id="71" presetID="10" presetClass="entr" presetSubtype="0" fill="hold" grpId="0" nodeType="afterEffect">
-                                  <p:stCondLst>
-                                    <p:cond delay="1300"/>
-                                  </p:stCondLst>
-                                  <p:childTnLst>
-                                    <p:set>
-                                      <p:cBhvr>
-                                        <p:cTn id="72" dur="1" fill="hold">
-                                          <p:stCondLst>
-                                            <p:cond delay="0"/>
-                                          </p:stCondLst>
-                                        </p:cTn>
-                                        <p:tgtEl>
-                                          <p:spTgt spid="24"/>
-                                        </p:tgtEl>
-                                        <p:attrNameLst>
-                                          <p:attrName>style.visibility</p:attrName>
-                                        </p:attrNameLst>
-                                      </p:cBhvr>
-                                      <p:to>
-                                        <p:strVal val="visible"/>
-                                      </p:to>
-                                    </p:set>
-                                    <p:animEffect transition="in" filter="fade">
-                                      <p:cBhvr>
-                                        <p:cTn id="73" dur="450"/>
-                                        <p:tgtEl>
-                                          <p:spTgt spid="24"/>
-                                        </p:tgtEl>
-                                      </p:cBhvr>
-                                    </p:animEffect>
-                                  </p:childTnLst>
-                                </p:cTn>
-                              </p:par>
-                              <p:par>
-                                <p:cTn id="74" presetID="10" presetClass="entr" presetSubtype="0" fill="hold" grpId="0" nodeType="afterEffect">
-                                  <p:stCondLst>
-                                    <p:cond delay="1300"/>
-                                  </p:stCondLst>
-                                  <p:childTnLst>
-                                    <p:set>
-                                      <p:cBhvr>
-                                        <p:cTn id="75" dur="1" fill="hold">
-                                          <p:stCondLst>
-                                            <p:cond delay="0"/>
-                                          </p:stCondLst>
-                                        </p:cTn>
-                                        <p:tgtEl>
-                                          <p:spTgt spid="25"/>
-                                        </p:tgtEl>
-                                        <p:attrNameLst>
-                                          <p:attrName>style.visibility</p:attrName>
-                                        </p:attrNameLst>
-                                      </p:cBhvr>
-                                      <p:to>
-                                        <p:strVal val="visible"/>
-                                      </p:to>
-                                    </p:set>
-                                    <p:animEffect transition="in" filter="fade">
-                                      <p:cBhvr>
-                                        <p:cTn id="76" dur="450"/>
-                                        <p:tgtEl>
-                                          <p:spTgt spid="25"/>
-                                        </p:tgtEl>
-                                      </p:cBhvr>
-                                    </p:animEffect>
-                                  </p:childTnLst>
-                                </p:cTn>
-                              </p:par>
-                              <p:par>
-                                <p:cTn id="77" presetID="10" presetClass="entr" presetSubtype="0" fill="hold" grpId="0" nodeType="afterEffect">
-                                  <p:stCondLst>
-                                    <p:cond delay="1300"/>
-                                  </p:stCondLst>
-                                  <p:childTnLst>
-                                    <p:set>
-                                      <p:cBhvr>
-                                        <p:cTn id="78" dur="1" fill="hold">
-                                          <p:stCondLst>
-                                            <p:cond delay="0"/>
-                                          </p:stCondLst>
-                                        </p:cTn>
-                                        <p:tgtEl>
-                                          <p:spTgt spid="26"/>
-                                        </p:tgtEl>
-                                        <p:attrNameLst>
-                                          <p:attrName>style.visibility</p:attrName>
-                                        </p:attrNameLst>
-                                      </p:cBhvr>
-                                      <p:to>
-                                        <p:strVal val="visible"/>
-                                      </p:to>
-                                    </p:set>
-                                    <p:animEffect transition="in" filter="fade">
-                                      <p:cBhvr>
-                                        <p:cTn id="79" dur="450"/>
-                                        <p:tgtEl>
-                                          <p:spTgt spid="26"/>
-                                        </p:tgtEl>
-                                      </p:cBhvr>
-                                    </p:animEffect>
-                                  </p:childTnLst>
-                                </p:cTn>
-                              </p:par>
-                              <p:par>
-                                <p:cTn id="80" presetID="10" presetClass="entr" presetSubtype="0" fill="hold" grpId="0" nodeType="afterEffect">
-                                  <p:stCondLst>
-                                    <p:cond delay="1300"/>
-                                  </p:stCondLst>
-                                  <p:childTnLst>
-                                    <p:set>
-                                      <p:cBhvr>
-                                        <p:cTn id="81" dur="1" fill="hold">
-                                          <p:stCondLst>
-                                            <p:cond delay="0"/>
-                                          </p:stCondLst>
-                                        </p:cTn>
-                                        <p:tgtEl>
-                                          <p:spTgt spid="27"/>
-                                        </p:tgtEl>
-                                        <p:attrNameLst>
-                                          <p:attrName>style.visibility</p:attrName>
-                                        </p:attrNameLst>
-                                      </p:cBhvr>
-                                      <p:to>
-                                        <p:strVal val="visible"/>
-                                      </p:to>
-                                    </p:set>
-                                    <p:animEffect transition="in" filter="fade">
-                                      <p:cBhvr>
-                                        <p:cTn id="82" dur="450"/>
-                                        <p:tgtEl>
-                                          <p:spTgt spid="27"/>
-                                        </p:tgtEl>
-                                      </p:cBhvr>
-                                    </p:animEffect>
-                                  </p:childTnLst>
-                                </p:cTn>
-                              </p:par>
-                              <p:par>
-                                <p:cTn id="83" presetID="10" presetClass="entr" presetSubtype="0" fill="hold" grpId="0" nodeType="afterEffect">
-                                  <p:stCondLst>
-                                    <p:cond delay="1300"/>
-                                  </p:stCondLst>
-                                  <p:childTnLst>
-                                    <p:set>
-                                      <p:cBhvr>
-                                        <p:cTn id="84" dur="1" fill="hold">
-                                          <p:stCondLst>
-                                            <p:cond delay="0"/>
-                                          </p:stCondLst>
-                                        </p:cTn>
-                                        <p:tgtEl>
-                                          <p:spTgt spid="28"/>
-                                        </p:tgtEl>
-                                        <p:attrNameLst>
-                                          <p:attrName>style.visibility</p:attrName>
-                                        </p:attrNameLst>
-                                      </p:cBhvr>
-                                      <p:to>
-                                        <p:strVal val="visible"/>
-                                      </p:to>
-                                    </p:set>
-                                    <p:animEffect transition="in" filter="fade">
-                                      <p:cBhvr>
-                                        <p:cTn id="85" dur="450"/>
-                                        <p:tgtEl>
-                                          <p:spTgt spid="28"/>
-                                        </p:tgtEl>
-                                      </p:cBhvr>
-                                    </p:animEffect>
-                                  </p:childTnLst>
-                                </p:cTn>
-                              </p:par>
-                              <p:par>
-                                <p:cTn id="86" presetID="10" presetClass="entr" presetSubtype="0" fill="hold" grpId="0" nodeType="afterEffect">
-                                  <p:stCondLst>
-                                    <p:cond delay="1300"/>
-                                  </p:stCondLst>
-                                  <p:childTnLst>
-                                    <p:set>
-                                      <p:cBhvr>
-                                        <p:cTn id="87" dur="1" fill="hold">
-                                          <p:stCondLst>
-                                            <p:cond delay="0"/>
-                                          </p:stCondLst>
-                                        </p:cTn>
-                                        <p:tgtEl>
-                                          <p:spTgt spid="29"/>
-                                        </p:tgtEl>
-                                        <p:attrNameLst>
-                                          <p:attrName>style.visibility</p:attrName>
-                                        </p:attrNameLst>
-                                      </p:cBhvr>
-                                      <p:to>
-                                        <p:strVal val="visible"/>
-                                      </p:to>
-                                    </p:set>
-                                    <p:animEffect transition="in" filter="fade">
-                                      <p:cBhvr>
-                                        <p:cTn id="88" dur="450"/>
-                                        <p:tgtEl>
-                                          <p:spTgt spid="29"/>
-                                        </p:tgtEl>
-                                      </p:cBhvr>
-                                    </p:animEffect>
-                                  </p:childTnLst>
-                                </p:cTn>
-                              </p:par>
-                              <p:par>
-                                <p:cTn id="89" presetID="10" presetClass="entr" presetSubtype="0" fill="hold" grpId="0" nodeType="afterEffect">
-                                  <p:stCondLst>
-                                    <p:cond delay="1300"/>
-                                  </p:stCondLst>
-                                  <p:childTnLst>
-                                    <p:set>
-                                      <p:cBhvr>
-                                        <p:cTn id="90" dur="1" fill="hold">
-                                          <p:stCondLst>
-                                            <p:cond delay="0"/>
-                                          </p:stCondLst>
-                                        </p:cTn>
-                                        <p:tgtEl>
-                                          <p:spTgt spid="30"/>
-                                        </p:tgtEl>
-                                        <p:attrNameLst>
-                                          <p:attrName>style.visibility</p:attrName>
-                                        </p:attrNameLst>
-                                      </p:cBhvr>
-                                      <p:to>
-                                        <p:strVal val="visible"/>
-                                      </p:to>
-                                    </p:set>
-                                    <p:animEffect transition="in" filter="fade">
-                                      <p:cBhvr>
-                                        <p:cTn id="91" dur="450"/>
-                                        <p:tgtEl>
-                                          <p:spTgt spid="30"/>
-                                        </p:tgtEl>
-                                      </p:cBhvr>
-                                    </p:animEffect>
-                                  </p:childTnLst>
-                                </p:cTn>
-                              </p:par>
-                              <p:par>
-                                <p:cTn id="92" presetID="10" presetClass="entr" presetSubtype="0" fill="hold" grpId="0" nodeType="afterEffect">
-                                  <p:stCondLst>
-                                    <p:cond delay="1300"/>
-                                  </p:stCondLst>
-                                  <p:childTnLst>
-                                    <p:set>
-                                      <p:cBhvr>
-                                        <p:cTn id="93" dur="1" fill="hold">
-                                          <p:stCondLst>
-                                            <p:cond delay="0"/>
-                                          </p:stCondLst>
-                                        </p:cTn>
-                                        <p:tgtEl>
-                                          <p:spTgt spid="31"/>
-                                        </p:tgtEl>
-                                        <p:attrNameLst>
-                                          <p:attrName>style.visibility</p:attrName>
-                                        </p:attrNameLst>
-                                      </p:cBhvr>
-                                      <p:to>
-                                        <p:strVal val="visible"/>
-                                      </p:to>
-                                    </p:set>
-                                    <p:animEffect transition="in" filter="fade">
-                                      <p:cBhvr>
-                                        <p:cTn id="94" dur="450"/>
-                                        <p:tgtEl>
-                                          <p:spTgt spid="31"/>
-                                        </p:tgtEl>
-                                      </p:cBhvr>
-                                    </p:animEffect>
-                                  </p:childTnLst>
-                                </p:cTn>
-                              </p:par>
-                              <p:par>
-                                <p:cTn id="95" presetID="10" presetClass="entr" presetSubtype="0" fill="hold" grpId="0" nodeType="afterEffect">
-                                  <p:stCondLst>
-                                    <p:cond delay="1300"/>
-                                  </p:stCondLst>
-                                  <p:childTnLst>
-                                    <p:set>
-                                      <p:cBhvr>
-                                        <p:cTn id="96" dur="1" fill="hold">
-                                          <p:stCondLst>
-                                            <p:cond delay="0"/>
-                                          </p:stCondLst>
-                                        </p:cTn>
-                                        <p:tgtEl>
-                                          <p:spTgt spid="32"/>
-                                        </p:tgtEl>
-                                        <p:attrNameLst>
-                                          <p:attrName>style.visibility</p:attrName>
-                                        </p:attrNameLst>
-                                      </p:cBhvr>
-                                      <p:to>
-                                        <p:strVal val="visible"/>
-                                      </p:to>
-                                    </p:set>
-                                    <p:animEffect transition="in" filter="fade">
-                                      <p:cBhvr>
-                                        <p:cTn id="97" dur="450"/>
-                                        <p:tgtEl>
-                                          <p:spTgt spid="32"/>
-                                        </p:tgtEl>
-                                      </p:cBhvr>
-                                    </p:animEffect>
-                                  </p:childTnLst>
-                                </p:cTn>
-                              </p:par>
-                              <p:par>
-                                <p:cTn id="98" presetID="10" presetClass="entr" presetSubtype="0" fill="hold" grpId="0" nodeType="afterEffect">
-                                  <p:stCondLst>
-                                    <p:cond delay="1300"/>
-                                  </p:stCondLst>
-                                  <p:childTnLst>
-                                    <p:set>
-                                      <p:cBhvr>
-                                        <p:cTn id="99" dur="1" fill="hold">
-                                          <p:stCondLst>
-                                            <p:cond delay="0"/>
-                                          </p:stCondLst>
-                                        </p:cTn>
-                                        <p:tgtEl>
-                                          <p:spTgt spid="33"/>
-                                        </p:tgtEl>
-                                        <p:attrNameLst>
-                                          <p:attrName>style.visibility</p:attrName>
-                                        </p:attrNameLst>
-                                      </p:cBhvr>
-                                      <p:to>
-                                        <p:strVal val="visible"/>
-                                      </p:to>
-                                    </p:set>
-                                    <p:animEffect transition="in" filter="fade">
-                                      <p:cBhvr>
-                                        <p:cTn id="100" dur="450"/>
-                                        <p:tgtEl>
-                                          <p:spTgt spid="33"/>
-                                        </p:tgtEl>
-                                      </p:cBhvr>
-                                    </p:animEffect>
-                                  </p:childTnLst>
-                                </p:cTn>
-                              </p:par>
-                            </p:childTnLst>
-                          </p:cTn>
-                        </p:par>
-                      </p:childTnLst>
-                    </p:cTn>
-                  </p:par>
-                </p:childTnLst>
-              </p:cTn>
-              <p:prevCondLst>
-                <p:cond evt="onPrev" delay="0">
-                  <p:tgtEl>
-                    <p:sldTgt/>
-                  </p:tgtEl>
-                </p:cond>
-              </p:prevCondLst>
-              <p:nextCondLst>
-                <p:cond evt="onNext" delay="0">
-                  <p:tgtEl>
-                    <p:sldTgt/>
-                  </p:tgtEl>
-                </p:cond>
-              </p:nextCondLst>
-            </p:seq>
-          </p:childTnLst>
-        </p:cTn>
-      </p:par>
-    </p:tnLst>
-    <p:bldLst>
-      <p:bldP spid="2" grpId="0" animBg="1"/>
-      <p:bldP spid="3" grpId="0" animBg="1"/>
-      <p:bldP spid="4" grpId="0" animBg="1"/>
-      <p:bldP spid="5" grpId="0" animBg="1"/>
-      <p:bldP spid="6" grpId="0" animBg="1"/>
-      <p:bldP spid="7" grpId="0" animBg="1"/>
-      <p:bldP spid="8" grpId="0" animBg="1"/>
-      <p:bldP spid="9" grpId="0" animBg="1"/>
-      <p:bldP spid="10" grpId="0" animBg="1"/>
-      <p:bldP spid="11" grpId="0" animBg="1"/>
-      <p:bldP spid="12" grpId="0" animBg="1"/>
-      <p:bldP spid="13" grpId="0" animBg="1"/>
-      <p:bldP spid="14" grpId="0" animBg="1"/>
-      <p:bldP spid="15" grpId="0" animBg="1"/>
-      <p:bldP spid="16" grpId="0" animBg="1"/>
-      <p:bldP spid="17" grpId="0" animBg="1"/>
-      <p:bldP spid="18" grpId="0" animBg="1"/>
-      <p:bldP spid="19" grpId="0" animBg="1"/>
-      <p:bldP spid="20" grpId="0" animBg="1"/>
-      <p:bldP spid="21" grpId="0" animBg="1"/>
-      <p:bldP spid="22" grpId="0" animBg="1"/>
-      <p:bldP spid="23" grpId="0" animBg="1"/>
-      <p:bldP spid="24" grpId="0" animBg="1"/>
-      <p:bldP spid="25" grpId="0" animBg="1"/>
-      <p:bldP spid="26" grpId="0" animBg="1"/>
-      <p:bldP spid="27" grpId="0" animBg="1"/>
-      <p:bldP spid="28" grpId="0" animBg="1"/>
-      <p:bldP spid="29" grpId="0" animBg="1"/>
-      <p:bldP spid="30" grpId="0" animBg="1"/>
-      <p:bldP spid="31" grpId="0" animBg="1"/>
-      <p:bldP spid="32" grpId="0" animBg="1"/>
-      <p:bldP spid="33" grpId="0" animBg="1"/>
     </p:bldLst>
   </p:timing>
 </p:sld>
